--- a/From Architecture to Terraform Workshop.pptx
+++ b/From Architecture to Terraform Workshop.pptx
@@ -4,6 +4,9 @@
   <p:sldMasterIdLst>
     <p:sldMasterId id="2147483648" r:id="rId1"/>
   </p:sldMasterIdLst>
+  <p:notesMasterIdLst>
+    <p:notesMasterId r:id="rId24"/>
+  </p:notesMasterIdLst>
   <p:sldIdLst>
     <p:sldId id="256" r:id="rId2"/>
     <p:sldId id="257" r:id="rId3"/>
@@ -28,9 +31,6 @@
     <p:sldId id="276" r:id="rId22"/>
     <p:sldId id="277" r:id="rId23"/>
   </p:sldIdLst>
-  <p:notesMasterIdLst>
-    <p:notesMasterId r:id="rId24"/>
-  </p:notesMasterIdLst>
   <p:sldSz cx="12192000" cy="6858000"/>
   <p:notesSz cx="6858000" cy="12192000"/>
   <p:defaultTextStyle>
@@ -125,6 +125,11 @@
       </a:defRPr>
     </a:lvl9pPr>
   </p:defaultTextStyle>
+  <p:extLst>
+    <p:ext uri="{EFAFB233-063F-42B5-8137-9DF3F51BA10A}">
+      <p15:sldGuideLst xmlns:p15="http://schemas.microsoft.com/office/powerpoint/2012/main"/>
+    </p:ext>
+  </p:extLst>
 </p:presentation>
 </file>
 
@@ -150,234 +155,10 @@
           <a:chExt cx="0" cy="0"/>
         </a:xfrm>
       </p:grpSpPr>
-      <p:sp>
-        <p:nvSpPr>
-          <p:cNvPr id="2" name="Header Placeholder 1"/>
-          <p:cNvSpPr>
-            <a:spLocks noGrp="1"/>
-          </p:cNvSpPr>
-          <p:nvPr>
-            <p:ph type="hdr" sz="quarter"/>
-          </p:nvPr>
-        </p:nvSpPr>
-        <p:spPr>
-          <a:xfrm>
-            <a:off x="0" y="0"/>
-            <a:ext cx="2971800" cy="458788"/>
-          </a:xfrm>
-          <a:prstGeom prst="rect">
-            <a:avLst/>
-          </a:prstGeom>
-        </p:spPr>
-        <p:txBody>
-          <a:bodyPr vert="horz" lIns="91440" tIns="45720" rIns="91440" bIns="45720" rtlCol="0"/>
-          <a:lstStyle>
-            <a:lvl1pPr algn="l">
-              <a:defRPr sz="1200"/>
-            </a:lvl1pPr>
-          </a:lstStyle>
-          <a:p>
-            <a:endParaRPr lang="en-US"/>
-          </a:p>
-        </p:txBody>
-      </p:sp>
-      <p:sp>
-        <p:nvSpPr>
-          <p:cNvPr id="3" name="Date Placeholder 2"/>
-          <p:cNvSpPr>
-            <a:spLocks noGrp="1"/>
-          </p:cNvSpPr>
-          <p:nvPr>
-            <p:ph type="dt" idx="1"/>
-          </p:nvPr>
-        </p:nvSpPr>
-        <p:spPr>
-          <a:xfrm>
-            <a:off x="3884613" y="0"/>
-            <a:ext cx="2971800" cy="458788"/>
-          </a:xfrm>
-          <a:prstGeom prst="rect">
-            <a:avLst/>
-          </a:prstGeom>
-        </p:spPr>
-        <p:txBody>
-          <a:bodyPr vert="horz" lIns="91440" tIns="45720" rIns="91440" bIns="45720" rtlCol="0"/>
-          <a:lstStyle>
-            <a:lvl1pPr algn="r">
-              <a:defRPr sz="1200"/>
-            </a:lvl1pPr>
-          </a:lstStyle>
-          <a:p>
-            <a:fld id="{5282F153-3F37-0F45-9E97-73ACFA13230C}" type="datetimeFigureOut">
-              <a:rPr lang="en-US"/>
-              <a:t>7/23/19</a:t>
-            </a:fld>
-            <a:endParaRPr lang="en-US"/>
-          </a:p>
-        </p:txBody>
-      </p:sp>
-      <p:sp>
-        <p:nvSpPr>
-          <p:cNvPr id="4" name="Slide Image Placeholder 3"/>
-          <p:cNvSpPr>
-            <a:spLocks noGrp="1" noRot="1" noChangeAspect="1"/>
-          </p:cNvSpPr>
-          <p:nvPr>
-            <p:ph type="sldImg" idx="2"/>
-          </p:nvPr>
-        </p:nvSpPr>
-        <p:spPr>
-          <a:xfrm>
-            <a:off x="685800" y="1143000"/>
-            <a:ext cx="5486400" cy="3086100"/>
-          </a:xfrm>
-          <a:prstGeom prst="rect">
-            <a:avLst/>
-          </a:prstGeom>
-          <a:noFill/>
-          <a:ln w="12700">
-            <a:solidFill>
-              <a:prstClr val="black"/>
-            </a:solidFill>
-          </a:ln>
-        </p:spPr>
-        <p:txBody>
-          <a:bodyPr vert="horz" lIns="91440" tIns="45720" rIns="91440" bIns="45720" rtlCol="0" anchor="ctr"/>
-          <a:lstStyle/>
-          <a:p>
-            <a:endParaRPr lang="en-US"/>
-          </a:p>
-        </p:txBody>
-      </p:sp>
-      <p:sp>
-        <p:nvSpPr>
-          <p:cNvPr id="5" name="Notes Placeholder 4"/>
-          <p:cNvSpPr>
-            <a:spLocks noGrp="1"/>
-          </p:cNvSpPr>
-          <p:nvPr>
-            <p:ph type="body" sz="quarter" idx="3"/>
-          </p:nvPr>
-        </p:nvSpPr>
-        <p:spPr>
-          <a:xfrm>
-            <a:off x="685800" y="4400550"/>
-            <a:ext cx="5486400" cy="3600450"/>
-          </a:xfrm>
-          <a:prstGeom prst="rect">
-            <a:avLst/>
-          </a:prstGeom>
-        </p:spPr>
-        <p:txBody>
-          <a:bodyPr vert="horz" lIns="91440" tIns="45720" rIns="91440" bIns="45720" rtlCol="0"/>
-          <a:lstStyle/>
-          <a:p>
-            <a:pPr lvl="0"/>
-            <a:r>
-              <a:rPr lang="en-US"/>
-              <a:t>Click to edit Master text styles</a:t>
-            </a:r>
-          </a:p>
-          <a:p>
-            <a:pPr lvl="1"/>
-            <a:r>
-              <a:rPr lang="en-US"/>
-              <a:t>Second level</a:t>
-            </a:r>
-          </a:p>
-          <a:p>
-            <a:pPr lvl="2"/>
-            <a:r>
-              <a:rPr lang="en-US"/>
-              <a:t>Third level</a:t>
-            </a:r>
-          </a:p>
-          <a:p>
-            <a:pPr lvl="3"/>
-            <a:r>
-              <a:rPr lang="en-US"/>
-              <a:t>Fourth level</a:t>
-            </a:r>
-          </a:p>
-          <a:p>
-            <a:pPr lvl="4"/>
-            <a:r>
-              <a:rPr lang="en-US"/>
-              <a:t>Fifth level</a:t>
-            </a:r>
-          </a:p>
-        </p:txBody>
-      </p:sp>
-      <p:sp>
-        <p:nvSpPr>
-          <p:cNvPr id="6" name="Footer Placeholder 5"/>
-          <p:cNvSpPr>
-            <a:spLocks noGrp="1"/>
-          </p:cNvSpPr>
-          <p:nvPr>
-            <p:ph type="ftr" sz="quarter" idx="4"/>
-          </p:nvPr>
-        </p:nvSpPr>
-        <p:spPr>
-          <a:xfrm>
-            <a:off x="0" y="8685213"/>
-            <a:ext cx="2971800" cy="458787"/>
-          </a:xfrm>
-          <a:prstGeom prst="rect">
-            <a:avLst/>
-          </a:prstGeom>
-        </p:spPr>
-        <p:txBody>
-          <a:bodyPr vert="horz" lIns="91440" tIns="45720" rIns="91440" bIns="45720" rtlCol="0" anchor="b"/>
-          <a:lstStyle>
-            <a:lvl1pPr algn="l">
-              <a:defRPr sz="1200"/>
-            </a:lvl1pPr>
-          </a:lstStyle>
-          <a:p>
-            <a:endParaRPr lang="en-US"/>
-          </a:p>
-        </p:txBody>
-      </p:sp>
-      <p:sp>
-        <p:nvSpPr>
-          <p:cNvPr id="7" name="Slide Number Placeholder 6"/>
-          <p:cNvSpPr>
-            <a:spLocks noGrp="1"/>
-          </p:cNvSpPr>
-          <p:nvPr>
-            <p:ph type="sldNum" sz="quarter" idx="5"/>
-          </p:nvPr>
-        </p:nvSpPr>
-        <p:spPr>
-          <a:xfrm>
-            <a:off x="3884613" y="8685213"/>
-            <a:ext cx="2971800" cy="458787"/>
-          </a:xfrm>
-          <a:prstGeom prst="rect">
-            <a:avLst/>
-          </a:prstGeom>
-        </p:spPr>
-        <p:txBody>
-          <a:bodyPr vert="horz" lIns="91440" tIns="45720" rIns="91440" bIns="45720" rtlCol="0" anchor="b"/>
-          <a:lstStyle>
-            <a:lvl1pPr algn="r">
-              <a:defRPr sz="1200"/>
-            </a:lvl1pPr>
-          </a:lstStyle>
-          <a:p>
-            <a:fld id="{CE5E9CC1-C706-0F49-92D6-E571CC5EEA8F}" type="slidenum">
-              <a:rPr lang="en-US"/>
-              <a:t>‹#›</a:t>
-            </a:fld>
-            <a:endParaRPr lang="en-US"/>
-          </a:p>
-        </p:txBody>
-      </p:sp>
     </p:spTree>
     <p:extLst>
       <p:ext uri="{BB962C8B-B14F-4D97-AF65-F5344CB8AC3E}">
-        <p14:creationId xmlns:p14="http://schemas.microsoft.com/office/powerpoint/2010/main" val="1024086991"/>
+        <p14:creationId xmlns:p14="http://schemas.microsoft.com/office/powerpoint/2010/main" val="1948448219"/>
       </p:ext>
     </p:extLst>
   </p:cSld>
@@ -525,7 +306,6 @@
               <a:rPr lang="en-US" dirty="0"/>
               <a:t>Welcome. Today is not a talk. You will do five short labs, and each one ends with a debrief. Expect to have code running in under fifteen minutes. (30 seconds)</a:t>
             </a:r>
-            <a:endParaRPr lang="en-US" dirty="0"/>
           </a:p>
         </p:txBody>
       </p:sp>
@@ -613,7 +393,6 @@
               <a:rPr lang="en-US" dirty="0"/>
               <a:t>Lab 2 runs 10:25 to 10:50. Hands-on until 10:46, then a four-minute debrief. Part A is mostly waiting; point people at the prompt file and its rules about assumptions. Part B is the heart of the lab. If the room is behind at 10:45, skip Part C.</a:t>
             </a:r>
-            <a:endParaRPr lang="en-US" dirty="0"/>
           </a:p>
         </p:txBody>
       </p:sp>
@@ -701,7 +480,6 @@
               <a:rPr lang="en-US" dirty="0"/>
               <a:t>Tally findings by type on the board. Tell them Lab 3 will show how many problems the machine finds. Be honest about determinism: AI will not produce byte-identical YAML twice. What stays stable is the structure, because the schema constrains it, and because the YAML is reviewed and committed before anything builds from it. (4 minutes)</a:t>
             </a:r>
-            <a:endParaRPr lang="en-US" dirty="0"/>
           </a:p>
         </p:txBody>
       </p:sp>
@@ -789,7 +567,6 @@
               <a:rPr lang="en-US" dirty="0"/>
               <a:t>Lab 3 runs 10:50 to 11:10. Hands-on until 11:07, then a three-minute debrief. Run git add infra before the second generation, and run the check before terraform init. The placeholder-state warning is expected. Azure attendees run plan; others stop after tflint.</a:t>
             </a:r>
-            <a:endParaRPr lang="en-US" dirty="0"/>
           </a:p>
         </p:txBody>
       </p:sp>
@@ -877,7 +654,6 @@
               <a:rPr lang="en-US" dirty="0"/>
               <a:t>Show the six flaws that passed the generator and let the room sit with the fact that the output is valid Terraform containing wrong values. Schema errors are long and repetitive; the useful line is buried, so search for the field name. (3 minutes)</a:t>
             </a:r>
-            <a:endParaRPr lang="en-US" dirty="0"/>
           </a:p>
         </p:txBody>
       </p:sp>
@@ -965,7 +741,6 @@
               <a:rPr lang="en-US" dirty="0"/>
               <a:t>Five minutes. Reset stragglers: anyone who failed terraform init or never got a spec should copy the reference spec and regenerate.</a:t>
             </a:r>
-            <a:endParaRPr lang="en-US" dirty="0"/>
           </a:p>
         </p:txBody>
       </p:sp>
@@ -1053,7 +828,6 @@
               <a:rPr lang="en-US" dirty="0"/>
               <a:t>Lab 4 runs 11:15 to 11:35. Hands-on until 11:32, then a three-minute debrief. This lab has the highest dropout risk; opening the solution is a normal choice. The four touch points are the whole lesson. The common mistake is a misspelled helper function: copy the topic script and change as little as possible.</a:t>
             </a:r>
-            <a:endParaRPr lang="en-US" dirty="0"/>
           </a:p>
         </p:txBody>
       </p:sp>
@@ -1141,7 +915,6 @@
               <a:rPr lang="en-US" dirty="0"/>
               <a:t>Adding a type needed no AI at all. Security defaults live in the action script so they are identical every run; the spec can only ask for things the script allows. Ask for one standard they would encode this way first. (3 minutes)</a:t>
             </a:r>
-            <a:endParaRPr lang="en-US" dirty="0"/>
           </a:p>
         </p:txBody>
       </p:sp>
@@ -1229,7 +1002,6 @@
               <a:rPr lang="en-US" dirty="0"/>
               <a:t>Lab 5 runs 11:35 to 11:50. Hands-on until 11:47, then a three-minute debrief. The plain diff touches every generated file because each header records the SHA-256 of the spec; that is traceability, and the -I filter removes the noise. After filtering, only environments\prd.tfvars should differ. robocopy returns non-zero exit codes on success.</a:t>
             </a:r>
-            <a:endParaRPr lang="en-US" dirty="0"/>
           </a:p>
         </p:txBody>
       </p:sp>
@@ -1317,7 +1089,6 @@
               <a:rPr lang="en-US" dirty="0"/>
               <a:t>Compare this diff to the one from Lab 1. One sentence of intent became one value in one file. (3 minutes)</a:t>
             </a:r>
-            <a:endParaRPr lang="en-US" dirty="0"/>
           </a:p>
         </p:txBody>
       </p:sp>
@@ -1405,7 +1176,6 @@
               <a:rPr lang="en-US" dirty="0"/>
               <a:t>Give the room five minutes to fill out the worksheet individually (it is the last table in the lab guide). Then they compare with a neighbor.</a:t>
             </a:r>
-            <a:endParaRPr lang="en-US" dirty="0"/>
           </a:p>
         </p:txBody>
       </p:sp>
@@ -1493,7 +1263,6 @@
               <a:rPr lang="en-US" dirty="0"/>
               <a:t>The value stream mapping story. Most new services needed the same components, yet each one took about two weeks, and development could not start until the infrastructure existed. The bottleneck was human assembly work, not technology. (45 seconds)</a:t>
             </a:r>
-            <a:endParaRPr lang="en-US" dirty="0"/>
           </a:p>
         </p:txBody>
       </p:sp>
@@ -1581,7 +1350,6 @@
               <a:rPr lang="en-US" dirty="0"/>
               <a:t>Take two or three answers from the room. Resist giving advice; let attendees hear each other. (3 minutes)</a:t>
             </a:r>
-            <a:endParaRPr lang="en-US" dirty="0"/>
           </a:p>
         </p:txBody>
       </p:sp>
@@ -1669,7 +1437,6 @@
               <a:rPr lang="en-US" dirty="0"/>
               <a:t>Close with the line from the talk: AI handles the fuzzy work, scripts handle the deterministic work, engineers handle judgment. (1 minute)</a:t>
             </a:r>
-            <a:endParaRPr lang="en-US" dirty="0"/>
           </a:p>
         </p:txBody>
       </p:sp>
@@ -1757,7 +1524,6 @@
               <a:rPr lang="en-US" dirty="0"/>
               <a:t>Thank the room. Remind them to clean up the infra folder, and point them at the adapting and extending guides. (2 minutes)</a:t>
             </a:r>
-            <a:endParaRPr lang="en-US" dirty="0"/>
           </a:p>
         </p:txBody>
       </p:sp>
@@ -1845,7 +1611,6 @@
               <a:rPr lang="en-US" dirty="0"/>
               <a:t>The claim, the silence in the room, and the prototype that appeared to prove it. Let the success land; the next slide breaks it. (60 seconds)</a:t>
             </a:r>
-            <a:endParaRPr lang="en-US" dirty="0"/>
           </a:p>
         </p:txBody>
       </p:sp>
@@ -1933,7 +1698,6 @@
               <a:rPr lang="en-US" dirty="0"/>
               <a:t>Same input, different Terraform. Both versions were plausible; neither could be compared with the other. You cannot review a diff that changes when intent has not. This is what you will see for yourselves in Lab 1. (45 seconds)</a:t>
             </a:r>
-            <a:endParaRPr lang="en-US" dirty="0"/>
           </a:p>
         </p:txBody>
       </p:sp>
@@ -2021,7 +1785,6 @@
               <a:rPr lang="en-US" dirty="0"/>
               <a:t>The two-stage pipeline. AI reads human-written architecture and fills a structured spec. A script turns the spec into Terraform, the same way every time. Engineers review at two gates: the YAML and the plan. Say this slide out loud once and move on; the labs teach it. (90 seconds)</a:t>
             </a:r>
-            <a:endParaRPr lang="en-US" dirty="0"/>
           </a:p>
         </p:txBody>
       </p:sp>
@@ -2109,7 +1872,6 @@
               <a:rPr lang="en-US" dirty="0"/>
               <a:t>How the workshop works: short labs, a Notice box in each, and a debrief after each. Using a fallback file is fine; nobody should be stuck. (30 seconds)</a:t>
             </a:r>
-            <a:endParaRPr lang="en-US" dirty="0"/>
           </a:p>
         </p:txBody>
       </p:sp>
@@ -2197,7 +1959,6 @@
               <a:rPr lang="en-US" dirty="0"/>
               <a:t>Put the preflight script on screen and walk the room. Pair anyone with a MISSING line. State the Azure rule once: with a subscription you run terraform plan; without one you stop after init, validate and tflint. (5 minutes)</a:t>
             </a:r>
-            <a:endParaRPr lang="en-US" dirty="0"/>
           </a:p>
         </p:txBody>
       </p:sp>
@@ -2285,7 +2046,6 @@
               <a:rPr lang="en-US" dirty="0"/>
               <a:t>Lab 1 runs 10:10 to 10:25. Hands-on until 10:22, then a three-minute debrief. Start run 2 as soon as run 1 finishes. git diff exits with code 1 when files differ; that is expected.</a:t>
             </a:r>
-            <a:endParaRPr lang="en-US" dirty="0"/>
           </a:p>
         </p:txBody>
       </p:sp>
@@ -2373,7 +2133,6 @@
               <a:rPr lang="en-US" dirty="0"/>
               <a:t>Collect the differences on a board: names, ordering, tags, comments, structure. Both runs are usually plausible; neither is reviewable against the other. Land the point: the output was fine, it was not reproducible. Infrastructure needs reproducible. (3 minutes)</a:t>
             </a:r>
-            <a:endParaRPr lang="en-US" dirty="0"/>
           </a:p>
         </p:txBody>
       </p:sp>
@@ -2451,6 +2210,7 @@
         <a:solidFill>
           <a:srgbClr val="F7F6F1"/>
         </a:solidFill>
+        <a:effectLst/>
       </p:bgPr>
     </p:bg>
     <p:spTree>
@@ -2470,7 +2230,9 @@
       <p:sp>
         <p:nvSpPr>
           <p:cNvPr id="2" name="Title Placeholder 1"/>
-          <p:cNvSpPr/>
+          <p:cNvSpPr>
+            <a:spLocks noGrp="1"/>
+          </p:cNvSpPr>
           <p:nvPr>
             <p:ph type="title"/>
           </p:nvPr>
@@ -2489,7 +2251,7 @@
         <p:txBody>
           <a:bodyPr wrap="square" lIns="0" tIns="0" rIns="0" bIns="0" rtlCol="0" anchor="t"/>
           <a:lstStyle>
-            <a:lvl1pPr algn="l" indent="0" marL="0">
+            <a:lvl1pPr marL="0" indent="0" algn="l">
               <a:lnSpc>
                 <a:spcPct val="115000"/>
               </a:lnSpc>
@@ -2505,7 +2267,7 @@
             </a:lvl1pPr>
           </a:lstStyle>
           <a:p>
-            <a:pPr algn="l" indent="0" marL="0">
+            <a:pPr marL="0" indent="0" algn="l">
               <a:lnSpc>
                 <a:spcPct val="115000"/>
               </a:lnSpc>
@@ -2518,9 +2280,11 @@
       <p:sp>
         <p:nvSpPr>
           <p:cNvPr id="3" name="Text Placeholder 2"/>
-          <p:cNvSpPr/>
+          <p:cNvSpPr>
+            <a:spLocks noGrp="1"/>
+          </p:cNvSpPr>
           <p:nvPr>
-            <p:ph idx="101" type="body"/>
+            <p:ph type="body" idx="101"/>
           </p:nvPr>
         </p:nvSpPr>
         <p:spPr>
@@ -2537,7 +2301,7 @@
         <p:txBody>
           <a:bodyPr wrap="square" lIns="0" tIns="0" rIns="0" bIns="0" rtlCol="0" anchor="t"/>
           <a:lstStyle>
-            <a:lvl1pPr algn="l" indent="0" marL="0">
+            <a:lvl1pPr marL="0" indent="0" algn="l">
               <a:lnSpc>
                 <a:spcPct val="140000"/>
               </a:lnSpc>
@@ -2553,7 +2317,7 @@
             </a:lvl1pPr>
           </a:lstStyle>
           <a:p>
-            <a:pPr algn="l" indent="0" marL="0">
+            <a:pPr marL="0" indent="0" algn="l">
               <a:lnSpc>
                 <a:spcPct val="140000"/>
               </a:lnSpc>
@@ -2579,6 +2343,7 @@
         <a:solidFill>
           <a:srgbClr val="F7F6F1"/>
         </a:solidFill>
+        <a:effectLst/>
       </p:bgPr>
     </p:bg>
     <p:spTree>
@@ -2598,7 +2363,9 @@
       <p:sp>
         <p:nvSpPr>
           <p:cNvPr id="2" name="Title Placeholder 1"/>
-          <p:cNvSpPr/>
+          <p:cNvSpPr>
+            <a:spLocks noGrp="1"/>
+          </p:cNvSpPr>
           <p:nvPr>
             <p:ph type="title"/>
           </p:nvPr>
@@ -2617,7 +2384,7 @@
         <p:txBody>
           <a:bodyPr wrap="square" lIns="0" tIns="0" rIns="0" bIns="0" rtlCol="0" anchor="t"/>
           <a:lstStyle>
-            <a:lvl1pPr algn="l" indent="0" marL="0">
+            <a:lvl1pPr marL="0" indent="0" algn="l">
               <a:lnSpc>
                 <a:spcPct val="115000"/>
               </a:lnSpc>
@@ -2633,7 +2400,7 @@
             </a:lvl1pPr>
           </a:lstStyle>
           <a:p>
-            <a:pPr algn="l" indent="0" marL="0">
+            <a:pPr marL="0" indent="0" algn="l">
               <a:lnSpc>
                 <a:spcPct val="115000"/>
               </a:lnSpc>
@@ -2646,9 +2413,11 @@
       <p:sp>
         <p:nvSpPr>
           <p:cNvPr id="3" name="Text Placeholder 2"/>
-          <p:cNvSpPr/>
+          <p:cNvSpPr>
+            <a:spLocks noGrp="1"/>
+          </p:cNvSpPr>
           <p:nvPr>
-            <p:ph idx="101" type="body"/>
+            <p:ph type="body" idx="101"/>
           </p:nvPr>
         </p:nvSpPr>
         <p:spPr>
@@ -2665,7 +2434,7 @@
         <p:txBody>
           <a:bodyPr wrap="square" lIns="0" tIns="0" rIns="0" bIns="0" rtlCol="0" anchor="t"/>
           <a:lstStyle>
-            <a:lvl1pPr algn="l" indent="0" marL="0">
+            <a:lvl1pPr marL="0" indent="0" algn="l">
               <a:lnSpc>
                 <a:spcPct val="140000"/>
               </a:lnSpc>
@@ -2681,7 +2450,7 @@
             </a:lvl1pPr>
           </a:lstStyle>
           <a:p>
-            <a:pPr algn="l" indent="0" marL="0">
+            <a:pPr marL="0" indent="0" algn="l">
               <a:lnSpc>
                 <a:spcPct val="140000"/>
               </a:lnSpc>
@@ -2960,6 +2729,7 @@
         <a:solidFill>
           <a:srgbClr val="0E1A2B"/>
         </a:solidFill>
+        <a:effectLst/>
       </p:bgPr>
     </p:bg>
     <p:spTree>
@@ -2999,14 +2769,14 @@
           </a:bodyPr>
           <a:lstStyle/>
           <a:p>
-            <a:pPr algn="l" indent="0" marL="0">
+            <a:pPr marL="0" indent="0" algn="l">
               <a:lnSpc>
                 <a:spcPts val="1960"/>
               </a:lnSpc>
               <a:buNone/>
             </a:pPr>
             <a:r>
-              <a:rPr lang="en-US" sz="1400" spc="100" kern="0" dirty="0">
+              <a:rPr lang="en-US" sz="1400" kern="0" spc="100" dirty="0">
                 <a:solidFill>
                   <a:srgbClr val="7DB0FF"/>
                 </a:solidFill>
@@ -3023,7 +2793,9 @@
       <p:sp>
         <p:nvSpPr>
           <p:cNvPr id="3" name="Text 1"/>
-          <p:cNvSpPr/>
+          <p:cNvSpPr>
+            <a:spLocks noGrp="1"/>
+          </p:cNvSpPr>
           <p:nvPr>
             <p:ph type="title"/>
           </p:nvPr>
@@ -3045,7 +2817,7 @@
           </a:bodyPr>
           <a:lstStyle/>
           <a:p>
-            <a:pPr algn="l" indent="0" marL="0">
+            <a:pPr marL="0" indent="0" algn="l">
               <a:lnSpc>
                 <a:spcPts val="6300"/>
               </a:lnSpc>
@@ -3065,7 +2837,7 @@
             <a:endParaRPr lang="en-US" sz="6000" dirty="0"/>
           </a:p>
           <a:p>
-            <a:pPr algn="l" indent="0" marL="0">
+            <a:pPr marL="0" indent="0" algn="l">
               <a:lnSpc>
                 <a:spcPts val="6300"/>
               </a:lnSpc>
@@ -3088,15 +2860,15 @@
       </p:sp>
       <p:pic>
         <p:nvPicPr>
-          <p:cNvPr id="4" name="Image 0" descr="line">    </p:cNvPr>
+          <p:cNvPr id="4" name="Image 0" descr="line"/>
           <p:cNvPicPr>
             <a:picLocks noChangeAspect="1"/>
           </p:cNvPicPr>
           <p:nvPr/>
         </p:nvPicPr>
         <p:blipFill>
-          <a:blip r:embed="rId1"/>
-          <a:srcRect l="0" r="0" t="0" b="0"/>
+          <a:blip r:embed="rId3"/>
+          <a:srcRect/>
           <a:stretch/>
         </p:blipFill>
         <p:spPr>
@@ -3132,7 +2904,7 @@
           </a:bodyPr>
           <a:lstStyle/>
           <a:p>
-            <a:pPr algn="l" indent="0" marL="0">
+            <a:pPr marL="0" indent="0" algn="l">
               <a:lnSpc>
                 <a:spcPts val="3360"/>
               </a:lnSpc>
@@ -3176,11 +2948,10 @@
           </a:bodyPr>
           <a:lstStyle/>
           <a:p>
-            <a:pPr algn="l" indent="0" marL="0">
+            <a:pPr>
               <a:lnSpc>
                 <a:spcPts val="1960"/>
               </a:lnSpc>
-              <a:buNone/>
             </a:pPr>
             <a:r>
               <a:rPr lang="en-US" sz="1400" dirty="0">
@@ -3191,7 +2962,7 @@
                 <a:ea typeface="Arial" pitchFamily="34" charset="-122"/>
                 <a:cs typeface="Arial" pitchFamily="34" charset="-120"/>
               </a:rPr>
-              <a:t>Chad Green · TaleLearnCode · [Event name] · [Date]</a:t>
+              <a:t>Chad Green · Senior Systems Architect · Jasper Engines &amp; Transmissions · AI Rising · 2026-10-19</a:t>
             </a:r>
             <a:endParaRPr lang="en-US" sz="1400" dirty="0"/>
           </a:p>
@@ -3213,6 +2984,7 @@
         <a:solidFill>
           <a:srgbClr val="0E1A2B"/>
         </a:solidFill>
+        <a:effectLst/>
       </p:bgPr>
     </p:bg>
     <p:spTree>
@@ -3252,14 +3024,14 @@
           </a:bodyPr>
           <a:lstStyle/>
           <a:p>
-            <a:pPr algn="l" indent="0" marL="0">
+            <a:pPr marL="0" indent="0" algn="l">
               <a:lnSpc>
                 <a:spcPts val="2240"/>
               </a:lnSpc>
               <a:buNone/>
             </a:pPr>
             <a:r>
-              <a:rPr lang="en-US" sz="1600" spc="100" kern="0" dirty="0">
+              <a:rPr lang="en-US" sz="1600" kern="0" spc="100" dirty="0">
                 <a:solidFill>
                   <a:srgbClr val="7DB0FF"/>
                 </a:solidFill>
@@ -3276,7 +3048,9 @@
       <p:sp>
         <p:nvSpPr>
           <p:cNvPr id="3" name="Text 1"/>
-          <p:cNvSpPr/>
+          <p:cNvSpPr>
+            <a:spLocks noGrp="1"/>
+          </p:cNvSpPr>
           <p:nvPr>
             <p:ph type="title"/>
           </p:nvPr>
@@ -3298,7 +3072,7 @@
           </a:bodyPr>
           <a:lstStyle/>
           <a:p>
-            <a:pPr algn="l" indent="0" marL="0">
+            <a:pPr marL="0" indent="0" algn="l">
               <a:lnSpc>
                 <a:spcPts val="5280"/>
               </a:lnSpc>
@@ -3342,7 +3116,7 @@
           </a:bodyPr>
           <a:lstStyle/>
           <a:p>
-            <a:pPr algn="l" indent="0" marL="0">
+            <a:pPr marL="0" indent="0" algn="l">
               <a:lnSpc>
                 <a:spcPts val="2700"/>
               </a:lnSpc>
@@ -3393,7 +3167,7 @@
           </a:bodyPr>
           <a:lstStyle/>
           <a:p>
-            <a:pPr algn="ctr" indent="0" marL="0">
+            <a:pPr marL="0" indent="0" algn="ctr">
               <a:lnSpc>
                 <a:spcPts val="2100"/>
               </a:lnSpc>
@@ -3444,7 +3218,7 @@
           </a:bodyPr>
           <a:lstStyle/>
           <a:p>
-            <a:pPr algn="ctr" indent="0" marL="0">
+            <a:pPr marL="0" indent="0" algn="ctr">
               <a:lnSpc>
                 <a:spcPts val="2100"/>
               </a:lnSpc>
@@ -3495,7 +3269,7 @@
           </a:bodyPr>
           <a:lstStyle/>
           <a:p>
-            <a:pPr algn="ctr" indent="0" marL="0">
+            <a:pPr marL="0" indent="0" algn="ctr">
               <a:lnSpc>
                 <a:spcPts val="2100"/>
               </a:lnSpc>
@@ -3543,7 +3317,7 @@
           </a:bodyPr>
           <a:lstStyle/>
           <a:p>
-            <a:pPr algn="ctr" indent="0" marL="0">
+            <a:pPr marL="0" indent="0" algn="ctr">
               <a:lnSpc>
                 <a:spcPts val="3360"/>
               </a:lnSpc>
@@ -3594,7 +3368,7 @@
           </a:bodyPr>
           <a:lstStyle/>
           <a:p>
-            <a:pPr algn="ctr" indent="0" marL="0">
+            <a:pPr marL="0" indent="0" algn="ctr">
               <a:lnSpc>
                 <a:spcPts val="3360"/>
               </a:lnSpc>
@@ -3638,7 +3412,7 @@
           </a:bodyPr>
           <a:lstStyle/>
           <a:p>
-            <a:pPr algn="l" indent="0" marL="0">
+            <a:pPr marL="0" indent="0" algn="l">
               <a:lnSpc>
                 <a:spcPts val="1960"/>
               </a:lnSpc>
@@ -3675,6 +3449,7 @@
         <a:solidFill>
           <a:srgbClr val="F7F6F1"/>
         </a:solidFill>
+        <a:effectLst/>
       </p:bgPr>
     </p:bg>
     <p:spTree>
@@ -3714,14 +3489,14 @@
           </a:bodyPr>
           <a:lstStyle/>
           <a:p>
-            <a:pPr algn="l" indent="0" marL="0">
+            <a:pPr marL="0" indent="0" algn="l">
               <a:lnSpc>
                 <a:spcPts val="1960"/>
               </a:lnSpc>
               <a:buNone/>
             </a:pPr>
             <a:r>
-              <a:rPr lang="en-US" sz="1400" spc="100" kern="0" dirty="0">
+              <a:rPr lang="en-US" sz="1400" kern="0" spc="100" dirty="0">
                 <a:solidFill>
                   <a:srgbClr val="2A64C9"/>
                 </a:solidFill>
@@ -3738,7 +3513,9 @@
       <p:sp>
         <p:nvSpPr>
           <p:cNvPr id="3" name="Text 1"/>
-          <p:cNvSpPr/>
+          <p:cNvSpPr>
+            <a:spLocks noGrp="1"/>
+          </p:cNvSpPr>
           <p:nvPr>
             <p:ph type="title"/>
           </p:nvPr>
@@ -3760,7 +3537,7 @@
           </a:bodyPr>
           <a:lstStyle/>
           <a:p>
-            <a:pPr algn="l" indent="0" marL="0">
+            <a:pPr marL="0" indent="0" algn="l">
               <a:lnSpc>
                 <a:spcPts val="3960"/>
               </a:lnSpc>
@@ -3807,6 +3584,13 @@
             <a:prstDash val="solid"/>
           </a:ln>
         </p:spPr>
+        <p:txBody>
+          <a:bodyPr/>
+          <a:lstStyle/>
+          <a:p>
+            <a:endParaRPr lang="en-US"/>
+          </a:p>
+        </p:txBody>
       </p:sp>
       <p:sp>
         <p:nvSpPr>
@@ -3831,7 +3615,7 @@
           </a:bodyPr>
           <a:lstStyle/>
           <a:p>
-            <a:pPr algn="l" indent="0" marL="0">
+            <a:pPr marL="0" indent="0" algn="l">
               <a:lnSpc>
                 <a:spcPts val="2520"/>
               </a:lnSpc>
@@ -3875,7 +3659,7 @@
           </a:bodyPr>
           <a:lstStyle/>
           <a:p>
-            <a:pPr algn="l" indent="0" marL="0">
+            <a:pPr marL="0" indent="0" algn="l">
               <a:lnSpc>
                 <a:spcPts val="2080"/>
               </a:lnSpc>
@@ -3922,6 +3706,13 @@
             <a:prstDash val="solid"/>
           </a:ln>
         </p:spPr>
+        <p:txBody>
+          <a:bodyPr/>
+          <a:lstStyle/>
+          <a:p>
+            <a:endParaRPr lang="en-US"/>
+          </a:p>
+        </p:txBody>
       </p:sp>
       <p:sp>
         <p:nvSpPr>
@@ -3946,7 +3737,7 @@
           </a:bodyPr>
           <a:lstStyle/>
           <a:p>
-            <a:pPr algn="l" indent="0" marL="0">
+            <a:pPr marL="0" indent="0" algn="l">
               <a:lnSpc>
                 <a:spcPts val="2520"/>
               </a:lnSpc>
@@ -3990,7 +3781,7 @@
           </a:bodyPr>
           <a:lstStyle/>
           <a:p>
-            <a:pPr algn="l" indent="0" marL="0">
+            <a:pPr marL="0" indent="0" algn="l">
               <a:lnSpc>
                 <a:spcPts val="2080"/>
               </a:lnSpc>
@@ -4037,6 +3828,13 @@
             <a:prstDash val="solid"/>
           </a:ln>
         </p:spPr>
+        <p:txBody>
+          <a:bodyPr/>
+          <a:lstStyle/>
+          <a:p>
+            <a:endParaRPr lang="en-US"/>
+          </a:p>
+        </p:txBody>
       </p:sp>
       <p:sp>
         <p:nvSpPr>
@@ -4061,7 +3859,7 @@
           </a:bodyPr>
           <a:lstStyle/>
           <a:p>
-            <a:pPr algn="l" indent="0" marL="0">
+            <a:pPr marL="0" indent="0" algn="l">
               <a:lnSpc>
                 <a:spcPts val="2520"/>
               </a:lnSpc>
@@ -4105,7 +3903,7 @@
           </a:bodyPr>
           <a:lstStyle/>
           <a:p>
-            <a:pPr algn="l" indent="0" marL="0">
+            <a:pPr marL="0" indent="0" algn="l">
               <a:lnSpc>
                 <a:spcPts val="2080"/>
               </a:lnSpc>
@@ -4152,6 +3950,13 @@
             <a:prstDash val="solid"/>
           </a:ln>
         </p:spPr>
+        <p:txBody>
+          <a:bodyPr/>
+          <a:lstStyle/>
+          <a:p>
+            <a:endParaRPr lang="en-US"/>
+          </a:p>
+        </p:txBody>
       </p:sp>
       <p:sp>
         <p:nvSpPr>
@@ -4176,7 +3981,7 @@
           </a:bodyPr>
           <a:lstStyle/>
           <a:p>
-            <a:pPr algn="l" indent="0" marL="0">
+            <a:pPr marL="0" indent="0" algn="l">
               <a:lnSpc>
                 <a:spcPts val="2520"/>
               </a:lnSpc>
@@ -4220,7 +4025,7 @@
           </a:bodyPr>
           <a:lstStyle/>
           <a:p>
-            <a:pPr algn="l" indent="0" marL="0">
+            <a:pPr marL="0" indent="0" algn="l">
               <a:lnSpc>
                 <a:spcPts val="2080"/>
               </a:lnSpc>
@@ -4268,7 +4073,7 @@
           </a:bodyPr>
           <a:lstStyle/>
           <a:p>
-            <a:pPr algn="l" indent="0" marL="0">
+            <a:pPr marL="0" indent="0" algn="l">
               <a:lnSpc>
                 <a:spcPts val="2500"/>
               </a:lnSpc>
@@ -4305,6 +4110,7 @@
         <a:solidFill>
           <a:srgbClr val="0E1A2B"/>
         </a:solidFill>
+        <a:effectLst/>
       </p:bgPr>
     </p:bg>
     <p:spTree>
@@ -4344,14 +4150,14 @@
           </a:bodyPr>
           <a:lstStyle/>
           <a:p>
-            <a:pPr algn="l" indent="0" marL="0">
+            <a:pPr marL="0" indent="0" algn="l">
               <a:lnSpc>
                 <a:spcPts val="2240"/>
               </a:lnSpc>
               <a:buNone/>
             </a:pPr>
             <a:r>
-              <a:rPr lang="en-US" sz="1600" spc="100" kern="0" dirty="0">
+              <a:rPr lang="en-US" sz="1600" kern="0" spc="100" dirty="0">
                 <a:solidFill>
                   <a:srgbClr val="7DB0FF"/>
                 </a:solidFill>
@@ -4368,7 +4174,9 @@
       <p:sp>
         <p:nvSpPr>
           <p:cNvPr id="3" name="Text 1"/>
-          <p:cNvSpPr/>
+          <p:cNvSpPr>
+            <a:spLocks noGrp="1"/>
+          </p:cNvSpPr>
           <p:nvPr>
             <p:ph type="title"/>
           </p:nvPr>
@@ -4390,7 +4198,7 @@
           </a:bodyPr>
           <a:lstStyle/>
           <a:p>
-            <a:pPr algn="l" indent="0" marL="0">
+            <a:pPr marL="0" indent="0" algn="l">
               <a:lnSpc>
                 <a:spcPts val="5280"/>
               </a:lnSpc>
@@ -4434,7 +4242,7 @@
           </a:bodyPr>
           <a:lstStyle/>
           <a:p>
-            <a:pPr algn="l" indent="0" marL="0">
+            <a:pPr marL="0" indent="0" algn="l">
               <a:lnSpc>
                 <a:spcPts val="2700"/>
               </a:lnSpc>
@@ -4485,7 +4293,7 @@
           </a:bodyPr>
           <a:lstStyle/>
           <a:p>
-            <a:pPr algn="ctr" indent="0" marL="0">
+            <a:pPr marL="0" indent="0" algn="ctr">
               <a:lnSpc>
                 <a:spcPts val="2100"/>
               </a:lnSpc>
@@ -4536,7 +4344,7 @@
           </a:bodyPr>
           <a:lstStyle/>
           <a:p>
-            <a:pPr algn="ctr" indent="0" marL="0">
+            <a:pPr marL="0" indent="0" algn="ctr">
               <a:lnSpc>
                 <a:spcPts val="2100"/>
               </a:lnSpc>
@@ -4587,7 +4395,7 @@
           </a:bodyPr>
           <a:lstStyle/>
           <a:p>
-            <a:pPr algn="ctr" indent="0" marL="0">
+            <a:pPr marL="0" indent="0" algn="ctr">
               <a:lnSpc>
                 <a:spcPts val="2100"/>
               </a:lnSpc>
@@ -4638,7 +4446,7 @@
           </a:bodyPr>
           <a:lstStyle/>
           <a:p>
-            <a:pPr algn="ctr" indent="0" marL="0">
+            <a:pPr marL="0" indent="0" algn="ctr">
               <a:lnSpc>
                 <a:spcPts val="2100"/>
               </a:lnSpc>
@@ -4686,7 +4494,7 @@
           </a:bodyPr>
           <a:lstStyle/>
           <a:p>
-            <a:pPr algn="ctr" indent="0" marL="0">
+            <a:pPr marL="0" indent="0" algn="ctr">
               <a:lnSpc>
                 <a:spcPts val="3360"/>
               </a:lnSpc>
@@ -4737,7 +4545,7 @@
           </a:bodyPr>
           <a:lstStyle/>
           <a:p>
-            <a:pPr algn="ctr" indent="0" marL="0">
+            <a:pPr marL="0" indent="0" algn="ctr">
               <a:lnSpc>
                 <a:spcPts val="3360"/>
               </a:lnSpc>
@@ -4781,7 +4589,7 @@
           </a:bodyPr>
           <a:lstStyle/>
           <a:p>
-            <a:pPr algn="l" indent="0" marL="0">
+            <a:pPr marL="0" indent="0" algn="l">
               <a:lnSpc>
                 <a:spcPts val="1960"/>
               </a:lnSpc>
@@ -4818,6 +4626,7 @@
         <a:solidFill>
           <a:srgbClr val="F7F6F1"/>
         </a:solidFill>
+        <a:effectLst/>
       </p:bgPr>
     </p:bg>
     <p:spTree>
@@ -4857,14 +4666,14 @@
           </a:bodyPr>
           <a:lstStyle/>
           <a:p>
-            <a:pPr algn="l" indent="0" marL="0">
+            <a:pPr marL="0" indent="0" algn="l">
               <a:lnSpc>
                 <a:spcPts val="1960"/>
               </a:lnSpc>
               <a:buNone/>
             </a:pPr>
             <a:r>
-              <a:rPr lang="en-US" sz="1400" spc="100" kern="0" dirty="0">
+              <a:rPr lang="en-US" sz="1400" kern="0" spc="100" dirty="0">
                 <a:solidFill>
                   <a:srgbClr val="2A64C9"/>
                 </a:solidFill>
@@ -4881,7 +4690,9 @@
       <p:sp>
         <p:nvSpPr>
           <p:cNvPr id="3" name="Text 1"/>
-          <p:cNvSpPr/>
+          <p:cNvSpPr>
+            <a:spLocks noGrp="1"/>
+          </p:cNvSpPr>
           <p:nvPr>
             <p:ph type="title"/>
           </p:nvPr>
@@ -4903,7 +4714,7 @@
           </a:bodyPr>
           <a:lstStyle/>
           <a:p>
-            <a:pPr algn="l" indent="0" marL="0">
+            <a:pPr marL="0" indent="0" algn="l">
               <a:lnSpc>
                 <a:spcPts val="3960"/>
               </a:lnSpc>
@@ -4950,6 +4761,13 @@
             <a:prstDash val="solid"/>
           </a:ln>
         </p:spPr>
+        <p:txBody>
+          <a:bodyPr/>
+          <a:lstStyle/>
+          <a:p>
+            <a:endParaRPr lang="en-US"/>
+          </a:p>
+        </p:txBody>
       </p:sp>
       <p:sp>
         <p:nvSpPr>
@@ -4974,7 +4792,7 @@
           </a:bodyPr>
           <a:lstStyle/>
           <a:p>
-            <a:pPr algn="l" indent="0" marL="0">
+            <a:pPr marL="0" indent="0" algn="l">
               <a:lnSpc>
                 <a:spcPts val="2800"/>
               </a:lnSpc>
@@ -5018,7 +4836,7 @@
           </a:bodyPr>
           <a:lstStyle/>
           <a:p>
-            <a:pPr algn="l" indent="0" marL="0">
+            <a:pPr marL="0" indent="0" algn="l">
               <a:lnSpc>
                 <a:spcPts val="2340"/>
               </a:lnSpc>
@@ -5065,6 +4883,13 @@
             <a:prstDash val="solid"/>
           </a:ln>
         </p:spPr>
+        <p:txBody>
+          <a:bodyPr/>
+          <a:lstStyle/>
+          <a:p>
+            <a:endParaRPr lang="en-US"/>
+          </a:p>
+        </p:txBody>
       </p:sp>
       <p:sp>
         <p:nvSpPr>
@@ -5089,7 +4914,7 @@
           </a:bodyPr>
           <a:lstStyle/>
           <a:p>
-            <a:pPr algn="l" indent="0" marL="0">
+            <a:pPr marL="0" indent="0" algn="l">
               <a:lnSpc>
                 <a:spcPts val="2800"/>
               </a:lnSpc>
@@ -5133,7 +4958,7 @@
           </a:bodyPr>
           <a:lstStyle/>
           <a:p>
-            <a:pPr algn="l" indent="0" marL="0">
+            <a:pPr marL="0" indent="0" algn="l">
               <a:lnSpc>
                 <a:spcPts val="2340"/>
               </a:lnSpc>
@@ -5180,6 +5005,13 @@
             <a:prstDash val="solid"/>
           </a:ln>
         </p:spPr>
+        <p:txBody>
+          <a:bodyPr/>
+          <a:lstStyle/>
+          <a:p>
+            <a:endParaRPr lang="en-US"/>
+          </a:p>
+        </p:txBody>
       </p:sp>
       <p:sp>
         <p:nvSpPr>
@@ -5204,7 +5036,7 @@
           </a:bodyPr>
           <a:lstStyle/>
           <a:p>
-            <a:pPr algn="l" indent="0" marL="0">
+            <a:pPr marL="0" indent="0" algn="l">
               <a:lnSpc>
                 <a:spcPts val="2800"/>
               </a:lnSpc>
@@ -5248,7 +5080,7 @@
           </a:bodyPr>
           <a:lstStyle/>
           <a:p>
-            <a:pPr algn="l" indent="0" marL="0">
+            <a:pPr marL="0" indent="0" algn="l">
               <a:lnSpc>
                 <a:spcPts val="2340"/>
               </a:lnSpc>
@@ -5296,7 +5128,7 @@
           </a:bodyPr>
           <a:lstStyle/>
           <a:p>
-            <a:pPr algn="l" indent="0" marL="0">
+            <a:pPr marL="0" indent="0" algn="l">
               <a:lnSpc>
                 <a:spcPts val="2750"/>
               </a:lnSpc>
@@ -5333,6 +5165,7 @@
         <a:solidFill>
           <a:srgbClr val="0E1A2B"/>
         </a:solidFill>
+        <a:effectLst/>
       </p:bgPr>
     </p:bg>
     <p:spTree>
@@ -5352,7 +5185,9 @@
       <p:sp>
         <p:nvSpPr>
           <p:cNvPr id="2" name="Text 0"/>
-          <p:cNvSpPr/>
+          <p:cNvSpPr>
+            <a:spLocks noGrp="1"/>
+          </p:cNvSpPr>
           <p:nvPr>
             <p:ph type="title"/>
           </p:nvPr>
@@ -5374,7 +5209,7 @@
           </a:bodyPr>
           <a:lstStyle/>
           <a:p>
-            <a:pPr algn="l" indent="0" marL="0">
+            <a:pPr marL="0" indent="0" algn="l">
               <a:lnSpc>
                 <a:spcPts val="10000"/>
               </a:lnSpc>
@@ -5418,7 +5253,7 @@
           </a:bodyPr>
           <a:lstStyle/>
           <a:p>
-            <a:pPr algn="l" indent="0" marL="0">
+            <a:pPr marL="0" indent="0" algn="l">
               <a:lnSpc>
                 <a:spcPts val="6720"/>
               </a:lnSpc>
@@ -5462,7 +5297,7 @@
           </a:bodyPr>
           <a:lstStyle/>
           <a:p>
-            <a:pPr algn="l" indent="0" marL="0">
+            <a:pPr marL="0" indent="0" algn="l">
               <a:lnSpc>
                 <a:spcPts val="1960"/>
               </a:lnSpc>
@@ -5499,6 +5334,7 @@
         <a:solidFill>
           <a:srgbClr val="0E1A2B"/>
         </a:solidFill>
+        <a:effectLst/>
       </p:bgPr>
     </p:bg>
     <p:spTree>
@@ -5538,14 +5374,14 @@
           </a:bodyPr>
           <a:lstStyle/>
           <a:p>
-            <a:pPr algn="l" indent="0" marL="0">
+            <a:pPr marL="0" indent="0" algn="l">
               <a:lnSpc>
                 <a:spcPts val="2240"/>
               </a:lnSpc>
               <a:buNone/>
             </a:pPr>
             <a:r>
-              <a:rPr lang="en-US" sz="1600" spc="100" kern="0" dirty="0">
+              <a:rPr lang="en-US" sz="1600" kern="0" spc="100" dirty="0">
                 <a:solidFill>
                   <a:srgbClr val="7DB0FF"/>
                 </a:solidFill>
@@ -5562,7 +5398,9 @@
       <p:sp>
         <p:nvSpPr>
           <p:cNvPr id="3" name="Text 1"/>
-          <p:cNvSpPr/>
+          <p:cNvSpPr>
+            <a:spLocks noGrp="1"/>
+          </p:cNvSpPr>
           <p:nvPr>
             <p:ph type="title"/>
           </p:nvPr>
@@ -5584,7 +5422,7 @@
           </a:bodyPr>
           <a:lstStyle/>
           <a:p>
-            <a:pPr algn="l" indent="0" marL="0">
+            <a:pPr marL="0" indent="0" algn="l">
               <a:lnSpc>
                 <a:spcPts val="5280"/>
               </a:lnSpc>
@@ -5628,7 +5466,7 @@
           </a:bodyPr>
           <a:lstStyle/>
           <a:p>
-            <a:pPr algn="l" indent="0" marL="0">
+            <a:pPr marL="0" indent="0" algn="l">
               <a:lnSpc>
                 <a:spcPts val="2700"/>
               </a:lnSpc>
@@ -5679,7 +5517,7 @@
           </a:bodyPr>
           <a:lstStyle/>
           <a:p>
-            <a:pPr algn="ctr" indent="0" marL="0">
+            <a:pPr marL="0" indent="0" algn="ctr">
               <a:lnSpc>
                 <a:spcPts val="2100"/>
               </a:lnSpc>
@@ -5730,7 +5568,7 @@
           </a:bodyPr>
           <a:lstStyle/>
           <a:p>
-            <a:pPr algn="ctr" indent="0" marL="0">
+            <a:pPr marL="0" indent="0" algn="ctr">
               <a:lnSpc>
                 <a:spcPts val="2100"/>
               </a:lnSpc>
@@ -5781,7 +5619,7 @@
           </a:bodyPr>
           <a:lstStyle/>
           <a:p>
-            <a:pPr algn="ctr" indent="0" marL="0">
+            <a:pPr marL="0" indent="0" algn="ctr">
               <a:lnSpc>
                 <a:spcPts val="2100"/>
               </a:lnSpc>
@@ -5832,7 +5670,7 @@
           </a:bodyPr>
           <a:lstStyle/>
           <a:p>
-            <a:pPr algn="ctr" indent="0" marL="0">
+            <a:pPr marL="0" indent="0" algn="ctr">
               <a:lnSpc>
                 <a:spcPts val="2100"/>
               </a:lnSpc>
@@ -5880,7 +5718,7 @@
           </a:bodyPr>
           <a:lstStyle/>
           <a:p>
-            <a:pPr algn="ctr" indent="0" marL="0">
+            <a:pPr marL="0" indent="0" algn="ctr">
               <a:lnSpc>
                 <a:spcPts val="3360"/>
               </a:lnSpc>
@@ -5931,7 +5769,7 @@
           </a:bodyPr>
           <a:lstStyle/>
           <a:p>
-            <a:pPr algn="ctr" indent="0" marL="0">
+            <a:pPr marL="0" indent="0" algn="ctr">
               <a:lnSpc>
                 <a:spcPts val="3360"/>
               </a:lnSpc>
@@ -5975,7 +5813,7 @@
           </a:bodyPr>
           <a:lstStyle/>
           <a:p>
-            <a:pPr algn="l" indent="0" marL="0">
+            <a:pPr marL="0" indent="0" algn="l">
               <a:lnSpc>
                 <a:spcPts val="1960"/>
               </a:lnSpc>
@@ -6012,6 +5850,7 @@
         <a:solidFill>
           <a:srgbClr val="F7F6F1"/>
         </a:solidFill>
+        <a:effectLst/>
       </p:bgPr>
     </p:bg>
     <p:spTree>
@@ -6051,14 +5890,14 @@
           </a:bodyPr>
           <a:lstStyle/>
           <a:p>
-            <a:pPr algn="l" indent="0" marL="0">
+            <a:pPr marL="0" indent="0" algn="l">
               <a:lnSpc>
                 <a:spcPts val="1960"/>
               </a:lnSpc>
               <a:buNone/>
             </a:pPr>
             <a:r>
-              <a:rPr lang="en-US" sz="1400" spc="100" kern="0" dirty="0">
+              <a:rPr lang="en-US" sz="1400" kern="0" spc="100" dirty="0">
                 <a:solidFill>
                   <a:srgbClr val="2A64C9"/>
                 </a:solidFill>
@@ -6075,7 +5914,9 @@
       <p:sp>
         <p:nvSpPr>
           <p:cNvPr id="3" name="Text 1"/>
-          <p:cNvSpPr/>
+          <p:cNvSpPr>
+            <a:spLocks noGrp="1"/>
+          </p:cNvSpPr>
           <p:nvPr>
             <p:ph type="title"/>
           </p:nvPr>
@@ -6097,7 +5938,7 @@
           </a:bodyPr>
           <a:lstStyle/>
           <a:p>
-            <a:pPr algn="l" indent="0" marL="0">
+            <a:pPr marL="0" indent="0" algn="l">
               <a:lnSpc>
                 <a:spcPts val="3960"/>
               </a:lnSpc>
@@ -6144,6 +5985,13 @@
             <a:prstDash val="solid"/>
           </a:ln>
         </p:spPr>
+        <p:txBody>
+          <a:bodyPr/>
+          <a:lstStyle/>
+          <a:p>
+            <a:endParaRPr lang="en-US"/>
+          </a:p>
+        </p:txBody>
       </p:sp>
       <p:sp>
         <p:nvSpPr>
@@ -6168,7 +6016,7 @@
           </a:bodyPr>
           <a:lstStyle/>
           <a:p>
-            <a:pPr algn="l" indent="0" marL="0">
+            <a:pPr marL="0" indent="0" algn="l">
               <a:lnSpc>
                 <a:spcPts val="2800"/>
               </a:lnSpc>
@@ -6212,7 +6060,7 @@
           </a:bodyPr>
           <a:lstStyle/>
           <a:p>
-            <a:pPr algn="l" indent="0" marL="0">
+            <a:pPr marL="0" indent="0" algn="l">
               <a:lnSpc>
                 <a:spcPts val="2340"/>
               </a:lnSpc>
@@ -6259,6 +6107,13 @@
             <a:prstDash val="solid"/>
           </a:ln>
         </p:spPr>
+        <p:txBody>
+          <a:bodyPr/>
+          <a:lstStyle/>
+          <a:p>
+            <a:endParaRPr lang="en-US"/>
+          </a:p>
+        </p:txBody>
       </p:sp>
       <p:sp>
         <p:nvSpPr>
@@ -6283,7 +6138,7 @@
           </a:bodyPr>
           <a:lstStyle/>
           <a:p>
-            <a:pPr algn="l" indent="0" marL="0">
+            <a:pPr marL="0" indent="0" algn="l">
               <a:lnSpc>
                 <a:spcPts val="2800"/>
               </a:lnSpc>
@@ -6327,7 +6182,7 @@
           </a:bodyPr>
           <a:lstStyle/>
           <a:p>
-            <a:pPr algn="l" indent="0" marL="0">
+            <a:pPr marL="0" indent="0" algn="l">
               <a:lnSpc>
                 <a:spcPts val="2340"/>
               </a:lnSpc>
@@ -6374,6 +6229,13 @@
             <a:prstDash val="solid"/>
           </a:ln>
         </p:spPr>
+        <p:txBody>
+          <a:bodyPr/>
+          <a:lstStyle/>
+          <a:p>
+            <a:endParaRPr lang="en-US"/>
+          </a:p>
+        </p:txBody>
       </p:sp>
       <p:sp>
         <p:nvSpPr>
@@ -6398,7 +6260,7 @@
           </a:bodyPr>
           <a:lstStyle/>
           <a:p>
-            <a:pPr algn="l" indent="0" marL="0">
+            <a:pPr marL="0" indent="0" algn="l">
               <a:lnSpc>
                 <a:spcPts val="2800"/>
               </a:lnSpc>
@@ -6442,7 +6304,7 @@
           </a:bodyPr>
           <a:lstStyle/>
           <a:p>
-            <a:pPr algn="l" indent="0" marL="0">
+            <a:pPr marL="0" indent="0" algn="l">
               <a:lnSpc>
                 <a:spcPts val="2340"/>
               </a:lnSpc>
@@ -6490,7 +6352,7 @@
           </a:bodyPr>
           <a:lstStyle/>
           <a:p>
-            <a:pPr algn="l" indent="0" marL="0">
+            <a:pPr marL="0" indent="0" algn="l">
               <a:lnSpc>
                 <a:spcPts val="2750"/>
               </a:lnSpc>
@@ -6527,6 +6389,7 @@
         <a:solidFill>
           <a:srgbClr val="0E1A2B"/>
         </a:solidFill>
+        <a:effectLst/>
       </p:bgPr>
     </p:bg>
     <p:spTree>
@@ -6566,14 +6429,14 @@
           </a:bodyPr>
           <a:lstStyle/>
           <a:p>
-            <a:pPr algn="l" indent="0" marL="0">
+            <a:pPr marL="0" indent="0" algn="l">
               <a:lnSpc>
                 <a:spcPts val="2240"/>
               </a:lnSpc>
               <a:buNone/>
             </a:pPr>
             <a:r>
-              <a:rPr lang="en-US" sz="1600" spc="100" kern="0" dirty="0">
+              <a:rPr lang="en-US" sz="1600" kern="0" spc="100" dirty="0">
                 <a:solidFill>
                   <a:srgbClr val="7DB0FF"/>
                 </a:solidFill>
@@ -6590,7 +6453,9 @@
       <p:sp>
         <p:nvSpPr>
           <p:cNvPr id="3" name="Text 1"/>
-          <p:cNvSpPr/>
+          <p:cNvSpPr>
+            <a:spLocks noGrp="1"/>
+          </p:cNvSpPr>
           <p:nvPr>
             <p:ph type="title"/>
           </p:nvPr>
@@ -6612,7 +6477,7 @@
           </a:bodyPr>
           <a:lstStyle/>
           <a:p>
-            <a:pPr algn="l" indent="0" marL="0">
+            <a:pPr marL="0" indent="0" algn="l">
               <a:lnSpc>
                 <a:spcPts val="5280"/>
               </a:lnSpc>
@@ -6656,7 +6521,7 @@
           </a:bodyPr>
           <a:lstStyle/>
           <a:p>
-            <a:pPr algn="l" indent="0" marL="0">
+            <a:pPr marL="0" indent="0" algn="l">
               <a:lnSpc>
                 <a:spcPts val="2700"/>
               </a:lnSpc>
@@ -6707,7 +6572,7 @@
           </a:bodyPr>
           <a:lstStyle/>
           <a:p>
-            <a:pPr algn="ctr" indent="0" marL="0">
+            <a:pPr marL="0" indent="0" algn="ctr">
               <a:lnSpc>
                 <a:spcPts val="2100"/>
               </a:lnSpc>
@@ -6758,7 +6623,7 @@
           </a:bodyPr>
           <a:lstStyle/>
           <a:p>
-            <a:pPr algn="ctr" indent="0" marL="0">
+            <a:pPr marL="0" indent="0" algn="ctr">
               <a:lnSpc>
                 <a:spcPts val="2100"/>
               </a:lnSpc>
@@ -6809,7 +6674,7 @@
           </a:bodyPr>
           <a:lstStyle/>
           <a:p>
-            <a:pPr algn="ctr" indent="0" marL="0">
+            <a:pPr marL="0" indent="0" algn="ctr">
               <a:lnSpc>
                 <a:spcPts val="2100"/>
               </a:lnSpc>
@@ -6860,7 +6725,7 @@
           </a:bodyPr>
           <a:lstStyle/>
           <a:p>
-            <a:pPr algn="ctr" indent="0" marL="0">
+            <a:pPr marL="0" indent="0" algn="ctr">
               <a:lnSpc>
                 <a:spcPts val="2100"/>
               </a:lnSpc>
@@ -6908,7 +6773,7 @@
           </a:bodyPr>
           <a:lstStyle/>
           <a:p>
-            <a:pPr algn="ctr" indent="0" marL="0">
+            <a:pPr marL="0" indent="0" algn="ctr">
               <a:lnSpc>
                 <a:spcPts val="3360"/>
               </a:lnSpc>
@@ -6959,7 +6824,7 @@
           </a:bodyPr>
           <a:lstStyle/>
           <a:p>
-            <a:pPr algn="ctr" indent="0" marL="0">
+            <a:pPr marL="0" indent="0" algn="ctr">
               <a:lnSpc>
                 <a:spcPts val="3360"/>
               </a:lnSpc>
@@ -7003,7 +6868,7 @@
           </a:bodyPr>
           <a:lstStyle/>
           <a:p>
-            <a:pPr algn="l" indent="0" marL="0">
+            <a:pPr marL="0" indent="0" algn="l">
               <a:lnSpc>
                 <a:spcPts val="1960"/>
               </a:lnSpc>
@@ -7040,6 +6905,7 @@
         <a:solidFill>
           <a:srgbClr val="F7F6F1"/>
         </a:solidFill>
+        <a:effectLst/>
       </p:bgPr>
     </p:bg>
     <p:spTree>
@@ -7079,14 +6945,14 @@
           </a:bodyPr>
           <a:lstStyle/>
           <a:p>
-            <a:pPr algn="l" indent="0" marL="0">
+            <a:pPr marL="0" indent="0" algn="l">
               <a:lnSpc>
                 <a:spcPts val="1960"/>
               </a:lnSpc>
               <a:buNone/>
             </a:pPr>
             <a:r>
-              <a:rPr lang="en-US" sz="1400" spc="100" kern="0" dirty="0">
+              <a:rPr lang="en-US" sz="1400" kern="0" spc="100" dirty="0">
                 <a:solidFill>
                   <a:srgbClr val="2A64C9"/>
                 </a:solidFill>
@@ -7103,7 +6969,9 @@
       <p:sp>
         <p:nvSpPr>
           <p:cNvPr id="3" name="Text 1"/>
-          <p:cNvSpPr/>
+          <p:cNvSpPr>
+            <a:spLocks noGrp="1"/>
+          </p:cNvSpPr>
           <p:nvPr>
             <p:ph type="title"/>
           </p:nvPr>
@@ -7125,7 +6993,7 @@
           </a:bodyPr>
           <a:lstStyle/>
           <a:p>
-            <a:pPr algn="l" indent="0" marL="0">
+            <a:pPr marL="0" indent="0" algn="l">
               <a:lnSpc>
                 <a:spcPts val="3960"/>
               </a:lnSpc>
@@ -7172,6 +7040,13 @@
             <a:prstDash val="solid"/>
           </a:ln>
         </p:spPr>
+        <p:txBody>
+          <a:bodyPr/>
+          <a:lstStyle/>
+          <a:p>
+            <a:endParaRPr lang="en-US"/>
+          </a:p>
+        </p:txBody>
       </p:sp>
       <p:sp>
         <p:nvSpPr>
@@ -7196,7 +7071,7 @@
           </a:bodyPr>
           <a:lstStyle/>
           <a:p>
-            <a:pPr algn="l" indent="0" marL="0">
+            <a:pPr marL="0" indent="0" algn="l">
               <a:lnSpc>
                 <a:spcPts val="2800"/>
               </a:lnSpc>
@@ -7240,7 +7115,7 @@
           </a:bodyPr>
           <a:lstStyle/>
           <a:p>
-            <a:pPr algn="l" indent="0" marL="0">
+            <a:pPr marL="0" indent="0" algn="l">
               <a:lnSpc>
                 <a:spcPts val="2340"/>
               </a:lnSpc>
@@ -7287,6 +7162,13 @@
             <a:prstDash val="solid"/>
           </a:ln>
         </p:spPr>
+        <p:txBody>
+          <a:bodyPr/>
+          <a:lstStyle/>
+          <a:p>
+            <a:endParaRPr lang="en-US"/>
+          </a:p>
+        </p:txBody>
       </p:sp>
       <p:sp>
         <p:nvSpPr>
@@ -7311,7 +7193,7 @@
           </a:bodyPr>
           <a:lstStyle/>
           <a:p>
-            <a:pPr algn="l" indent="0" marL="0">
+            <a:pPr marL="0" indent="0" algn="l">
               <a:lnSpc>
                 <a:spcPts val="2800"/>
               </a:lnSpc>
@@ -7355,7 +7237,7 @@
           </a:bodyPr>
           <a:lstStyle/>
           <a:p>
-            <a:pPr algn="l" indent="0" marL="0">
+            <a:pPr marL="0" indent="0" algn="l">
               <a:lnSpc>
                 <a:spcPts val="2340"/>
               </a:lnSpc>
@@ -7402,6 +7284,13 @@
             <a:prstDash val="solid"/>
           </a:ln>
         </p:spPr>
+        <p:txBody>
+          <a:bodyPr/>
+          <a:lstStyle/>
+          <a:p>
+            <a:endParaRPr lang="en-US"/>
+          </a:p>
+        </p:txBody>
       </p:sp>
       <p:sp>
         <p:nvSpPr>
@@ -7426,7 +7315,7 @@
           </a:bodyPr>
           <a:lstStyle/>
           <a:p>
-            <a:pPr algn="l" indent="0" marL="0">
+            <a:pPr marL="0" indent="0" algn="l">
               <a:lnSpc>
                 <a:spcPts val="2800"/>
               </a:lnSpc>
@@ -7470,7 +7359,7 @@
           </a:bodyPr>
           <a:lstStyle/>
           <a:p>
-            <a:pPr algn="l" indent="0" marL="0">
+            <a:pPr marL="0" indent="0" algn="l">
               <a:lnSpc>
                 <a:spcPts val="2340"/>
               </a:lnSpc>
@@ -7518,7 +7407,7 @@
           </a:bodyPr>
           <a:lstStyle/>
           <a:p>
-            <a:pPr algn="l" indent="0" marL="0">
+            <a:pPr marL="0" indent="0" algn="l">
               <a:lnSpc>
                 <a:spcPts val="2750"/>
               </a:lnSpc>
@@ -7555,6 +7444,7 @@
         <a:solidFill>
           <a:srgbClr val="F7F6F1"/>
         </a:solidFill>
+        <a:effectLst/>
       </p:bgPr>
     </p:bg>
     <p:spTree>
@@ -7594,14 +7484,14 @@
           </a:bodyPr>
           <a:lstStyle/>
           <a:p>
-            <a:pPr algn="l" indent="0" marL="0">
+            <a:pPr marL="0" indent="0" algn="l">
               <a:lnSpc>
                 <a:spcPts val="1960"/>
               </a:lnSpc>
               <a:buNone/>
             </a:pPr>
             <a:r>
-              <a:rPr lang="en-US" sz="1400" spc="100" kern="0" dirty="0">
+              <a:rPr lang="en-US" sz="1400" kern="0" spc="100" dirty="0">
                 <a:solidFill>
                   <a:srgbClr val="2A64C9"/>
                 </a:solidFill>
@@ -7618,7 +7508,9 @@
       <p:sp>
         <p:nvSpPr>
           <p:cNvPr id="3" name="Text 1"/>
-          <p:cNvSpPr/>
+          <p:cNvSpPr>
+            <a:spLocks noGrp="1"/>
+          </p:cNvSpPr>
           <p:nvPr>
             <p:ph type="title"/>
           </p:nvPr>
@@ -7640,7 +7532,7 @@
           </a:bodyPr>
           <a:lstStyle/>
           <a:p>
-            <a:pPr algn="l" indent="0" marL="0">
+            <a:pPr marL="0" indent="0" algn="l">
               <a:lnSpc>
                 <a:spcPts val="3960"/>
               </a:lnSpc>
@@ -7693,7 +7585,7 @@
           </a:bodyPr>
           <a:lstStyle/>
           <a:p>
-            <a:pPr algn="l" indent="0" marL="0">
+            <a:pPr marL="0" indent="0" algn="l">
               <a:lnSpc>
                 <a:spcPts val="2160"/>
               </a:lnSpc>
@@ -7746,7 +7638,7 @@
           </a:bodyPr>
           <a:lstStyle/>
           <a:p>
-            <a:pPr algn="l" indent="0" marL="0">
+            <a:pPr marL="0" indent="0" algn="l">
               <a:lnSpc>
                 <a:spcPts val="2160"/>
               </a:lnSpc>
@@ -7799,7 +7691,7 @@
           </a:bodyPr>
           <a:lstStyle/>
           <a:p>
-            <a:pPr algn="l" indent="0" marL="0">
+            <a:pPr marL="0" indent="0" algn="l">
               <a:lnSpc>
                 <a:spcPts val="2160"/>
               </a:lnSpc>
@@ -7852,7 +7744,7 @@
           </a:bodyPr>
           <a:lstStyle/>
           <a:p>
-            <a:pPr algn="l" indent="0" marL="0">
+            <a:pPr marL="0" indent="0" algn="l">
               <a:lnSpc>
                 <a:spcPts val="2160"/>
               </a:lnSpc>
@@ -7905,7 +7797,7 @@
           </a:bodyPr>
           <a:lstStyle/>
           <a:p>
-            <a:pPr algn="l" indent="0" marL="0">
+            <a:pPr marL="0" indent="0" algn="l">
               <a:lnSpc>
                 <a:spcPts val="2160"/>
               </a:lnSpc>
@@ -7958,7 +7850,7 @@
           </a:bodyPr>
           <a:lstStyle/>
           <a:p>
-            <a:pPr algn="l" indent="0" marL="0">
+            <a:pPr marL="0" indent="0" algn="l">
               <a:lnSpc>
                 <a:spcPts val="2160"/>
               </a:lnSpc>
@@ -8002,7 +7894,7 @@
           </a:bodyPr>
           <a:lstStyle/>
           <a:p>
-            <a:pPr algn="l" indent="0" marL="0">
+            <a:pPr marL="0" indent="0" algn="l">
               <a:lnSpc>
                 <a:spcPts val="1960"/>
               </a:lnSpc>
@@ -8039,6 +7931,7 @@
         <a:solidFill>
           <a:srgbClr val="F7F6F1"/>
         </a:solidFill>
+        <a:effectLst/>
       </p:bgPr>
     </p:bg>
     <p:spTree>
@@ -8078,14 +7971,14 @@
           </a:bodyPr>
           <a:lstStyle/>
           <a:p>
-            <a:pPr algn="l" indent="0" marL="0">
+            <a:pPr marL="0" indent="0" algn="l">
               <a:lnSpc>
                 <a:spcPts val="1960"/>
               </a:lnSpc>
               <a:buNone/>
             </a:pPr>
             <a:r>
-              <a:rPr lang="en-US" sz="1400" spc="100" kern="0" dirty="0">
+              <a:rPr lang="en-US" sz="1400" kern="0" spc="100" dirty="0">
                 <a:solidFill>
                   <a:srgbClr val="2A64C9"/>
                 </a:solidFill>
@@ -8102,7 +7995,9 @@
       <p:sp>
         <p:nvSpPr>
           <p:cNvPr id="3" name="Text 1"/>
-          <p:cNvSpPr/>
+          <p:cNvSpPr>
+            <a:spLocks noGrp="1"/>
+          </p:cNvSpPr>
           <p:nvPr>
             <p:ph type="title"/>
           </p:nvPr>
@@ -8124,7 +8019,7 @@
           </a:bodyPr>
           <a:lstStyle/>
           <a:p>
-            <a:pPr algn="l" indent="0" marL="0">
+            <a:pPr marL="0" indent="0" algn="l">
               <a:lnSpc>
                 <a:spcPts val="4400"/>
               </a:lnSpc>
@@ -8168,7 +8063,7 @@
           </a:bodyPr>
           <a:lstStyle/>
           <a:p>
-            <a:pPr algn="l" indent="0" marL="0">
+            <a:pPr marL="0" indent="0" algn="l">
               <a:lnSpc>
                 <a:spcPts val="9000"/>
               </a:lnSpc>
@@ -8212,7 +8107,7 @@
           </a:bodyPr>
           <a:lstStyle/>
           <a:p>
-            <a:pPr algn="l" indent="0" marL="0">
+            <a:pPr marL="0" indent="0" algn="l">
               <a:lnSpc>
                 <a:spcPts val="2600"/>
               </a:lnSpc>
@@ -8265,7 +8160,7 @@
           </a:bodyPr>
           <a:lstStyle/>
           <a:p>
-            <a:pPr algn="l" indent="0" marL="0">
+            <a:pPr marL="0" indent="0" algn="l">
               <a:lnSpc>
                 <a:spcPts val="2340"/>
               </a:lnSpc>
@@ -8318,7 +8213,7 @@
           </a:bodyPr>
           <a:lstStyle/>
           <a:p>
-            <a:pPr algn="l" indent="0" marL="0">
+            <a:pPr marL="0" indent="0" algn="l">
               <a:lnSpc>
                 <a:spcPts val="2340"/>
               </a:lnSpc>
@@ -8371,7 +8266,7 @@
           </a:bodyPr>
           <a:lstStyle/>
           <a:p>
-            <a:pPr algn="l" indent="0" marL="0">
+            <a:pPr marL="0" indent="0" algn="l">
               <a:lnSpc>
                 <a:spcPts val="2340"/>
               </a:lnSpc>
@@ -8408,6 +8303,7 @@
         <a:solidFill>
           <a:srgbClr val="0E1A2B"/>
         </a:solidFill>
+        <a:effectLst/>
       </p:bgPr>
     </p:bg>
     <p:spTree>
@@ -8447,14 +8343,14 @@
           </a:bodyPr>
           <a:lstStyle/>
           <a:p>
-            <a:pPr algn="l" indent="0" marL="0">
+            <a:pPr marL="0" indent="0" algn="l">
               <a:lnSpc>
                 <a:spcPts val="1960"/>
               </a:lnSpc>
               <a:buNone/>
             </a:pPr>
             <a:r>
-              <a:rPr lang="en-US" sz="1400" spc="100" kern="0" dirty="0">
+              <a:rPr lang="en-US" sz="1400" kern="0" spc="100" dirty="0">
                 <a:solidFill>
                   <a:srgbClr val="7DB0FF"/>
                 </a:solidFill>
@@ -8471,7 +8367,9 @@
       <p:sp>
         <p:nvSpPr>
           <p:cNvPr id="3" name="Text 1"/>
-          <p:cNvSpPr/>
+          <p:cNvSpPr>
+            <a:spLocks noGrp="1"/>
+          </p:cNvSpPr>
           <p:nvPr>
             <p:ph type="title"/>
           </p:nvPr>
@@ -8493,7 +8391,7 @@
           </a:bodyPr>
           <a:lstStyle/>
           <a:p>
-            <a:pPr algn="l" indent="0" marL="0">
+            <a:pPr marL="0" indent="0" algn="l">
               <a:lnSpc>
                 <a:spcPts val="3960"/>
               </a:lnSpc>
@@ -8535,6 +8433,13 @@
           </a:solidFill>
           <a:ln/>
         </p:spPr>
+        <p:txBody>
+          <a:bodyPr/>
+          <a:lstStyle/>
+          <a:p>
+            <a:endParaRPr lang="en-US"/>
+          </a:p>
+        </p:txBody>
       </p:sp>
       <p:sp>
         <p:nvSpPr>
@@ -8559,7 +8464,7 @@
           </a:bodyPr>
           <a:lstStyle/>
           <a:p>
-            <a:pPr algn="l" indent="0" marL="0">
+            <a:pPr marL="0" indent="0" algn="l">
               <a:lnSpc>
                 <a:spcPts val="3920"/>
               </a:lnSpc>
@@ -8603,7 +8508,7 @@
           </a:bodyPr>
           <a:lstStyle/>
           <a:p>
-            <a:pPr algn="l" indent="0" marL="0">
+            <a:pPr marL="0" indent="0" algn="l">
               <a:lnSpc>
                 <a:spcPts val="3250"/>
               </a:lnSpc>
@@ -8645,6 +8550,13 @@
           </a:solidFill>
           <a:ln/>
         </p:spPr>
+        <p:txBody>
+          <a:bodyPr/>
+          <a:lstStyle/>
+          <a:p>
+            <a:endParaRPr lang="en-US"/>
+          </a:p>
+        </p:txBody>
       </p:sp>
       <p:sp>
         <p:nvSpPr>
@@ -8669,7 +8581,7 @@
           </a:bodyPr>
           <a:lstStyle/>
           <a:p>
-            <a:pPr algn="l" indent="0" marL="0">
+            <a:pPr marL="0" indent="0" algn="l">
               <a:lnSpc>
                 <a:spcPts val="3920"/>
               </a:lnSpc>
@@ -8713,7 +8625,7 @@
           </a:bodyPr>
           <a:lstStyle/>
           <a:p>
-            <a:pPr algn="l" indent="0" marL="0">
+            <a:pPr marL="0" indent="0" algn="l">
               <a:lnSpc>
                 <a:spcPts val="3250"/>
               </a:lnSpc>
@@ -8750,6 +8662,7 @@
         <a:solidFill>
           <a:srgbClr val="2A64C9"/>
         </a:solidFill>
+        <a:effectLst/>
       </p:bgPr>
     </p:bg>
     <p:spTree>
@@ -8789,14 +8702,14 @@
           </a:bodyPr>
           <a:lstStyle/>
           <a:p>
-            <a:pPr algn="l" indent="0" marL="0">
+            <a:pPr marL="0" indent="0" algn="l">
               <a:lnSpc>
                 <a:spcPts val="1960"/>
               </a:lnSpc>
               <a:buNone/>
             </a:pPr>
             <a:r>
-              <a:rPr lang="en-US" sz="1400" spc="100" kern="0" dirty="0">
+              <a:rPr lang="en-US" sz="1400" kern="0" spc="100" dirty="0">
                 <a:solidFill>
                   <a:srgbClr val="F7F6F1"/>
                 </a:solidFill>
@@ -8833,7 +8746,7 @@
           </a:bodyPr>
           <a:lstStyle/>
           <a:p>
-            <a:pPr algn="l" indent="0" marL="0">
+            <a:pPr marL="0" indent="0" algn="l">
               <a:lnSpc>
                 <a:spcPts val="5280"/>
               </a:lnSpc>
@@ -8877,7 +8790,7 @@
           </a:bodyPr>
           <a:lstStyle/>
           <a:p>
-            <a:pPr algn="l" indent="0" marL="0">
+            <a:pPr marL="0" indent="0" algn="l">
               <a:lnSpc>
                 <a:spcPts val="5280"/>
               </a:lnSpc>
@@ -8921,7 +8834,7 @@
           </a:bodyPr>
           <a:lstStyle/>
           <a:p>
-            <a:pPr algn="l" indent="0" marL="0">
+            <a:pPr marL="0" indent="0" algn="l">
               <a:lnSpc>
                 <a:spcPts val="5280"/>
               </a:lnSpc>
@@ -8965,7 +8878,7 @@
           </a:bodyPr>
           <a:lstStyle/>
           <a:p>
-            <a:pPr algn="l" indent="0" marL="0">
+            <a:pPr marL="0" indent="0" algn="l">
               <a:lnSpc>
                 <a:spcPts val="2600"/>
               </a:lnSpc>
@@ -9002,6 +8915,7 @@
         <a:solidFill>
           <a:srgbClr val="F7F6F1"/>
         </a:solidFill>
+        <a:effectLst/>
       </p:bgPr>
     </p:bg>
     <p:spTree>
@@ -9021,7 +8935,9 @@
       <p:sp>
         <p:nvSpPr>
           <p:cNvPr id="2" name="Text 0"/>
-          <p:cNvSpPr/>
+          <p:cNvSpPr>
+            <a:spLocks noGrp="1"/>
+          </p:cNvSpPr>
           <p:nvPr>
             <p:ph type="title"/>
           </p:nvPr>
@@ -9043,7 +8959,7 @@
           </a:bodyPr>
           <a:lstStyle/>
           <a:p>
-            <a:pPr algn="l" indent="0" marL="0">
+            <a:pPr marL="0" indent="0" algn="l">
               <a:lnSpc>
                 <a:spcPts val="4400"/>
               </a:lnSpc>
@@ -9090,6 +9006,13 @@
             <a:prstDash val="solid"/>
           </a:ln>
         </p:spPr>
+        <p:txBody>
+          <a:bodyPr/>
+          <a:lstStyle/>
+          <a:p>
+            <a:endParaRPr lang="en-US"/>
+          </a:p>
+        </p:txBody>
       </p:sp>
       <p:sp>
         <p:nvSpPr>
@@ -9114,14 +9037,14 @@
           </a:bodyPr>
           <a:lstStyle/>
           <a:p>
-            <a:pPr algn="l" indent="0" marL="0">
+            <a:pPr marL="0" indent="0" algn="l">
               <a:lnSpc>
                 <a:spcPts val="1680"/>
               </a:lnSpc>
               <a:buNone/>
             </a:pPr>
             <a:r>
-              <a:rPr lang="en-US" sz="1200" spc="50" kern="0" dirty="0">
+              <a:rPr lang="en-US" sz="1200" kern="0" spc="50" dirty="0">
                 <a:solidFill>
                   <a:srgbClr val="2A64C9"/>
                 </a:solidFill>
@@ -9158,7 +9081,7 @@
           </a:bodyPr>
           <a:lstStyle/>
           <a:p>
-            <a:pPr algn="l" indent="0" marL="0">
+            <a:pPr marL="0" indent="0" algn="l">
               <a:lnSpc>
                 <a:spcPts val="2380"/>
               </a:lnSpc>
@@ -9205,6 +9128,13 @@
             <a:prstDash val="solid"/>
           </a:ln>
         </p:spPr>
+        <p:txBody>
+          <a:bodyPr/>
+          <a:lstStyle/>
+          <a:p>
+            <a:endParaRPr lang="en-US"/>
+          </a:p>
+        </p:txBody>
       </p:sp>
       <p:sp>
         <p:nvSpPr>
@@ -9229,14 +9159,14 @@
           </a:bodyPr>
           <a:lstStyle/>
           <a:p>
-            <a:pPr algn="l" indent="0" marL="0">
+            <a:pPr marL="0" indent="0" algn="l">
               <a:lnSpc>
                 <a:spcPts val="1680"/>
               </a:lnSpc>
               <a:buNone/>
             </a:pPr>
             <a:r>
-              <a:rPr lang="en-US" sz="1200" spc="50" kern="0" dirty="0">
+              <a:rPr lang="en-US" sz="1200" kern="0" spc="50" dirty="0">
                 <a:solidFill>
                   <a:srgbClr val="2A64C9"/>
                 </a:solidFill>
@@ -9273,7 +9203,7 @@
           </a:bodyPr>
           <a:lstStyle/>
           <a:p>
-            <a:pPr algn="l" indent="0" marL="0">
+            <a:pPr marL="0" indent="0" algn="l">
               <a:lnSpc>
                 <a:spcPts val="2380"/>
               </a:lnSpc>
@@ -9320,6 +9250,13 @@
             <a:prstDash val="solid"/>
           </a:ln>
         </p:spPr>
+        <p:txBody>
+          <a:bodyPr/>
+          <a:lstStyle/>
+          <a:p>
+            <a:endParaRPr lang="en-US"/>
+          </a:p>
+        </p:txBody>
       </p:sp>
       <p:sp>
         <p:nvSpPr>
@@ -9344,14 +9281,14 @@
           </a:bodyPr>
           <a:lstStyle/>
           <a:p>
-            <a:pPr algn="l" indent="0" marL="0">
+            <a:pPr marL="0" indent="0" algn="l">
               <a:lnSpc>
                 <a:spcPts val="1680"/>
               </a:lnSpc>
               <a:buNone/>
             </a:pPr>
             <a:r>
-              <a:rPr lang="en-US" sz="1200" spc="50" kern="0" dirty="0">
+              <a:rPr lang="en-US" sz="1200" kern="0" spc="50" dirty="0">
                 <a:solidFill>
                   <a:srgbClr val="2A64C9"/>
                 </a:solidFill>
@@ -9388,7 +9325,7 @@
           </a:bodyPr>
           <a:lstStyle/>
           <a:p>
-            <a:pPr algn="l" indent="0" marL="0">
+            <a:pPr marL="0" indent="0" algn="l">
               <a:lnSpc>
                 <a:spcPts val="2380"/>
               </a:lnSpc>
@@ -9435,6 +9372,13 @@
             <a:prstDash val="solid"/>
           </a:ln>
         </p:spPr>
+        <p:txBody>
+          <a:bodyPr/>
+          <a:lstStyle/>
+          <a:p>
+            <a:endParaRPr lang="en-US"/>
+          </a:p>
+        </p:txBody>
       </p:sp>
       <p:sp>
         <p:nvSpPr>
@@ -9459,14 +9403,14 @@
           </a:bodyPr>
           <a:lstStyle/>
           <a:p>
-            <a:pPr algn="l" indent="0" marL="0">
+            <a:pPr marL="0" indent="0" algn="l">
               <a:lnSpc>
                 <a:spcPts val="1680"/>
               </a:lnSpc>
               <a:buNone/>
             </a:pPr>
             <a:r>
-              <a:rPr lang="en-US" sz="1200" spc="50" kern="0" dirty="0">
+              <a:rPr lang="en-US" sz="1200" kern="0" spc="50" dirty="0">
                 <a:solidFill>
                   <a:srgbClr val="2A64C9"/>
                 </a:solidFill>
@@ -9503,7 +9447,7 @@
           </a:bodyPr>
           <a:lstStyle/>
           <a:p>
-            <a:pPr algn="l" indent="0" marL="0">
+            <a:pPr marL="0" indent="0" algn="l">
               <a:lnSpc>
                 <a:spcPts val="2380"/>
               </a:lnSpc>
@@ -9518,7 +9462,7 @@
                 <a:ea typeface="Arial" pitchFamily="34" charset="-122"/>
                 <a:cs typeface="Arial" pitchFamily="34" charset="-120"/>
               </a:rPr>
-              <a:t>[Your contact details and feedback link]</a:t>
+              <a:t>chadgreen@chadgreen.com</a:t>
             </a:r>
             <a:endParaRPr lang="en-US" sz="1700" dirty="0"/>
           </a:p>
@@ -9547,7 +9491,7 @@
           </a:bodyPr>
           <a:lstStyle/>
           <a:p>
-            <a:pPr algn="l" indent="0" marL="0">
+            <a:pPr marL="0" indent="0" algn="l">
               <a:lnSpc>
                 <a:spcPts val="1960"/>
               </a:lnSpc>
@@ -9584,6 +9528,7 @@
         <a:solidFill>
           <a:srgbClr val="F7F6F1"/>
         </a:solidFill>
+        <a:effectLst/>
       </p:bgPr>
     </p:bg>
     <p:spTree>
@@ -9603,7 +9548,9 @@
       <p:sp>
         <p:nvSpPr>
           <p:cNvPr id="2" name="Text 0"/>
-          <p:cNvSpPr/>
+          <p:cNvSpPr>
+            <a:spLocks noGrp="1"/>
+          </p:cNvSpPr>
           <p:nvPr>
             <p:ph type="title"/>
           </p:nvPr>
@@ -9625,7 +9572,7 @@
           </a:bodyPr>
           <a:lstStyle/>
           <a:p>
-            <a:pPr algn="l" indent="0" marL="0">
+            <a:pPr marL="0" indent="0" algn="l">
               <a:lnSpc>
                 <a:spcPts val="4400"/>
               </a:lnSpc>
@@ -9667,6 +9614,13 @@
           </a:solidFill>
           <a:ln/>
         </p:spPr>
+        <p:txBody>
+          <a:bodyPr/>
+          <a:lstStyle/>
+          <a:p>
+            <a:endParaRPr lang="en-US"/>
+          </a:p>
+        </p:txBody>
       </p:sp>
       <p:sp>
         <p:nvSpPr>
@@ -9691,14 +9645,14 @@
           </a:bodyPr>
           <a:lstStyle/>
           <a:p>
-            <a:pPr algn="l" indent="0" marL="0">
+            <a:pPr marL="0" indent="0" algn="l">
               <a:lnSpc>
                 <a:spcPts val="1960"/>
               </a:lnSpc>
               <a:buNone/>
             </a:pPr>
             <a:r>
-              <a:rPr lang="en-US" sz="1400" spc="100" kern="0" dirty="0">
+              <a:rPr lang="en-US" sz="1400" kern="0" spc="100" dirty="0">
                 <a:solidFill>
                   <a:srgbClr val="F2B134"/>
                 </a:solidFill>
@@ -9735,7 +9689,7 @@
           </a:bodyPr>
           <a:lstStyle/>
           <a:p>
-            <a:pPr algn="l" indent="0" marL="0">
+            <a:pPr marL="0" indent="0" algn="l">
               <a:lnSpc>
                 <a:spcPts val="3250"/>
               </a:lnSpc>
@@ -9779,7 +9733,7 @@
           </a:bodyPr>
           <a:lstStyle/>
           <a:p>
-            <a:pPr algn="l" indent="0" marL="0">
+            <a:pPr marL="0" indent="0" algn="l">
               <a:lnSpc>
                 <a:spcPts val="2240"/>
               </a:lnSpc>
@@ -9800,170 +9754,281 @@
           </a:p>
         </p:txBody>
       </p:sp>
-      <p:sp>
-        <p:nvSpPr>
-          <p:cNvPr id="7" name="Shape 5"/>
-          <p:cNvSpPr/>
-          <p:nvPr/>
-        </p:nvSpPr>
-        <p:spPr>
+      <p:grpSp>
+        <p:nvGrpSpPr>
+          <p:cNvPr id="11" name="Group 10">
+            <a:extLst>
+              <a:ext uri="{FF2B5EF4-FFF2-40B4-BE49-F238E27FC236}">
+                <a16:creationId xmlns:a16="http://schemas.microsoft.com/office/drawing/2014/main" id="{D2EAD3DD-239C-757E-9A5A-CDC3BA426AF6}"/>
+              </a:ext>
+            </a:extLst>
+          </p:cNvPr>
+          <p:cNvGrpSpPr/>
+          <p:nvPr/>
+        </p:nvGrpSpPr>
+        <p:grpSpPr>
           <a:xfrm>
             <a:off x="6196542" y="1679575"/>
             <a:ext cx="5179483" cy="4159250"/>
-          </a:xfrm>
-          <a:prstGeom prst="roundRect">
-            <a:avLst>
-              <a:gd name="adj" fmla="val 2977"/>
-            </a:avLst>
-          </a:prstGeom>
-          <a:solidFill>
-            <a:srgbClr val="FDFCF9"/>
-          </a:solidFill>
-          <a:ln w="6350">
+            <a:chOff x="6196542" y="1679575"/>
+            <a:chExt cx="5179483" cy="4159250"/>
+          </a:xfrm>
+        </p:grpSpPr>
+        <p:sp>
+          <p:nvSpPr>
+            <p:cNvPr id="7" name="Shape 5"/>
+            <p:cNvSpPr/>
+            <p:nvPr/>
+          </p:nvSpPr>
+          <p:spPr>
+            <a:xfrm>
+              <a:off x="6196542" y="1679575"/>
+              <a:ext cx="5179483" cy="4159250"/>
+            </a:xfrm>
+            <a:prstGeom prst="roundRect">
+              <a:avLst>
+                <a:gd name="adj" fmla="val 2977"/>
+              </a:avLst>
+            </a:prstGeom>
             <a:solidFill>
-              <a:srgbClr val="DAD8CF"/>
+              <a:srgbClr val="FDFCF9"/>
             </a:solidFill>
-            <a:prstDash val="solid"/>
-          </a:ln>
-        </p:spPr>
-      </p:sp>
-      <p:sp>
-        <p:nvSpPr>
-          <p:cNvPr id="8" name="Text 6"/>
-          <p:cNvSpPr/>
-          <p:nvPr/>
-        </p:nvSpPr>
-        <p:spPr>
-          <a:xfrm>
-            <a:off x="6553200" y="2036234"/>
-            <a:ext cx="4600152" cy="274307"/>
-          </a:xfrm>
-          <a:prstGeom prst="rect">
-            <a:avLst/>
-          </a:prstGeom>
-          <a:noFill/>
-          <a:ln/>
-        </p:spPr>
-        <p:txBody>
-          <a:bodyPr wrap="square" lIns="0" tIns="0" rIns="0" bIns="0" rtlCol="0" anchor="t">
-            <a:normAutofit/>
-          </a:bodyPr>
-          <a:lstStyle/>
-          <a:p>
-            <a:pPr algn="l" indent="0" marL="0">
-              <a:lnSpc>
-                <a:spcPts val="1960"/>
-              </a:lnSpc>
-              <a:buNone/>
-            </a:pPr>
-            <a:r>
-              <a:rPr lang="en-US" sz="1400" spc="100" kern="0" dirty="0">
-                <a:solidFill>
-                  <a:srgbClr val="2A64C9"/>
-                </a:solidFill>
-                <a:latin typeface="Courier New" pitchFamily="49" charset="0"/>
-                <a:ea typeface="Courier New" pitchFamily="49" charset="-122"/>
-                <a:cs typeface="Courier New" pitchFamily="49" charset="-120"/>
-              </a:rPr>
-              <a:t>THE PROTOTYPE</a:t>
-            </a:r>
-            <a:endParaRPr lang="en-US" sz="1400" dirty="0"/>
-          </a:p>
-        </p:txBody>
-      </p:sp>
-      <p:sp>
-        <p:nvSpPr>
-          <p:cNvPr id="9" name="Text 7"/>
-          <p:cNvSpPr/>
-          <p:nvPr/>
-        </p:nvSpPr>
-        <p:spPr>
-          <a:xfrm>
-            <a:off x="6553200" y="2437541"/>
-            <a:ext cx="4600152" cy="850900"/>
-          </a:xfrm>
-          <a:prstGeom prst="rect">
-            <a:avLst/>
-          </a:prstGeom>
-          <a:noFill/>
-          <a:ln/>
-        </p:spPr>
-        <p:txBody>
-          <a:bodyPr wrap="square" lIns="0" tIns="0" rIns="0" bIns="0" rtlCol="0" anchor="t">
-            <a:normAutofit/>
-          </a:bodyPr>
-          <a:lstStyle/>
-          <a:p>
-            <a:pPr algn="l" indent="0" marL="0">
-              <a:lnSpc>
-                <a:spcPts val="3250"/>
-              </a:lnSpc>
-              <a:buNone/>
-            </a:pPr>
-            <a:r>
-              <a:rPr lang="en-US" sz="2600" dirty="0">
-                <a:solidFill>
-                  <a:srgbClr val="0E1A2B"/>
-                </a:solidFill>
-                <a:latin typeface="Arial" pitchFamily="34" charset="0"/>
-                <a:ea typeface="Arial" pitchFamily="34" charset="-122"/>
-                <a:cs typeface="Arial" pitchFamily="34" charset="-120"/>
-              </a:rPr>
-              <a:t>Architecture docs, then AI, then Terraform. It worked.</a:t>
-            </a:r>
-            <a:endParaRPr lang="en-US" sz="2600" dirty="0"/>
-          </a:p>
-        </p:txBody>
-      </p:sp>
-      <p:sp>
-        <p:nvSpPr>
-          <p:cNvPr id="10" name="Text 8"/>
-          <p:cNvSpPr/>
-          <p:nvPr/>
-        </p:nvSpPr>
-        <p:spPr>
-          <a:xfrm>
-            <a:off x="6553200" y="3415441"/>
-            <a:ext cx="4600152" cy="878681"/>
-          </a:xfrm>
-          <a:prstGeom prst="rect">
-            <a:avLst/>
-          </a:prstGeom>
-          <a:noFill/>
-          <a:ln/>
-        </p:spPr>
-        <p:txBody>
-          <a:bodyPr wrap="square" lIns="0" tIns="0" rIns="0" bIns="0" rtlCol="0" anchor="t">
-            <a:normAutofit/>
-          </a:bodyPr>
-          <a:lstStyle/>
-          <a:p>
-            <a:pPr algn="l" indent="0" marL="0">
-              <a:lnSpc>
-                <a:spcPts val="2240"/>
-              </a:lnSpc>
-              <a:buNone/>
-            </a:pPr>
-            <a:r>
-              <a:rPr lang="en-US" sz="1600" dirty="0">
-                <a:solidFill>
-                  <a:srgbClr val="3B4656"/>
-                </a:solidFill>
-                <a:latin typeface="Arial" pitchFamily="34" charset="0"/>
-                <a:ea typeface="Arial" pitchFamily="34" charset="-122"/>
-                <a:cs typeface="Arial" pitchFamily="34" charset="-120"/>
-              </a:rPr>
-              <a:t>AI read the architecture and chose our opinionated modules. The output passed validate and tflint on the first run.</a:t>
-            </a:r>
-            <a:endParaRPr lang="en-US" sz="1600" dirty="0"/>
-          </a:p>
-        </p:txBody>
-      </p:sp>
+            <a:ln w="6350">
+              <a:solidFill>
+                <a:srgbClr val="DAD8CF"/>
+              </a:solidFill>
+              <a:prstDash val="solid"/>
+            </a:ln>
+          </p:spPr>
+          <p:txBody>
+            <a:bodyPr/>
+            <a:lstStyle/>
+            <a:p>
+              <a:endParaRPr lang="en-US"/>
+            </a:p>
+          </p:txBody>
+        </p:sp>
+        <p:sp>
+          <p:nvSpPr>
+            <p:cNvPr id="8" name="Text 6"/>
+            <p:cNvSpPr/>
+            <p:nvPr/>
+          </p:nvSpPr>
+          <p:spPr>
+            <a:xfrm>
+              <a:off x="6553200" y="2036234"/>
+              <a:ext cx="4600152" cy="274307"/>
+            </a:xfrm>
+            <a:prstGeom prst="rect">
+              <a:avLst/>
+            </a:prstGeom>
+            <a:noFill/>
+            <a:ln/>
+          </p:spPr>
+          <p:txBody>
+            <a:bodyPr wrap="square" lIns="0" tIns="0" rIns="0" bIns="0" rtlCol="0" anchor="t">
+              <a:normAutofit/>
+            </a:bodyPr>
+            <a:lstStyle/>
+            <a:p>
+              <a:pPr marL="0" indent="0" algn="l">
+                <a:lnSpc>
+                  <a:spcPts val="1960"/>
+                </a:lnSpc>
+                <a:buNone/>
+              </a:pPr>
+              <a:r>
+                <a:rPr lang="en-US" sz="1400" kern="0" spc="100" dirty="0">
+                  <a:solidFill>
+                    <a:srgbClr val="2A64C9"/>
+                  </a:solidFill>
+                  <a:latin typeface="Courier New" pitchFamily="49" charset="0"/>
+                  <a:ea typeface="Courier New" pitchFamily="49" charset="-122"/>
+                  <a:cs typeface="Courier New" pitchFamily="49" charset="-120"/>
+                </a:rPr>
+                <a:t>THE PROTOTYPE</a:t>
+              </a:r>
+              <a:endParaRPr lang="en-US" sz="1400" dirty="0"/>
+            </a:p>
+          </p:txBody>
+        </p:sp>
+        <p:sp>
+          <p:nvSpPr>
+            <p:cNvPr id="9" name="Text 7"/>
+            <p:cNvSpPr/>
+            <p:nvPr/>
+          </p:nvSpPr>
+          <p:spPr>
+            <a:xfrm>
+              <a:off x="6553200" y="2437541"/>
+              <a:ext cx="4600152" cy="850900"/>
+            </a:xfrm>
+            <a:prstGeom prst="rect">
+              <a:avLst/>
+            </a:prstGeom>
+            <a:noFill/>
+            <a:ln/>
+          </p:spPr>
+          <p:txBody>
+            <a:bodyPr wrap="square" lIns="0" tIns="0" rIns="0" bIns="0" rtlCol="0" anchor="t">
+              <a:normAutofit/>
+            </a:bodyPr>
+            <a:lstStyle/>
+            <a:p>
+              <a:pPr marL="0" indent="0" algn="l">
+                <a:lnSpc>
+                  <a:spcPts val="3250"/>
+                </a:lnSpc>
+                <a:buNone/>
+              </a:pPr>
+              <a:r>
+                <a:rPr lang="en-US" sz="2600" dirty="0">
+                  <a:solidFill>
+                    <a:srgbClr val="0E1A2B"/>
+                  </a:solidFill>
+                  <a:latin typeface="Arial" pitchFamily="34" charset="0"/>
+                  <a:ea typeface="Arial" pitchFamily="34" charset="-122"/>
+                  <a:cs typeface="Arial" pitchFamily="34" charset="-120"/>
+                </a:rPr>
+                <a:t>Architecture docs, then AI, then Terraform. It worked.</a:t>
+              </a:r>
+              <a:endParaRPr lang="en-US" sz="2600" dirty="0"/>
+            </a:p>
+          </p:txBody>
+        </p:sp>
+        <p:sp>
+          <p:nvSpPr>
+            <p:cNvPr id="10" name="Text 8"/>
+            <p:cNvSpPr/>
+            <p:nvPr/>
+          </p:nvSpPr>
+          <p:spPr>
+            <a:xfrm>
+              <a:off x="6553200" y="3415441"/>
+              <a:ext cx="4600152" cy="878681"/>
+            </a:xfrm>
+            <a:prstGeom prst="rect">
+              <a:avLst/>
+            </a:prstGeom>
+            <a:noFill/>
+            <a:ln/>
+          </p:spPr>
+          <p:txBody>
+            <a:bodyPr wrap="square" lIns="0" tIns="0" rIns="0" bIns="0" rtlCol="0" anchor="t">
+              <a:normAutofit/>
+            </a:bodyPr>
+            <a:lstStyle/>
+            <a:p>
+              <a:pPr marL="0" indent="0" algn="l">
+                <a:lnSpc>
+                  <a:spcPts val="2240"/>
+                </a:lnSpc>
+                <a:buNone/>
+              </a:pPr>
+              <a:r>
+                <a:rPr lang="en-US" sz="1600" dirty="0">
+                  <a:solidFill>
+                    <a:srgbClr val="3B4656"/>
+                  </a:solidFill>
+                  <a:latin typeface="Arial" pitchFamily="34" charset="0"/>
+                  <a:ea typeface="Arial" pitchFamily="34" charset="-122"/>
+                  <a:cs typeface="Arial" pitchFamily="34" charset="-120"/>
+                </a:rPr>
+                <a:t>AI read the architecture and chose our opinionated modules. The output passed validate and tflint on the first run.</a:t>
+              </a:r>
+              <a:endParaRPr lang="en-US" sz="1600" dirty="0"/>
+            </a:p>
+          </p:txBody>
+        </p:sp>
+      </p:grpSp>
     </p:spTree>
   </p:cSld>
   <p:clrMapOvr>
     <a:masterClrMapping/>
   </p:clrMapOvr>
+  <p:timing>
+    <p:tnLst>
+      <p:par>
+        <p:cTn id="1" dur="indefinite" restart="never" nodeType="tmRoot">
+          <p:childTnLst>
+            <p:seq concurrent="1" nextAc="seek">
+              <p:cTn id="2" dur="indefinite" nodeType="mainSeq">
+                <p:childTnLst>
+                  <p:par>
+                    <p:cTn id="3" fill="hold">
+                      <p:stCondLst>
+                        <p:cond delay="indefinite"/>
+                      </p:stCondLst>
+                      <p:childTnLst>
+                        <p:par>
+                          <p:cTn id="4" fill="hold">
+                            <p:stCondLst>
+                              <p:cond delay="0"/>
+                            </p:stCondLst>
+                            <p:childTnLst>
+                              <p:par>
+                                <p:cTn id="5" presetID="10" presetClass="entr" presetSubtype="0" fill="hold" nodeType="clickEffect">
+                                  <p:stCondLst>
+                                    <p:cond delay="0"/>
+                                  </p:stCondLst>
+                                  <p:childTnLst>
+                                    <p:set>
+                                      <p:cBhvr>
+                                        <p:cTn id="6" dur="1" fill="hold">
+                                          <p:stCondLst>
+                                            <p:cond delay="0"/>
+                                          </p:stCondLst>
+                                        </p:cTn>
+                                        <p:tgtEl>
+                                          <p:spTgt spid="11"/>
+                                        </p:tgtEl>
+                                        <p:attrNameLst>
+                                          <p:attrName>style.visibility</p:attrName>
+                                        </p:attrNameLst>
+                                      </p:cBhvr>
+                                      <p:to>
+                                        <p:strVal val="visible"/>
+                                      </p:to>
+                                    </p:set>
+                                    <p:animEffect transition="in" filter="fade">
+                                      <p:cBhvr>
+                                        <p:cTn id="7" dur="500"/>
+                                        <p:tgtEl>
+                                          <p:spTgt spid="11"/>
+                                        </p:tgtEl>
+                                      </p:cBhvr>
+                                    </p:animEffect>
+                                  </p:childTnLst>
+                                </p:cTn>
+                              </p:par>
+                            </p:childTnLst>
+                          </p:cTn>
+                        </p:par>
+                      </p:childTnLst>
+                    </p:cTn>
+                  </p:par>
+                </p:childTnLst>
+              </p:cTn>
+              <p:prevCondLst>
+                <p:cond evt="onPrev" delay="0">
+                  <p:tgtEl>
+                    <p:sldTgt/>
+                  </p:tgtEl>
+                </p:cond>
+              </p:prevCondLst>
+              <p:nextCondLst>
+                <p:cond evt="onNext" delay="0">
+                  <p:tgtEl>
+                    <p:sldTgt/>
+                  </p:tgtEl>
+                </p:cond>
+              </p:nextCondLst>
+            </p:seq>
+          </p:childTnLst>
+        </p:cTn>
+      </p:par>
+    </p:tnLst>
+  </p:timing>
 </p:sld>
 </file>
 
@@ -9975,6 +10040,7 @@
         <a:solidFill>
           <a:srgbClr val="0E1A2B"/>
         </a:solidFill>
+        <a:effectLst/>
       </p:bgPr>
     </p:bg>
     <p:spTree>
@@ -10014,14 +10080,14 @@
           </a:bodyPr>
           <a:lstStyle/>
           <a:p>
-            <a:pPr algn="l" indent="0" marL="0">
+            <a:pPr marL="0" indent="0" algn="l">
               <a:lnSpc>
                 <a:spcPts val="1960"/>
               </a:lnSpc>
               <a:buNone/>
             </a:pPr>
             <a:r>
-              <a:rPr lang="en-US" sz="1400" spc="100" kern="0" dirty="0">
+              <a:rPr lang="en-US" sz="1400" kern="0" spc="100" dirty="0">
                 <a:solidFill>
                   <a:srgbClr val="7DB0FF"/>
                 </a:solidFill>
@@ -10058,7 +10124,7 @@
           </a:bodyPr>
           <a:lstStyle/>
           <a:p>
-            <a:pPr algn="l" indent="0" marL="0">
+            <a:pPr marL="0" indent="0" algn="l">
               <a:lnSpc>
                 <a:spcPts val="3840"/>
               </a:lnSpc>
@@ -10082,7 +10148,9 @@
       <p:sp>
         <p:nvSpPr>
           <p:cNvPr id="4" name="Text 2"/>
-          <p:cNvSpPr/>
+          <p:cNvSpPr>
+            <a:spLocks noGrp="1"/>
+          </p:cNvSpPr>
           <p:nvPr>
             <p:ph type="title"/>
           </p:nvPr>
@@ -10104,7 +10172,7 @@
           </a:bodyPr>
           <a:lstStyle/>
           <a:p>
-            <a:pPr algn="l" indent="0" marL="0">
+            <a:pPr marL="0" indent="0" algn="l">
               <a:lnSpc>
                 <a:spcPts val="6930"/>
               </a:lnSpc>
@@ -10155,7 +10223,7 @@
           </a:bodyPr>
           <a:lstStyle/>
           <a:p>
-            <a:pPr algn="ctr" indent="0" marL="0">
+            <a:pPr marL="0" indent="0" algn="ctr">
               <a:lnSpc>
                 <a:spcPts val="2520"/>
               </a:lnSpc>
@@ -10206,7 +10274,7 @@
           </a:bodyPr>
           <a:lstStyle/>
           <a:p>
-            <a:pPr algn="ctr" indent="0" marL="0">
+            <a:pPr marL="0" indent="0" algn="ctr">
               <a:lnSpc>
                 <a:spcPts val="2520"/>
               </a:lnSpc>
@@ -10257,7 +10325,7 @@
           </a:bodyPr>
           <a:lstStyle/>
           <a:p>
-            <a:pPr algn="ctr" indent="0" marL="0">
+            <a:pPr marL="0" indent="0" algn="ctr">
               <a:lnSpc>
                 <a:spcPts val="2520"/>
               </a:lnSpc>
@@ -10308,7 +10376,7 @@
           </a:bodyPr>
           <a:lstStyle/>
           <a:p>
-            <a:pPr algn="ctr" indent="0" marL="0">
+            <a:pPr marL="0" indent="0" algn="ctr">
               <a:lnSpc>
                 <a:spcPts val="2520"/>
               </a:lnSpc>
@@ -10359,7 +10427,7 @@
           </a:bodyPr>
           <a:lstStyle/>
           <a:p>
-            <a:pPr algn="ctr" indent="0" marL="0">
+            <a:pPr marL="0" indent="0" algn="ctr">
               <a:lnSpc>
                 <a:spcPts val="2520"/>
               </a:lnSpc>
@@ -10403,7 +10471,7 @@
           </a:bodyPr>
           <a:lstStyle/>
           <a:p>
-            <a:pPr algn="l" indent="0" marL="0">
+            <a:pPr marL="0" indent="0" algn="l">
               <a:lnSpc>
                 <a:spcPts val="2340"/>
               </a:lnSpc>
@@ -10440,6 +10508,7 @@
         <a:solidFill>
           <a:srgbClr val="F7F6F1"/>
         </a:solidFill>
+        <a:effectLst/>
       </p:bgPr>
     </p:bg>
     <p:spTree>
@@ -10459,7 +10528,9 @@
       <p:sp>
         <p:nvSpPr>
           <p:cNvPr id="2" name="Text 0"/>
-          <p:cNvSpPr/>
+          <p:cNvSpPr>
+            <a:spLocks noGrp="1"/>
+          </p:cNvSpPr>
           <p:nvPr>
             <p:ph type="title"/>
           </p:nvPr>
@@ -10481,7 +10552,7 @@
           </a:bodyPr>
           <a:lstStyle/>
           <a:p>
-            <a:pPr algn="l" indent="0" marL="0">
+            <a:pPr marL="0" indent="0" algn="l">
               <a:lnSpc>
                 <a:spcPts val="4400"/>
               </a:lnSpc>
@@ -10502,384 +10573,1138 @@
           </a:p>
         </p:txBody>
       </p:sp>
-      <p:sp>
-        <p:nvSpPr>
-          <p:cNvPr id="3" name="Shape 1"/>
-          <p:cNvSpPr/>
-          <p:nvPr/>
-        </p:nvSpPr>
-        <p:spPr>
+      <p:grpSp>
+        <p:nvGrpSpPr>
+          <p:cNvPr id="30" name="Group 29">
+            <a:extLst>
+              <a:ext uri="{FF2B5EF4-FFF2-40B4-BE49-F238E27FC236}">
+                <a16:creationId xmlns:a16="http://schemas.microsoft.com/office/drawing/2014/main" id="{74A57ECA-DA46-5717-DADC-E7525FD2F390}"/>
+              </a:ext>
+            </a:extLst>
+          </p:cNvPr>
+          <p:cNvGrpSpPr/>
+          <p:nvPr/>
+        </p:nvGrpSpPr>
+        <p:grpSpPr>
           <a:xfrm>
             <a:off x="819150" y="1682750"/>
             <a:ext cx="1866900" cy="3378200"/>
+            <a:chOff x="819150" y="1682750"/>
+            <a:chExt cx="1866900" cy="3378200"/>
+          </a:xfrm>
+        </p:grpSpPr>
+        <p:sp>
+          <p:nvSpPr>
+            <p:cNvPr id="3" name="Shape 1"/>
+            <p:cNvSpPr/>
+            <p:nvPr/>
+          </p:nvSpPr>
+          <p:spPr>
+            <a:xfrm>
+              <a:off x="819150" y="1682750"/>
+              <a:ext cx="1866900" cy="3378200"/>
+            </a:xfrm>
+            <a:prstGeom prst="roundRect">
+              <a:avLst>
+                <a:gd name="adj" fmla="val 5102"/>
+              </a:avLst>
+            </a:prstGeom>
+            <a:solidFill>
+              <a:srgbClr val="FDFCF9"/>
+            </a:solidFill>
+            <a:ln w="12700">
+              <a:solidFill>
+                <a:srgbClr val="C9C6BA"/>
+              </a:solidFill>
+              <a:prstDash val="solid"/>
+            </a:ln>
+          </p:spPr>
+          <p:txBody>
+            <a:bodyPr/>
+            <a:lstStyle/>
+            <a:p>
+              <a:endParaRPr lang="en-US"/>
+            </a:p>
+          </p:txBody>
+        </p:sp>
+        <p:sp>
+          <p:nvSpPr>
+            <p:cNvPr id="4" name="Text 2"/>
+            <p:cNvSpPr/>
+            <p:nvPr/>
+          </p:nvSpPr>
+          <p:spPr>
+            <a:xfrm>
+              <a:off x="952500" y="2952155"/>
+              <a:ext cx="1651000" cy="238720"/>
+            </a:xfrm>
+            <a:prstGeom prst="rect">
+              <a:avLst/>
+            </a:prstGeom>
+            <a:noFill/>
+            <a:ln/>
+          </p:spPr>
+          <p:txBody>
+            <a:bodyPr wrap="square" lIns="0" tIns="0" rIns="0" bIns="0" rtlCol="0" anchor="t">
+              <a:normAutofit/>
+            </a:bodyPr>
+            <a:lstStyle/>
+            <a:p>
+              <a:pPr marL="0" indent="0" algn="l">
+                <a:lnSpc>
+                  <a:spcPts val="1680"/>
+                </a:lnSpc>
+                <a:buNone/>
+              </a:pPr>
+              <a:r>
+                <a:rPr lang="en-US" sz="1200" kern="0" spc="50" dirty="0">
+                  <a:solidFill>
+                    <a:srgbClr val="3B4656"/>
+                  </a:solidFill>
+                  <a:latin typeface="Courier New" pitchFamily="49" charset="0"/>
+                  <a:ea typeface="Courier New" pitchFamily="49" charset="-122"/>
+                  <a:cs typeface="Courier New" pitchFamily="49" charset="-120"/>
+                </a:rPr>
+                <a:t>HUMAN</a:t>
+              </a:r>
+              <a:endParaRPr lang="en-US" sz="1200" dirty="0"/>
+            </a:p>
+          </p:txBody>
+        </p:sp>
+        <p:sp>
+          <p:nvSpPr>
+            <p:cNvPr id="5" name="Text 3"/>
+            <p:cNvSpPr/>
+            <p:nvPr/>
+          </p:nvSpPr>
+          <p:spPr>
+            <a:xfrm>
+              <a:off x="952500" y="3241675"/>
+              <a:ext cx="1651000" cy="284427"/>
+            </a:xfrm>
+            <a:prstGeom prst="rect">
+              <a:avLst/>
+            </a:prstGeom>
+            <a:noFill/>
+            <a:ln/>
+          </p:spPr>
+          <p:txBody>
+            <a:bodyPr wrap="square" lIns="0" tIns="0" rIns="0" bIns="0" rtlCol="0" anchor="t">
+              <a:normAutofit/>
+            </a:bodyPr>
+            <a:lstStyle/>
+            <a:p>
+              <a:pPr marL="0" indent="0" algn="l">
+                <a:lnSpc>
+                  <a:spcPts val="2040"/>
+                </a:lnSpc>
+                <a:buNone/>
+              </a:pPr>
+              <a:r>
+                <a:rPr lang="en-US" sz="1700" b="1" dirty="0">
+                  <a:solidFill>
+                    <a:srgbClr val="0E1A2B"/>
+                  </a:solidFill>
+                  <a:latin typeface="Arial" pitchFamily="34" charset="0"/>
+                  <a:ea typeface="Arial" pitchFamily="34" charset="-122"/>
+                  <a:cs typeface="Arial" pitchFamily="34" charset="-120"/>
+                </a:rPr>
+                <a:t>Architecture</a:t>
+              </a:r>
+              <a:endParaRPr lang="en-US" sz="1700" dirty="0"/>
+            </a:p>
+          </p:txBody>
+        </p:sp>
+        <p:sp>
+          <p:nvSpPr>
+            <p:cNvPr id="6" name="Text 4"/>
+            <p:cNvSpPr/>
+            <p:nvPr/>
+          </p:nvSpPr>
+          <p:spPr>
+            <a:xfrm>
+              <a:off x="952500" y="3576904"/>
+              <a:ext cx="1651000" cy="239977"/>
+            </a:xfrm>
+            <a:prstGeom prst="rect">
+              <a:avLst/>
+            </a:prstGeom>
+            <a:noFill/>
+            <a:ln/>
+          </p:spPr>
+          <p:txBody>
+            <a:bodyPr wrap="square" lIns="0" tIns="0" rIns="0" bIns="0" rtlCol="0" anchor="t">
+              <a:normAutofit/>
+            </a:bodyPr>
+            <a:lstStyle/>
+            <a:p>
+              <a:pPr marL="0" indent="0" algn="l">
+                <a:lnSpc>
+                  <a:spcPts val="1690"/>
+                </a:lnSpc>
+                <a:buNone/>
+              </a:pPr>
+              <a:r>
+                <a:rPr lang="en-US" sz="1300" dirty="0">
+                  <a:solidFill>
+                    <a:srgbClr val="3B4656"/>
+                  </a:solidFill>
+                  <a:latin typeface="Arial" pitchFamily="34" charset="0"/>
+                  <a:ea typeface="Arial" pitchFamily="34" charset="-122"/>
+                  <a:cs typeface="Arial" pitchFamily="34" charset="-120"/>
+                </a:rPr>
+                <a:t>written for people</a:t>
+              </a:r>
+              <a:endParaRPr lang="en-US" sz="1300" dirty="0"/>
+            </a:p>
+          </p:txBody>
+        </p:sp>
+      </p:grpSp>
+      <p:pic>
+        <p:nvPicPr>
+          <p:cNvPr id="7" name="Image 0" descr="arrow-right"/>
+          <p:cNvPicPr>
+            <a:picLocks noChangeAspect="1"/>
+          </p:cNvPicPr>
+          <p:nvPr/>
+        </p:nvPicPr>
+        <p:blipFill>
+          <a:blip r:embed="rId3"/>
+          <a:srcRect/>
+          <a:stretch/>
+        </p:blipFill>
+        <p:spPr>
+          <a:xfrm>
+            <a:off x="2692400" y="3244850"/>
+            <a:ext cx="292100" cy="254000"/>
+          </a:xfrm>
+          <a:prstGeom prst="rect">
+            <a:avLst/>
+          </a:prstGeom>
+        </p:spPr>
+      </p:pic>
+      <p:grpSp>
+        <p:nvGrpSpPr>
+          <p:cNvPr id="31" name="Group 30">
+            <a:extLst>
+              <a:ext uri="{FF2B5EF4-FFF2-40B4-BE49-F238E27FC236}">
+                <a16:creationId xmlns:a16="http://schemas.microsoft.com/office/drawing/2014/main" id="{35E20E48-568D-3F67-7823-01B73A3E8E70}"/>
+              </a:ext>
+            </a:extLst>
+          </p:cNvPr>
+          <p:cNvGrpSpPr/>
+          <p:nvPr/>
+        </p:nvGrpSpPr>
+        <p:grpSpPr>
+          <a:xfrm>
+            <a:off x="2997200" y="1689100"/>
+            <a:ext cx="1854200" cy="3365500"/>
+            <a:chOff x="2997200" y="1689100"/>
+            <a:chExt cx="1854200" cy="3365500"/>
+          </a:xfrm>
+        </p:grpSpPr>
+        <p:sp>
+          <p:nvSpPr>
+            <p:cNvPr id="8" name="Shape 5"/>
+            <p:cNvSpPr/>
+            <p:nvPr/>
+          </p:nvSpPr>
+          <p:spPr>
+            <a:xfrm>
+              <a:off x="2997200" y="1689100"/>
+              <a:ext cx="1854200" cy="3365500"/>
+            </a:xfrm>
+            <a:prstGeom prst="roundRect">
+              <a:avLst>
+                <a:gd name="adj" fmla="val 4795"/>
+              </a:avLst>
+            </a:prstGeom>
+            <a:solidFill>
+              <a:srgbClr val="FDFCF9"/>
+            </a:solidFill>
+            <a:ln w="25400">
+              <a:solidFill>
+                <a:srgbClr val="2A64C9"/>
+              </a:solidFill>
+              <a:prstDash val="solid"/>
+            </a:ln>
+          </p:spPr>
+          <p:txBody>
+            <a:bodyPr/>
+            <a:lstStyle/>
+            <a:p>
+              <a:endParaRPr lang="en-US"/>
+            </a:p>
+          </p:txBody>
+        </p:sp>
+        <p:sp>
+          <p:nvSpPr>
+            <p:cNvPr id="9" name="Text 6"/>
+            <p:cNvSpPr/>
+            <p:nvPr/>
+          </p:nvSpPr>
+          <p:spPr>
+            <a:xfrm>
+              <a:off x="3136900" y="2952155"/>
+              <a:ext cx="1625600" cy="238720"/>
+            </a:xfrm>
+            <a:prstGeom prst="rect">
+              <a:avLst/>
+            </a:prstGeom>
+            <a:noFill/>
+            <a:ln/>
+          </p:spPr>
+          <p:txBody>
+            <a:bodyPr wrap="square" lIns="0" tIns="0" rIns="0" bIns="0" rtlCol="0" anchor="t">
+              <a:normAutofit/>
+            </a:bodyPr>
+            <a:lstStyle/>
+            <a:p>
+              <a:pPr marL="0" indent="0" algn="l">
+                <a:lnSpc>
+                  <a:spcPts val="1680"/>
+                </a:lnSpc>
+                <a:buNone/>
+              </a:pPr>
+              <a:r>
+                <a:rPr lang="en-US" sz="1200" kern="0" spc="50" dirty="0">
+                  <a:solidFill>
+                    <a:srgbClr val="2A64C9"/>
+                  </a:solidFill>
+                  <a:latin typeface="Courier New" pitchFamily="49" charset="0"/>
+                  <a:ea typeface="Courier New" pitchFamily="49" charset="-122"/>
+                  <a:cs typeface="Courier New" pitchFamily="49" charset="-120"/>
+                </a:rPr>
+                <a:t>FUZZY WORK</a:t>
+              </a:r>
+              <a:endParaRPr lang="en-US" sz="1200" dirty="0"/>
+            </a:p>
+          </p:txBody>
+        </p:sp>
+        <p:sp>
+          <p:nvSpPr>
+            <p:cNvPr id="10" name="Text 7"/>
+            <p:cNvSpPr/>
+            <p:nvPr/>
+          </p:nvSpPr>
+          <p:spPr>
+            <a:xfrm>
+              <a:off x="3136900" y="3241675"/>
+              <a:ext cx="1625600" cy="284427"/>
+            </a:xfrm>
+            <a:prstGeom prst="rect">
+              <a:avLst/>
+            </a:prstGeom>
+            <a:noFill/>
+            <a:ln/>
+          </p:spPr>
+          <p:txBody>
+            <a:bodyPr wrap="square" lIns="0" tIns="0" rIns="0" bIns="0" rtlCol="0" anchor="t">
+              <a:normAutofit/>
+            </a:bodyPr>
+            <a:lstStyle/>
+            <a:p>
+              <a:pPr marL="0" indent="0" algn="l">
+                <a:lnSpc>
+                  <a:spcPts val="2040"/>
+                </a:lnSpc>
+                <a:buNone/>
+              </a:pPr>
+              <a:r>
+                <a:rPr lang="en-US" sz="1700" b="1" dirty="0">
+                  <a:solidFill>
+                    <a:srgbClr val="0E1A2B"/>
+                  </a:solidFill>
+                  <a:latin typeface="Arial" pitchFamily="34" charset="0"/>
+                  <a:ea typeface="Arial" pitchFamily="34" charset="-122"/>
+                  <a:cs typeface="Arial" pitchFamily="34" charset="-120"/>
+                </a:rPr>
+                <a:t>AI</a:t>
+              </a:r>
+              <a:endParaRPr lang="en-US" sz="1700" dirty="0"/>
+            </a:p>
+          </p:txBody>
+        </p:sp>
+        <p:sp>
+          <p:nvSpPr>
+            <p:cNvPr id="11" name="Text 8"/>
+            <p:cNvSpPr/>
+            <p:nvPr/>
+          </p:nvSpPr>
+          <p:spPr>
+            <a:xfrm>
+              <a:off x="3136900" y="3576904"/>
+              <a:ext cx="1625600" cy="239977"/>
+            </a:xfrm>
+            <a:prstGeom prst="rect">
+              <a:avLst/>
+            </a:prstGeom>
+            <a:noFill/>
+            <a:ln/>
+          </p:spPr>
+          <p:txBody>
+            <a:bodyPr wrap="square" lIns="0" tIns="0" rIns="0" bIns="0" rtlCol="0" anchor="t">
+              <a:normAutofit/>
+            </a:bodyPr>
+            <a:lstStyle/>
+            <a:p>
+              <a:pPr marL="0" indent="0" algn="l">
+                <a:lnSpc>
+                  <a:spcPts val="1690"/>
+                </a:lnSpc>
+                <a:buNone/>
+              </a:pPr>
+              <a:r>
+                <a:rPr lang="en-US" sz="1300" dirty="0">
+                  <a:solidFill>
+                    <a:srgbClr val="3B4656"/>
+                  </a:solidFill>
+                  <a:latin typeface="Arial" pitchFamily="34" charset="0"/>
+                  <a:ea typeface="Arial" pitchFamily="34" charset="-122"/>
+                  <a:cs typeface="Arial" pitchFamily="34" charset="-120"/>
+                </a:rPr>
+                <a:t>interprets intent</a:t>
+              </a:r>
+              <a:endParaRPr lang="en-US" sz="1300" dirty="0"/>
+            </a:p>
+          </p:txBody>
+        </p:sp>
+      </p:grpSp>
+      <p:pic>
+        <p:nvPicPr>
+          <p:cNvPr id="12" name="Image 1" descr="arrow-right"/>
+          <p:cNvPicPr>
+            <a:picLocks noChangeAspect="1"/>
+          </p:cNvPicPr>
+          <p:nvPr/>
+        </p:nvPicPr>
+        <p:blipFill>
+          <a:blip r:embed="rId3"/>
+          <a:srcRect/>
+          <a:stretch/>
+        </p:blipFill>
+        <p:spPr>
+          <a:xfrm>
+            <a:off x="4864100" y="3244850"/>
+            <a:ext cx="292100" cy="254000"/>
+          </a:xfrm>
+          <a:prstGeom prst="rect">
+            <a:avLst/>
+          </a:prstGeom>
+        </p:spPr>
+      </p:pic>
+      <p:grpSp>
+        <p:nvGrpSpPr>
+          <p:cNvPr id="32" name="Group 31">
+            <a:extLst>
+              <a:ext uri="{FF2B5EF4-FFF2-40B4-BE49-F238E27FC236}">
+                <a16:creationId xmlns:a16="http://schemas.microsoft.com/office/drawing/2014/main" id="{B938393E-E5C7-3CBA-B43C-D7D6EBB7968D}"/>
+              </a:ext>
+            </a:extLst>
+          </p:cNvPr>
+          <p:cNvGrpSpPr/>
+          <p:nvPr/>
+        </p:nvGrpSpPr>
+        <p:grpSpPr>
+          <a:xfrm>
+            <a:off x="5156200" y="1676400"/>
+            <a:ext cx="1879600" cy="3390900"/>
+            <a:chOff x="5156200" y="1676400"/>
+            <a:chExt cx="1879600" cy="3390900"/>
+          </a:xfrm>
+        </p:grpSpPr>
+        <p:sp>
+          <p:nvSpPr>
+            <p:cNvPr id="13" name="Shape 9"/>
+            <p:cNvSpPr/>
+            <p:nvPr/>
+          </p:nvSpPr>
+          <p:spPr>
+            <a:xfrm>
+              <a:off x="5156200" y="1676400"/>
+              <a:ext cx="1879600" cy="3390900"/>
+            </a:xfrm>
+            <a:prstGeom prst="roundRect">
+              <a:avLst>
+                <a:gd name="adj" fmla="val 5405"/>
+              </a:avLst>
+            </a:prstGeom>
+            <a:solidFill>
+              <a:srgbClr val="0E1A2B"/>
+            </a:solidFill>
+            <a:ln/>
+          </p:spPr>
+          <p:txBody>
+            <a:bodyPr/>
+            <a:lstStyle/>
+            <a:p>
+              <a:endParaRPr lang="en-US"/>
+            </a:p>
+          </p:txBody>
+        </p:sp>
+        <p:sp>
+          <p:nvSpPr>
+            <p:cNvPr id="14" name="Text 10"/>
+            <p:cNvSpPr/>
+            <p:nvPr/>
+          </p:nvSpPr>
+          <p:spPr>
+            <a:xfrm>
+              <a:off x="5283200" y="2844868"/>
+              <a:ext cx="1676400" cy="238720"/>
+            </a:xfrm>
+            <a:prstGeom prst="rect">
+              <a:avLst/>
+            </a:prstGeom>
+            <a:noFill/>
+            <a:ln/>
+          </p:spPr>
+          <p:txBody>
+            <a:bodyPr wrap="square" lIns="0" tIns="0" rIns="0" bIns="0" rtlCol="0" anchor="t">
+              <a:normAutofit/>
+            </a:bodyPr>
+            <a:lstStyle/>
+            <a:p>
+              <a:pPr marL="0" indent="0" algn="l">
+                <a:lnSpc>
+                  <a:spcPts val="1680"/>
+                </a:lnSpc>
+                <a:buNone/>
+              </a:pPr>
+              <a:r>
+                <a:rPr lang="en-US" sz="1200" kern="0" spc="50" dirty="0">
+                  <a:solidFill>
+                    <a:srgbClr val="F2B134"/>
+                  </a:solidFill>
+                  <a:latin typeface="Courier New" pitchFamily="49" charset="0"/>
+                  <a:ea typeface="Courier New" pitchFamily="49" charset="-122"/>
+                  <a:cs typeface="Courier New" pitchFamily="49" charset="-120"/>
+                </a:rPr>
+                <a:t>THE CONTRACT</a:t>
+              </a:r>
+              <a:endParaRPr lang="en-US" sz="1200" dirty="0"/>
+            </a:p>
+          </p:txBody>
+        </p:sp>
+        <p:sp>
+          <p:nvSpPr>
+            <p:cNvPr id="15" name="Text 11"/>
+            <p:cNvSpPr/>
+            <p:nvPr/>
+          </p:nvSpPr>
+          <p:spPr>
+            <a:xfrm>
+              <a:off x="5283200" y="3134389"/>
+              <a:ext cx="1676400" cy="284427"/>
+            </a:xfrm>
+            <a:prstGeom prst="rect">
+              <a:avLst/>
+            </a:prstGeom>
+            <a:noFill/>
+            <a:ln/>
+          </p:spPr>
+          <p:txBody>
+            <a:bodyPr wrap="square" lIns="0" tIns="0" rIns="0" bIns="0" rtlCol="0" anchor="t">
+              <a:normAutofit/>
+            </a:bodyPr>
+            <a:lstStyle/>
+            <a:p>
+              <a:pPr marL="0" indent="0" algn="l">
+                <a:lnSpc>
+                  <a:spcPts val="2040"/>
+                </a:lnSpc>
+                <a:buNone/>
+              </a:pPr>
+              <a:r>
+                <a:rPr lang="en-US" sz="1700" b="1" dirty="0">
+                  <a:solidFill>
+                    <a:srgbClr val="F7F6F1"/>
+                  </a:solidFill>
+                  <a:latin typeface="Arial" pitchFamily="34" charset="0"/>
+                  <a:ea typeface="Arial" pitchFamily="34" charset="-122"/>
+                  <a:cs typeface="Arial" pitchFamily="34" charset="-120"/>
+                </a:rPr>
+                <a:t>YAML</a:t>
+              </a:r>
+              <a:endParaRPr lang="en-US" sz="1700" dirty="0"/>
+            </a:p>
+          </p:txBody>
+        </p:sp>
+        <p:sp>
+          <p:nvSpPr>
+            <p:cNvPr id="16" name="Text 12"/>
+            <p:cNvSpPr/>
+            <p:nvPr/>
+          </p:nvSpPr>
+          <p:spPr>
+            <a:xfrm>
+              <a:off x="5283200" y="3469615"/>
+              <a:ext cx="1676400" cy="454554"/>
+            </a:xfrm>
+            <a:prstGeom prst="rect">
+              <a:avLst/>
+            </a:prstGeom>
+            <a:noFill/>
+            <a:ln/>
+          </p:spPr>
+          <p:txBody>
+            <a:bodyPr wrap="square" lIns="0" tIns="0" rIns="0" bIns="0" rtlCol="0" anchor="t">
+              <a:normAutofit/>
+            </a:bodyPr>
+            <a:lstStyle/>
+            <a:p>
+              <a:pPr marL="0" indent="0" algn="l">
+                <a:lnSpc>
+                  <a:spcPts val="1690"/>
+                </a:lnSpc>
+                <a:buNone/>
+              </a:pPr>
+              <a:r>
+                <a:rPr lang="en-US" sz="1300" dirty="0">
+                  <a:solidFill>
+                    <a:srgbClr val="C4CFDC"/>
+                  </a:solidFill>
+                  <a:latin typeface="Arial" pitchFamily="34" charset="0"/>
+                  <a:ea typeface="Arial" pitchFamily="34" charset="-122"/>
+                  <a:cs typeface="Arial" pitchFamily="34" charset="-120"/>
+                </a:rPr>
+                <a:t>reviewed and committed</a:t>
+              </a:r>
+              <a:endParaRPr lang="en-US" sz="1300" dirty="0"/>
+            </a:p>
+          </p:txBody>
+        </p:sp>
+      </p:grpSp>
+      <p:pic>
+        <p:nvPicPr>
+          <p:cNvPr id="17" name="Image 2" descr="arrow-right"/>
+          <p:cNvPicPr>
+            <a:picLocks noChangeAspect="1"/>
+          </p:cNvPicPr>
+          <p:nvPr/>
+        </p:nvPicPr>
+        <p:blipFill>
+          <a:blip r:embed="rId3"/>
+          <a:srcRect/>
+          <a:stretch/>
+        </p:blipFill>
+        <p:spPr>
+          <a:xfrm>
+            <a:off x="7035800" y="3244850"/>
+            <a:ext cx="292100" cy="254000"/>
+          </a:xfrm>
+          <a:prstGeom prst="rect">
+            <a:avLst/>
+          </a:prstGeom>
+        </p:spPr>
+      </p:pic>
+      <p:grpSp>
+        <p:nvGrpSpPr>
+          <p:cNvPr id="33" name="Group 32">
+            <a:extLst>
+              <a:ext uri="{FF2B5EF4-FFF2-40B4-BE49-F238E27FC236}">
+                <a16:creationId xmlns:a16="http://schemas.microsoft.com/office/drawing/2014/main" id="{8DC0B1D8-DBB8-CF34-D49C-0C3F0607BA97}"/>
+              </a:ext>
+            </a:extLst>
+          </p:cNvPr>
+          <p:cNvGrpSpPr/>
+          <p:nvPr/>
+        </p:nvGrpSpPr>
+        <p:grpSpPr>
+          <a:xfrm>
+            <a:off x="7340600" y="1689100"/>
+            <a:ext cx="1854200" cy="3365500"/>
+            <a:chOff x="7340600" y="1689100"/>
+            <a:chExt cx="1854200" cy="3365500"/>
+          </a:xfrm>
+        </p:grpSpPr>
+        <p:sp>
+          <p:nvSpPr>
+            <p:cNvPr id="18" name="Shape 13"/>
+            <p:cNvSpPr/>
+            <p:nvPr/>
+          </p:nvSpPr>
+          <p:spPr>
+            <a:xfrm>
+              <a:off x="7340600" y="1689100"/>
+              <a:ext cx="1854200" cy="3365500"/>
+            </a:xfrm>
+            <a:prstGeom prst="roundRect">
+              <a:avLst>
+                <a:gd name="adj" fmla="val 4795"/>
+              </a:avLst>
+            </a:prstGeom>
+            <a:solidFill>
+              <a:srgbClr val="FDFCF9"/>
+            </a:solidFill>
+            <a:ln w="25400">
+              <a:solidFill>
+                <a:srgbClr val="B4690E"/>
+              </a:solidFill>
+              <a:prstDash val="solid"/>
+            </a:ln>
+          </p:spPr>
+          <p:txBody>
+            <a:bodyPr/>
+            <a:lstStyle/>
+            <a:p>
+              <a:endParaRPr lang="en-US"/>
+            </a:p>
+          </p:txBody>
+        </p:sp>
+        <p:sp>
+          <p:nvSpPr>
+            <p:cNvPr id="19" name="Text 14"/>
+            <p:cNvSpPr/>
+            <p:nvPr/>
+          </p:nvSpPr>
+          <p:spPr>
+            <a:xfrm>
+              <a:off x="7480300" y="2844868"/>
+              <a:ext cx="1625600" cy="238720"/>
+            </a:xfrm>
+            <a:prstGeom prst="rect">
+              <a:avLst/>
+            </a:prstGeom>
+            <a:noFill/>
+            <a:ln/>
+          </p:spPr>
+          <p:txBody>
+            <a:bodyPr wrap="square" lIns="0" tIns="0" rIns="0" bIns="0" rtlCol="0" anchor="t">
+              <a:normAutofit/>
+            </a:bodyPr>
+            <a:lstStyle/>
+            <a:p>
+              <a:pPr marL="0" indent="0" algn="l">
+                <a:lnSpc>
+                  <a:spcPts val="1680"/>
+                </a:lnSpc>
+                <a:buNone/>
+              </a:pPr>
+              <a:r>
+                <a:rPr lang="en-US" sz="1200" kern="0" spc="50" dirty="0">
+                  <a:solidFill>
+                    <a:srgbClr val="8A4E05"/>
+                  </a:solidFill>
+                  <a:latin typeface="Courier New" pitchFamily="49" charset="0"/>
+                  <a:ea typeface="Courier New" pitchFamily="49" charset="-122"/>
+                  <a:cs typeface="Courier New" pitchFamily="49" charset="-120"/>
+                </a:rPr>
+                <a:t>DETERMINISTIC</a:t>
+              </a:r>
+              <a:endParaRPr lang="en-US" sz="1200" dirty="0"/>
+            </a:p>
+          </p:txBody>
+        </p:sp>
+        <p:sp>
+          <p:nvSpPr>
+            <p:cNvPr id="20" name="Text 15"/>
+            <p:cNvSpPr/>
+            <p:nvPr/>
+          </p:nvSpPr>
+          <p:spPr>
+            <a:xfrm>
+              <a:off x="7480300" y="3134389"/>
+              <a:ext cx="1625600" cy="284427"/>
+            </a:xfrm>
+            <a:prstGeom prst="rect">
+              <a:avLst/>
+            </a:prstGeom>
+            <a:noFill/>
+            <a:ln/>
+          </p:spPr>
+          <p:txBody>
+            <a:bodyPr wrap="square" lIns="0" tIns="0" rIns="0" bIns="0" rtlCol="0" anchor="t">
+              <a:normAutofit/>
+            </a:bodyPr>
+            <a:lstStyle/>
+            <a:p>
+              <a:pPr marL="0" indent="0" algn="l">
+                <a:lnSpc>
+                  <a:spcPts val="2040"/>
+                </a:lnSpc>
+                <a:buNone/>
+              </a:pPr>
+              <a:r>
+                <a:rPr lang="en-US" sz="1700" b="1" dirty="0">
+                  <a:solidFill>
+                    <a:srgbClr val="0E1A2B"/>
+                  </a:solidFill>
+                  <a:latin typeface="Arial" pitchFamily="34" charset="0"/>
+                  <a:ea typeface="Arial" pitchFamily="34" charset="-122"/>
+                  <a:cs typeface="Arial" pitchFamily="34" charset="-120"/>
+                </a:rPr>
+                <a:t>PowerShell</a:t>
+              </a:r>
+              <a:endParaRPr lang="en-US" sz="1700" dirty="0"/>
+            </a:p>
+          </p:txBody>
+        </p:sp>
+        <p:sp>
+          <p:nvSpPr>
+            <p:cNvPr id="21" name="Text 16"/>
+            <p:cNvSpPr/>
+            <p:nvPr/>
+          </p:nvSpPr>
+          <p:spPr>
+            <a:xfrm>
+              <a:off x="7480300" y="3469615"/>
+              <a:ext cx="1625600" cy="454554"/>
+            </a:xfrm>
+            <a:prstGeom prst="rect">
+              <a:avLst/>
+            </a:prstGeom>
+            <a:noFill/>
+            <a:ln/>
+          </p:spPr>
+          <p:txBody>
+            <a:bodyPr wrap="square" lIns="0" tIns="0" rIns="0" bIns="0" rtlCol="0" anchor="t">
+              <a:normAutofit/>
+            </a:bodyPr>
+            <a:lstStyle/>
+            <a:p>
+              <a:pPr marL="0" indent="0" algn="l">
+                <a:lnSpc>
+                  <a:spcPts val="1690"/>
+                </a:lnSpc>
+                <a:buNone/>
+              </a:pPr>
+              <a:r>
+                <a:rPr lang="en-US" sz="1300" dirty="0">
+                  <a:solidFill>
+                    <a:srgbClr val="3B4656"/>
+                  </a:solidFill>
+                  <a:latin typeface="Arial" pitchFamily="34" charset="0"/>
+                  <a:ea typeface="Arial" pitchFamily="34" charset="-122"/>
+                  <a:cs typeface="Arial" pitchFamily="34" charset="-120"/>
+                </a:rPr>
+                <a:t>same output every run</a:t>
+              </a:r>
+              <a:endParaRPr lang="en-US" sz="1300" dirty="0"/>
+            </a:p>
+          </p:txBody>
+        </p:sp>
+      </p:grpSp>
+      <p:pic>
+        <p:nvPicPr>
+          <p:cNvPr id="22" name="Image 3" descr="arrow-right"/>
+          <p:cNvPicPr>
+            <a:picLocks noChangeAspect="1"/>
+          </p:cNvPicPr>
+          <p:nvPr/>
+        </p:nvPicPr>
+        <p:blipFill>
+          <a:blip r:embed="rId3"/>
+          <a:srcRect/>
+          <a:stretch/>
+        </p:blipFill>
+        <p:spPr>
+          <a:xfrm>
+            <a:off x="9207500" y="3244850"/>
+            <a:ext cx="292100" cy="254000"/>
+          </a:xfrm>
+          <a:prstGeom prst="rect">
+            <a:avLst/>
+          </a:prstGeom>
+        </p:spPr>
+      </p:pic>
+      <p:grpSp>
+        <p:nvGrpSpPr>
+          <p:cNvPr id="34" name="Group 33">
+            <a:extLst>
+              <a:ext uri="{FF2B5EF4-FFF2-40B4-BE49-F238E27FC236}">
+                <a16:creationId xmlns:a16="http://schemas.microsoft.com/office/drawing/2014/main" id="{E935EF90-7D3F-DFF3-E15F-3E3091304E7D}"/>
+              </a:ext>
+            </a:extLst>
+          </p:cNvPr>
+          <p:cNvGrpSpPr/>
+          <p:nvPr/>
+        </p:nvGrpSpPr>
+        <p:grpSpPr>
+          <a:xfrm>
+            <a:off x="9505950" y="1682750"/>
+            <a:ext cx="1866900" cy="3378200"/>
+            <a:chOff x="9505950" y="1682750"/>
+            <a:chExt cx="1866900" cy="3378200"/>
+          </a:xfrm>
+        </p:grpSpPr>
+        <p:sp>
+          <p:nvSpPr>
+            <p:cNvPr id="23" name="Shape 17"/>
+            <p:cNvSpPr/>
+            <p:nvPr/>
+          </p:nvSpPr>
+          <p:spPr>
+            <a:xfrm>
+              <a:off x="9505950" y="1682750"/>
+              <a:ext cx="1866900" cy="3378200"/>
+            </a:xfrm>
+            <a:prstGeom prst="roundRect">
+              <a:avLst>
+                <a:gd name="adj" fmla="val 5102"/>
+              </a:avLst>
+            </a:prstGeom>
+            <a:solidFill>
+              <a:srgbClr val="FDFCF9"/>
+            </a:solidFill>
+            <a:ln w="12700">
+              <a:solidFill>
+                <a:srgbClr val="C9C6BA"/>
+              </a:solidFill>
+              <a:prstDash val="solid"/>
+            </a:ln>
+          </p:spPr>
+          <p:txBody>
+            <a:bodyPr/>
+            <a:lstStyle/>
+            <a:p>
+              <a:endParaRPr lang="en-US"/>
+            </a:p>
+          </p:txBody>
+        </p:sp>
+        <p:sp>
+          <p:nvSpPr>
+            <p:cNvPr id="24" name="Text 18"/>
+            <p:cNvSpPr/>
+            <p:nvPr/>
+          </p:nvSpPr>
+          <p:spPr>
+            <a:xfrm>
+              <a:off x="9639300" y="2844868"/>
+              <a:ext cx="1651000" cy="238720"/>
+            </a:xfrm>
+            <a:prstGeom prst="rect">
+              <a:avLst/>
+            </a:prstGeom>
+            <a:noFill/>
+            <a:ln/>
+          </p:spPr>
+          <p:txBody>
+            <a:bodyPr wrap="square" lIns="0" tIns="0" rIns="0" bIns="0" rtlCol="0" anchor="t">
+              <a:normAutofit/>
+            </a:bodyPr>
+            <a:lstStyle/>
+            <a:p>
+              <a:pPr marL="0" indent="0" algn="l">
+                <a:lnSpc>
+                  <a:spcPts val="1680"/>
+                </a:lnSpc>
+                <a:buNone/>
+              </a:pPr>
+              <a:r>
+                <a:rPr lang="en-US" sz="1200" kern="0" spc="50" dirty="0">
+                  <a:solidFill>
+                    <a:srgbClr val="3B4656"/>
+                  </a:solidFill>
+                  <a:latin typeface="Courier New" pitchFamily="49" charset="0"/>
+                  <a:ea typeface="Courier New" pitchFamily="49" charset="-122"/>
+                  <a:cs typeface="Courier New" pitchFamily="49" charset="-120"/>
+                </a:rPr>
+                <a:t>OUTPUT</a:t>
+              </a:r>
+              <a:endParaRPr lang="en-US" sz="1200" dirty="0"/>
+            </a:p>
+          </p:txBody>
+        </p:sp>
+        <p:sp>
+          <p:nvSpPr>
+            <p:cNvPr id="25" name="Text 19"/>
+            <p:cNvSpPr/>
+            <p:nvPr/>
+          </p:nvSpPr>
+          <p:spPr>
+            <a:xfrm>
+              <a:off x="9639300" y="3134389"/>
+              <a:ext cx="1651000" cy="284427"/>
+            </a:xfrm>
+            <a:prstGeom prst="rect">
+              <a:avLst/>
+            </a:prstGeom>
+            <a:noFill/>
+            <a:ln/>
+          </p:spPr>
+          <p:txBody>
+            <a:bodyPr wrap="square" lIns="0" tIns="0" rIns="0" bIns="0" rtlCol="0" anchor="t">
+              <a:normAutofit/>
+            </a:bodyPr>
+            <a:lstStyle/>
+            <a:p>
+              <a:pPr marL="0" indent="0" algn="l">
+                <a:lnSpc>
+                  <a:spcPts val="2040"/>
+                </a:lnSpc>
+                <a:buNone/>
+              </a:pPr>
+              <a:r>
+                <a:rPr lang="en-US" sz="1700" b="1" dirty="0">
+                  <a:solidFill>
+                    <a:srgbClr val="0E1A2B"/>
+                  </a:solidFill>
+                  <a:latin typeface="Arial" pitchFamily="34" charset="0"/>
+                  <a:ea typeface="Arial" pitchFamily="34" charset="-122"/>
+                  <a:cs typeface="Arial" pitchFamily="34" charset="-120"/>
+                </a:rPr>
+                <a:t>Terraform</a:t>
+              </a:r>
+              <a:endParaRPr lang="en-US" sz="1700" dirty="0"/>
+            </a:p>
+          </p:txBody>
+        </p:sp>
+        <p:sp>
+          <p:nvSpPr>
+            <p:cNvPr id="26" name="Text 20"/>
+            <p:cNvSpPr/>
+            <p:nvPr/>
+          </p:nvSpPr>
+          <p:spPr>
+            <a:xfrm>
+              <a:off x="9639300" y="3469615"/>
+              <a:ext cx="1651000" cy="454554"/>
+            </a:xfrm>
+            <a:prstGeom prst="rect">
+              <a:avLst/>
+            </a:prstGeom>
+            <a:noFill/>
+            <a:ln/>
+          </p:spPr>
+          <p:txBody>
+            <a:bodyPr wrap="square" lIns="0" tIns="0" rIns="0" bIns="0" rtlCol="0" anchor="t">
+              <a:normAutofit/>
+            </a:bodyPr>
+            <a:lstStyle/>
+            <a:p>
+              <a:pPr marL="0" indent="0" algn="l">
+                <a:lnSpc>
+                  <a:spcPts val="1690"/>
+                </a:lnSpc>
+                <a:buNone/>
+              </a:pPr>
+              <a:r>
+                <a:rPr lang="en-US" sz="1300" dirty="0">
+                  <a:solidFill>
+                    <a:srgbClr val="3B4656"/>
+                  </a:solidFill>
+                  <a:latin typeface="Arial" pitchFamily="34" charset="0"/>
+                  <a:ea typeface="Arial" pitchFamily="34" charset="-122"/>
+                  <a:cs typeface="Arial" pitchFamily="34" charset="-120"/>
+                </a:rPr>
+                <a:t>plain azurerm, ready to plan</a:t>
+              </a:r>
+              <a:endParaRPr lang="en-US" sz="1300" dirty="0"/>
+            </a:p>
+          </p:txBody>
+        </p:sp>
+      </p:grpSp>
+      <p:sp>
+        <p:nvSpPr>
+          <p:cNvPr id="27" name="Text 21"/>
+          <p:cNvSpPr/>
+          <p:nvPr/>
+        </p:nvSpPr>
+        <p:spPr>
+          <a:xfrm>
+            <a:off x="812800" y="5372100"/>
+            <a:ext cx="2345664" cy="469900"/>
           </a:xfrm>
           <a:prstGeom prst="roundRect">
             <a:avLst>
-              <a:gd name="adj" fmla="val 5102"/>
+              <a:gd name="adj" fmla="val 16216"/>
             </a:avLst>
           </a:prstGeom>
           <a:solidFill>
-            <a:srgbClr val="FDFCF9"/>
+            <a:srgbClr val="2A64C9"/>
           </a:solidFill>
-          <a:ln w="12700">
-            <a:solidFill>
-              <a:srgbClr val="C9C6BA"/>
-            </a:solidFill>
-            <a:prstDash val="solid"/>
-          </a:ln>
-        </p:spPr>
-      </p:sp>
-      <p:sp>
-        <p:nvSpPr>
-          <p:cNvPr id="4" name="Text 2"/>
-          <p:cNvSpPr/>
-          <p:nvPr/>
-        </p:nvSpPr>
-        <p:spPr>
-          <a:xfrm>
-            <a:off x="952500" y="2952155"/>
-            <a:ext cx="1651000" cy="238720"/>
-          </a:xfrm>
-          <a:prstGeom prst="rect">
-            <a:avLst/>
-          </a:prstGeom>
-          <a:noFill/>
           <a:ln/>
         </p:spPr>
         <p:txBody>
-          <a:bodyPr wrap="square" lIns="0" tIns="0" rIns="0" bIns="0" rtlCol="0" anchor="t">
+          <a:bodyPr wrap="none" lIns="0" tIns="0" rIns="0" bIns="0" rtlCol="0" anchor="ctr">
             <a:normAutofit/>
           </a:bodyPr>
           <a:lstStyle/>
           <a:p>
-            <a:pPr algn="l" indent="0" marL="0">
-              <a:lnSpc>
-                <a:spcPts val="1680"/>
-              </a:lnSpc>
-              <a:buNone/>
-            </a:pPr>
-            <a:r>
-              <a:rPr lang="en-US" sz="1200" spc="50" kern="0" dirty="0">
-                <a:solidFill>
-                  <a:srgbClr val="3B4656"/>
-                </a:solidFill>
-                <a:latin typeface="Courier New" pitchFamily="49" charset="0"/>
-                <a:ea typeface="Courier New" pitchFamily="49" charset="-122"/>
-                <a:cs typeface="Courier New" pitchFamily="49" charset="-120"/>
-              </a:rPr>
-              <a:t>HUMAN</a:t>
-            </a:r>
-            <a:endParaRPr lang="en-US" sz="1200" dirty="0"/>
-          </a:p>
-        </p:txBody>
-      </p:sp>
-      <p:sp>
-        <p:nvSpPr>
-          <p:cNvPr id="5" name="Text 3"/>
-          <p:cNvSpPr/>
-          <p:nvPr/>
-        </p:nvSpPr>
-        <p:spPr>
-          <a:xfrm>
-            <a:off x="952500" y="3241675"/>
-            <a:ext cx="1651000" cy="284427"/>
-          </a:xfrm>
-          <a:prstGeom prst="rect">
-            <a:avLst/>
-          </a:prstGeom>
-          <a:noFill/>
-          <a:ln/>
-        </p:spPr>
-        <p:txBody>
-          <a:bodyPr wrap="square" lIns="0" tIns="0" rIns="0" bIns="0" rtlCol="0" anchor="t">
-            <a:normAutofit/>
-          </a:bodyPr>
-          <a:lstStyle/>
-          <a:p>
-            <a:pPr algn="l" indent="0" marL="0">
-              <a:lnSpc>
-                <a:spcPts val="2040"/>
-              </a:lnSpc>
-              <a:buNone/>
-            </a:pPr>
-            <a:r>
-              <a:rPr lang="en-US" sz="1700" b="1" dirty="0">
-                <a:solidFill>
-                  <a:srgbClr val="0E1A2B"/>
+            <a:pPr marL="0" indent="0" algn="ctr">
+              <a:lnSpc>
+                <a:spcPts val="2100"/>
+              </a:lnSpc>
+              <a:buNone/>
+            </a:pPr>
+            <a:r>
+              <a:rPr lang="en-US" sz="1500" b="1" dirty="0">
+                <a:solidFill>
+                  <a:srgbClr val="F7F6F1"/>
                 </a:solidFill>
                 <a:latin typeface="Arial" pitchFamily="34" charset="0"/>
                 <a:ea typeface="Arial" pitchFamily="34" charset="-122"/>
                 <a:cs typeface="Arial" pitchFamily="34" charset="-120"/>
               </a:rPr>
-              <a:t>Architecture</a:t>
-            </a:r>
-            <a:endParaRPr lang="en-US" sz="1700" dirty="0"/>
-          </a:p>
-        </p:txBody>
-      </p:sp>
-      <p:sp>
-        <p:nvSpPr>
-          <p:cNvPr id="6" name="Text 4"/>
-          <p:cNvSpPr/>
-          <p:nvPr/>
-        </p:nvSpPr>
-        <p:spPr>
-          <a:xfrm>
-            <a:off x="952500" y="3576904"/>
-            <a:ext cx="1651000" cy="239977"/>
-          </a:xfrm>
-          <a:prstGeom prst="rect">
-            <a:avLst/>
-          </a:prstGeom>
-          <a:noFill/>
+              <a:t>AI handles fuzzy work</a:t>
+            </a:r>
+            <a:endParaRPr lang="en-US" sz="1500" dirty="0"/>
+          </a:p>
+        </p:txBody>
+      </p:sp>
+      <p:sp>
+        <p:nvSpPr>
+          <p:cNvPr id="28" name="Text 22"/>
+          <p:cNvSpPr/>
+          <p:nvPr/>
+        </p:nvSpPr>
+        <p:spPr>
+          <a:xfrm>
+            <a:off x="3285464" y="5372100"/>
+            <a:ext cx="3404460" cy="469900"/>
+          </a:xfrm>
+          <a:prstGeom prst="roundRect">
+            <a:avLst>
+              <a:gd name="adj" fmla="val 16216"/>
+            </a:avLst>
+          </a:prstGeom>
+          <a:solidFill>
+            <a:srgbClr val="B4690E"/>
+          </a:solidFill>
           <a:ln/>
         </p:spPr>
         <p:txBody>
-          <a:bodyPr wrap="square" lIns="0" tIns="0" rIns="0" bIns="0" rtlCol="0" anchor="t">
+          <a:bodyPr wrap="none" lIns="0" tIns="0" rIns="0" bIns="0" rtlCol="0" anchor="ctr">
             <a:normAutofit/>
           </a:bodyPr>
           <a:lstStyle/>
           <a:p>
-            <a:pPr algn="l" indent="0" marL="0">
-              <a:lnSpc>
-                <a:spcPts val="1690"/>
-              </a:lnSpc>
-              <a:buNone/>
-            </a:pPr>
-            <a:r>
-              <a:rPr lang="en-US" sz="1300" dirty="0">
-                <a:solidFill>
-                  <a:srgbClr val="3B4656"/>
+            <a:pPr marL="0" indent="0" algn="ctr">
+              <a:lnSpc>
+                <a:spcPts val="2100"/>
+              </a:lnSpc>
+              <a:buNone/>
+            </a:pPr>
+            <a:r>
+              <a:rPr lang="en-US" sz="1500" b="1" dirty="0">
+                <a:solidFill>
+                  <a:srgbClr val="F7F6F1"/>
                 </a:solidFill>
                 <a:latin typeface="Arial" pitchFamily="34" charset="0"/>
                 <a:ea typeface="Arial" pitchFamily="34" charset="-122"/>
                 <a:cs typeface="Arial" pitchFamily="34" charset="-120"/>
               </a:rPr>
-              <a:t>written for people</a:t>
-            </a:r>
-            <a:endParaRPr lang="en-US" sz="1300" dirty="0"/>
-          </a:p>
-        </p:txBody>
-      </p:sp>
-      <p:pic>
-        <p:nvPicPr>
-          <p:cNvPr id="7" name="Image 0" descr="arrow-right">    </p:cNvPr>
-          <p:cNvPicPr>
-            <a:picLocks noChangeAspect="1"/>
-          </p:cNvPicPr>
-          <p:nvPr/>
-        </p:nvPicPr>
-        <p:blipFill>
-          <a:blip r:embed="rId1"/>
-          <a:srcRect l="0" r="0" t="0" b="0"/>
-          <a:stretch/>
-        </p:blipFill>
-        <p:spPr>
-          <a:xfrm>
-            <a:off x="2692400" y="3244850"/>
-            <a:ext cx="292100" cy="254000"/>
-          </a:xfrm>
-          <a:prstGeom prst="rect">
-            <a:avLst/>
-          </a:prstGeom>
-        </p:spPr>
-      </p:pic>
-      <p:sp>
-        <p:nvSpPr>
-          <p:cNvPr id="8" name="Shape 5"/>
-          <p:cNvSpPr/>
-          <p:nvPr/>
-        </p:nvSpPr>
-        <p:spPr>
-          <a:xfrm>
-            <a:off x="2997200" y="1689100"/>
-            <a:ext cx="1854200" cy="3365500"/>
+              <a:t>Scripts handle deterministic work</a:t>
+            </a:r>
+            <a:endParaRPr lang="en-US" sz="1500" dirty="0"/>
+          </a:p>
+        </p:txBody>
+      </p:sp>
+      <p:sp>
+        <p:nvSpPr>
+          <p:cNvPr id="29" name="Text 23"/>
+          <p:cNvSpPr/>
+          <p:nvPr/>
+        </p:nvSpPr>
+        <p:spPr>
+          <a:xfrm>
+            <a:off x="6816923" y="5372100"/>
+            <a:ext cx="2853598" cy="469900"/>
           </a:xfrm>
           <a:prstGeom prst="roundRect">
             <a:avLst>
-              <a:gd name="adj" fmla="val 4795"/>
-            </a:avLst>
-          </a:prstGeom>
-          <a:solidFill>
-            <a:srgbClr val="FDFCF9"/>
-          </a:solidFill>
-          <a:ln w="25400">
-            <a:solidFill>
-              <a:srgbClr val="2A64C9"/>
-            </a:solidFill>
-            <a:prstDash val="solid"/>
-          </a:ln>
-        </p:spPr>
-      </p:sp>
-      <p:sp>
-        <p:nvSpPr>
-          <p:cNvPr id="9" name="Text 6"/>
-          <p:cNvSpPr/>
-          <p:nvPr/>
-        </p:nvSpPr>
-        <p:spPr>
-          <a:xfrm>
-            <a:off x="3136900" y="2952155"/>
-            <a:ext cx="1625600" cy="238720"/>
-          </a:xfrm>
-          <a:prstGeom prst="rect">
-            <a:avLst/>
-          </a:prstGeom>
-          <a:noFill/>
-          <a:ln/>
-        </p:spPr>
-        <p:txBody>
-          <a:bodyPr wrap="square" lIns="0" tIns="0" rIns="0" bIns="0" rtlCol="0" anchor="t">
-            <a:normAutofit/>
-          </a:bodyPr>
-          <a:lstStyle/>
-          <a:p>
-            <a:pPr algn="l" indent="0" marL="0">
-              <a:lnSpc>
-                <a:spcPts val="1680"/>
-              </a:lnSpc>
-              <a:buNone/>
-            </a:pPr>
-            <a:r>
-              <a:rPr lang="en-US" sz="1200" spc="50" kern="0" dirty="0">
-                <a:solidFill>
-                  <a:srgbClr val="2A64C9"/>
-                </a:solidFill>
-                <a:latin typeface="Courier New" pitchFamily="49" charset="0"/>
-                <a:ea typeface="Courier New" pitchFamily="49" charset="-122"/>
-                <a:cs typeface="Courier New" pitchFamily="49" charset="-120"/>
-              </a:rPr>
-              <a:t>FUZZY WORK</a:t>
-            </a:r>
-            <a:endParaRPr lang="en-US" sz="1200" dirty="0"/>
-          </a:p>
-        </p:txBody>
-      </p:sp>
-      <p:sp>
-        <p:nvSpPr>
-          <p:cNvPr id="10" name="Text 7"/>
-          <p:cNvSpPr/>
-          <p:nvPr/>
-        </p:nvSpPr>
-        <p:spPr>
-          <a:xfrm>
-            <a:off x="3136900" y="3241675"/>
-            <a:ext cx="1625600" cy="284427"/>
-          </a:xfrm>
-          <a:prstGeom prst="rect">
-            <a:avLst/>
-          </a:prstGeom>
-          <a:noFill/>
-          <a:ln/>
-        </p:spPr>
-        <p:txBody>
-          <a:bodyPr wrap="square" lIns="0" tIns="0" rIns="0" bIns="0" rtlCol="0" anchor="t">
-            <a:normAutofit/>
-          </a:bodyPr>
-          <a:lstStyle/>
-          <a:p>
-            <a:pPr algn="l" indent="0" marL="0">
-              <a:lnSpc>
-                <a:spcPts val="2040"/>
-              </a:lnSpc>
-              <a:buNone/>
-            </a:pPr>
-            <a:r>
-              <a:rPr lang="en-US" sz="1700" b="1" dirty="0">
-                <a:solidFill>
-                  <a:srgbClr val="0E1A2B"/>
-                </a:solidFill>
-                <a:latin typeface="Arial" pitchFamily="34" charset="0"/>
-                <a:ea typeface="Arial" pitchFamily="34" charset="-122"/>
-                <a:cs typeface="Arial" pitchFamily="34" charset="-120"/>
-              </a:rPr>
-              <a:t>AI</a:t>
-            </a:r>
-            <a:endParaRPr lang="en-US" sz="1700" dirty="0"/>
-          </a:p>
-        </p:txBody>
-      </p:sp>
-      <p:sp>
-        <p:nvSpPr>
-          <p:cNvPr id="11" name="Text 8"/>
-          <p:cNvSpPr/>
-          <p:nvPr/>
-        </p:nvSpPr>
-        <p:spPr>
-          <a:xfrm>
-            <a:off x="3136900" y="3576904"/>
-            <a:ext cx="1625600" cy="239977"/>
-          </a:xfrm>
-          <a:prstGeom prst="rect">
-            <a:avLst/>
-          </a:prstGeom>
-          <a:noFill/>
-          <a:ln/>
-        </p:spPr>
-        <p:txBody>
-          <a:bodyPr wrap="square" lIns="0" tIns="0" rIns="0" bIns="0" rtlCol="0" anchor="t">
-            <a:normAutofit/>
-          </a:bodyPr>
-          <a:lstStyle/>
-          <a:p>
-            <a:pPr algn="l" indent="0" marL="0">
-              <a:lnSpc>
-                <a:spcPts val="1690"/>
-              </a:lnSpc>
-              <a:buNone/>
-            </a:pPr>
-            <a:r>
-              <a:rPr lang="en-US" sz="1300" dirty="0">
-                <a:solidFill>
-                  <a:srgbClr val="3B4656"/>
-                </a:solidFill>
-                <a:latin typeface="Arial" pitchFamily="34" charset="0"/>
-                <a:ea typeface="Arial" pitchFamily="34" charset="-122"/>
-                <a:cs typeface="Arial" pitchFamily="34" charset="-120"/>
-              </a:rPr>
-              <a:t>interprets intent</a:t>
-            </a:r>
-            <a:endParaRPr lang="en-US" sz="1300" dirty="0"/>
-          </a:p>
-        </p:txBody>
-      </p:sp>
-      <p:pic>
-        <p:nvPicPr>
-          <p:cNvPr id="12" name="Image 1" descr="arrow-right">    </p:cNvPr>
-          <p:cNvPicPr>
-            <a:picLocks noChangeAspect="1"/>
-          </p:cNvPicPr>
-          <p:nvPr/>
-        </p:nvPicPr>
-        <p:blipFill>
-          <a:blip r:embed="rId2"/>
-          <a:srcRect l="0" r="0" t="0" b="0"/>
-          <a:stretch/>
-        </p:blipFill>
-        <p:spPr>
-          <a:xfrm>
-            <a:off x="4864100" y="3244850"/>
-            <a:ext cx="292100" cy="254000"/>
-          </a:xfrm>
-          <a:prstGeom prst="rect">
-            <a:avLst/>
-          </a:prstGeom>
-        </p:spPr>
-      </p:pic>
-      <p:sp>
-        <p:nvSpPr>
-          <p:cNvPr id="13" name="Shape 9"/>
-          <p:cNvSpPr/>
-          <p:nvPr/>
-        </p:nvSpPr>
-        <p:spPr>
-          <a:xfrm>
-            <a:off x="5156200" y="1676400"/>
-            <a:ext cx="1879600" cy="3390900"/>
-          </a:xfrm>
-          <a:prstGeom prst="roundRect">
-            <a:avLst>
-              <a:gd name="adj" fmla="val 5405"/>
+              <a:gd name="adj" fmla="val 16216"/>
             </a:avLst>
           </a:prstGeom>
           <a:solidFill>
@@ -10887,627 +11712,13 @@
           </a:solidFill>
           <a:ln/>
         </p:spPr>
-      </p:sp>
-      <p:sp>
-        <p:nvSpPr>
-          <p:cNvPr id="14" name="Text 10"/>
-          <p:cNvSpPr/>
-          <p:nvPr/>
-        </p:nvSpPr>
-        <p:spPr>
-          <a:xfrm>
-            <a:off x="5283200" y="2844868"/>
-            <a:ext cx="1676400" cy="238720"/>
-          </a:xfrm>
-          <a:prstGeom prst="rect">
-            <a:avLst/>
-          </a:prstGeom>
-          <a:noFill/>
-          <a:ln/>
-        </p:spPr>
-        <p:txBody>
-          <a:bodyPr wrap="square" lIns="0" tIns="0" rIns="0" bIns="0" rtlCol="0" anchor="t">
-            <a:normAutofit/>
-          </a:bodyPr>
-          <a:lstStyle/>
-          <a:p>
-            <a:pPr algn="l" indent="0" marL="0">
-              <a:lnSpc>
-                <a:spcPts val="1680"/>
-              </a:lnSpc>
-              <a:buNone/>
-            </a:pPr>
-            <a:r>
-              <a:rPr lang="en-US" sz="1200" spc="50" kern="0" dirty="0">
-                <a:solidFill>
-                  <a:srgbClr val="F2B134"/>
-                </a:solidFill>
-                <a:latin typeface="Courier New" pitchFamily="49" charset="0"/>
-                <a:ea typeface="Courier New" pitchFamily="49" charset="-122"/>
-                <a:cs typeface="Courier New" pitchFamily="49" charset="-120"/>
-              </a:rPr>
-              <a:t>THE CONTRACT</a:t>
-            </a:r>
-            <a:endParaRPr lang="en-US" sz="1200" dirty="0"/>
-          </a:p>
-        </p:txBody>
-      </p:sp>
-      <p:sp>
-        <p:nvSpPr>
-          <p:cNvPr id="15" name="Text 11"/>
-          <p:cNvSpPr/>
-          <p:nvPr/>
-        </p:nvSpPr>
-        <p:spPr>
-          <a:xfrm>
-            <a:off x="5283200" y="3134389"/>
-            <a:ext cx="1676400" cy="284427"/>
-          </a:xfrm>
-          <a:prstGeom prst="rect">
-            <a:avLst/>
-          </a:prstGeom>
-          <a:noFill/>
-          <a:ln/>
-        </p:spPr>
-        <p:txBody>
-          <a:bodyPr wrap="square" lIns="0" tIns="0" rIns="0" bIns="0" rtlCol="0" anchor="t">
-            <a:normAutofit/>
-          </a:bodyPr>
-          <a:lstStyle/>
-          <a:p>
-            <a:pPr algn="l" indent="0" marL="0">
-              <a:lnSpc>
-                <a:spcPts val="2040"/>
-              </a:lnSpc>
-              <a:buNone/>
-            </a:pPr>
-            <a:r>
-              <a:rPr lang="en-US" sz="1700" b="1" dirty="0">
-                <a:solidFill>
-                  <a:srgbClr val="F7F6F1"/>
-                </a:solidFill>
-                <a:latin typeface="Arial" pitchFamily="34" charset="0"/>
-                <a:ea typeface="Arial" pitchFamily="34" charset="-122"/>
-                <a:cs typeface="Arial" pitchFamily="34" charset="-120"/>
-              </a:rPr>
-              <a:t>YAML</a:t>
-            </a:r>
-            <a:endParaRPr lang="en-US" sz="1700" dirty="0"/>
-          </a:p>
-        </p:txBody>
-      </p:sp>
-      <p:sp>
-        <p:nvSpPr>
-          <p:cNvPr id="16" name="Text 12"/>
-          <p:cNvSpPr/>
-          <p:nvPr/>
-        </p:nvSpPr>
-        <p:spPr>
-          <a:xfrm>
-            <a:off x="5283200" y="3469615"/>
-            <a:ext cx="1676400" cy="454554"/>
-          </a:xfrm>
-          <a:prstGeom prst="rect">
-            <a:avLst/>
-          </a:prstGeom>
-          <a:noFill/>
-          <a:ln/>
-        </p:spPr>
-        <p:txBody>
-          <a:bodyPr wrap="square" lIns="0" tIns="0" rIns="0" bIns="0" rtlCol="0" anchor="t">
-            <a:normAutofit/>
-          </a:bodyPr>
-          <a:lstStyle/>
-          <a:p>
-            <a:pPr algn="l" indent="0" marL="0">
-              <a:lnSpc>
-                <a:spcPts val="1690"/>
-              </a:lnSpc>
-              <a:buNone/>
-            </a:pPr>
-            <a:r>
-              <a:rPr lang="en-US" sz="1300" dirty="0">
-                <a:solidFill>
-                  <a:srgbClr val="C4CFDC"/>
-                </a:solidFill>
-                <a:latin typeface="Arial" pitchFamily="34" charset="0"/>
-                <a:ea typeface="Arial" pitchFamily="34" charset="-122"/>
-                <a:cs typeface="Arial" pitchFamily="34" charset="-120"/>
-              </a:rPr>
-              <a:t>reviewed and committed</a:t>
-            </a:r>
-            <a:endParaRPr lang="en-US" sz="1300" dirty="0"/>
-          </a:p>
-        </p:txBody>
-      </p:sp>
-      <p:pic>
-        <p:nvPicPr>
-          <p:cNvPr id="17" name="Image 2" descr="arrow-right">    </p:cNvPr>
-          <p:cNvPicPr>
-            <a:picLocks noChangeAspect="1"/>
-          </p:cNvPicPr>
-          <p:nvPr/>
-        </p:nvPicPr>
-        <p:blipFill>
-          <a:blip r:embed="rId3"/>
-          <a:srcRect l="0" r="0" t="0" b="0"/>
-          <a:stretch/>
-        </p:blipFill>
-        <p:spPr>
-          <a:xfrm>
-            <a:off x="7035800" y="3244850"/>
-            <a:ext cx="292100" cy="254000"/>
-          </a:xfrm>
-          <a:prstGeom prst="rect">
-            <a:avLst/>
-          </a:prstGeom>
-        </p:spPr>
-      </p:pic>
-      <p:sp>
-        <p:nvSpPr>
-          <p:cNvPr id="18" name="Shape 13"/>
-          <p:cNvSpPr/>
-          <p:nvPr/>
-        </p:nvSpPr>
-        <p:spPr>
-          <a:xfrm>
-            <a:off x="7340600" y="1689100"/>
-            <a:ext cx="1854200" cy="3365500"/>
-          </a:xfrm>
-          <a:prstGeom prst="roundRect">
-            <a:avLst>
-              <a:gd name="adj" fmla="val 4795"/>
-            </a:avLst>
-          </a:prstGeom>
-          <a:solidFill>
-            <a:srgbClr val="FDFCF9"/>
-          </a:solidFill>
-          <a:ln w="25400">
-            <a:solidFill>
-              <a:srgbClr val="B4690E"/>
-            </a:solidFill>
-            <a:prstDash val="solid"/>
-          </a:ln>
-        </p:spPr>
-      </p:sp>
-      <p:sp>
-        <p:nvSpPr>
-          <p:cNvPr id="19" name="Text 14"/>
-          <p:cNvSpPr/>
-          <p:nvPr/>
-        </p:nvSpPr>
-        <p:spPr>
-          <a:xfrm>
-            <a:off x="7480300" y="2844868"/>
-            <a:ext cx="1625600" cy="238720"/>
-          </a:xfrm>
-          <a:prstGeom prst="rect">
-            <a:avLst/>
-          </a:prstGeom>
-          <a:noFill/>
-          <a:ln/>
-        </p:spPr>
-        <p:txBody>
-          <a:bodyPr wrap="square" lIns="0" tIns="0" rIns="0" bIns="0" rtlCol="0" anchor="t">
-            <a:normAutofit/>
-          </a:bodyPr>
-          <a:lstStyle/>
-          <a:p>
-            <a:pPr algn="l" indent="0" marL="0">
-              <a:lnSpc>
-                <a:spcPts val="1680"/>
-              </a:lnSpc>
-              <a:buNone/>
-            </a:pPr>
-            <a:r>
-              <a:rPr lang="en-US" sz="1200" spc="50" kern="0" dirty="0">
-                <a:solidFill>
-                  <a:srgbClr val="8A4E05"/>
-                </a:solidFill>
-                <a:latin typeface="Courier New" pitchFamily="49" charset="0"/>
-                <a:ea typeface="Courier New" pitchFamily="49" charset="-122"/>
-                <a:cs typeface="Courier New" pitchFamily="49" charset="-120"/>
-              </a:rPr>
-              <a:t>DETERMINISTIC</a:t>
-            </a:r>
-            <a:endParaRPr lang="en-US" sz="1200" dirty="0"/>
-          </a:p>
-        </p:txBody>
-      </p:sp>
-      <p:sp>
-        <p:nvSpPr>
-          <p:cNvPr id="20" name="Text 15"/>
-          <p:cNvSpPr/>
-          <p:nvPr/>
-        </p:nvSpPr>
-        <p:spPr>
-          <a:xfrm>
-            <a:off x="7480300" y="3134389"/>
-            <a:ext cx="1625600" cy="284427"/>
-          </a:xfrm>
-          <a:prstGeom prst="rect">
-            <a:avLst/>
-          </a:prstGeom>
-          <a:noFill/>
-          <a:ln/>
-        </p:spPr>
-        <p:txBody>
-          <a:bodyPr wrap="square" lIns="0" tIns="0" rIns="0" bIns="0" rtlCol="0" anchor="t">
-            <a:normAutofit/>
-          </a:bodyPr>
-          <a:lstStyle/>
-          <a:p>
-            <a:pPr algn="l" indent="0" marL="0">
-              <a:lnSpc>
-                <a:spcPts val="2040"/>
-              </a:lnSpc>
-              <a:buNone/>
-            </a:pPr>
-            <a:r>
-              <a:rPr lang="en-US" sz="1700" b="1" dirty="0">
-                <a:solidFill>
-                  <a:srgbClr val="0E1A2B"/>
-                </a:solidFill>
-                <a:latin typeface="Arial" pitchFamily="34" charset="0"/>
-                <a:ea typeface="Arial" pitchFamily="34" charset="-122"/>
-                <a:cs typeface="Arial" pitchFamily="34" charset="-120"/>
-              </a:rPr>
-              <a:t>PowerShell</a:t>
-            </a:r>
-            <a:endParaRPr lang="en-US" sz="1700" dirty="0"/>
-          </a:p>
-        </p:txBody>
-      </p:sp>
-      <p:sp>
-        <p:nvSpPr>
-          <p:cNvPr id="21" name="Text 16"/>
-          <p:cNvSpPr/>
-          <p:nvPr/>
-        </p:nvSpPr>
-        <p:spPr>
-          <a:xfrm>
-            <a:off x="7480300" y="3469615"/>
-            <a:ext cx="1625600" cy="454554"/>
-          </a:xfrm>
-          <a:prstGeom prst="rect">
-            <a:avLst/>
-          </a:prstGeom>
-          <a:noFill/>
-          <a:ln/>
-        </p:spPr>
-        <p:txBody>
-          <a:bodyPr wrap="square" lIns="0" tIns="0" rIns="0" bIns="0" rtlCol="0" anchor="t">
-            <a:normAutofit/>
-          </a:bodyPr>
-          <a:lstStyle/>
-          <a:p>
-            <a:pPr algn="l" indent="0" marL="0">
-              <a:lnSpc>
-                <a:spcPts val="1690"/>
-              </a:lnSpc>
-              <a:buNone/>
-            </a:pPr>
-            <a:r>
-              <a:rPr lang="en-US" sz="1300" dirty="0">
-                <a:solidFill>
-                  <a:srgbClr val="3B4656"/>
-                </a:solidFill>
-                <a:latin typeface="Arial" pitchFamily="34" charset="0"/>
-                <a:ea typeface="Arial" pitchFamily="34" charset="-122"/>
-                <a:cs typeface="Arial" pitchFamily="34" charset="-120"/>
-              </a:rPr>
-              <a:t>same output every run</a:t>
-            </a:r>
-            <a:endParaRPr lang="en-US" sz="1300" dirty="0"/>
-          </a:p>
-        </p:txBody>
-      </p:sp>
-      <p:pic>
-        <p:nvPicPr>
-          <p:cNvPr id="22" name="Image 3" descr="arrow-right">    </p:cNvPr>
-          <p:cNvPicPr>
-            <a:picLocks noChangeAspect="1"/>
-          </p:cNvPicPr>
-          <p:nvPr/>
-        </p:nvPicPr>
-        <p:blipFill>
-          <a:blip r:embed="rId4"/>
-          <a:srcRect l="0" r="0" t="0" b="0"/>
-          <a:stretch/>
-        </p:blipFill>
-        <p:spPr>
-          <a:xfrm>
-            <a:off x="9207500" y="3244850"/>
-            <a:ext cx="292100" cy="254000"/>
-          </a:xfrm>
-          <a:prstGeom prst="rect">
-            <a:avLst/>
-          </a:prstGeom>
-        </p:spPr>
-      </p:pic>
-      <p:sp>
-        <p:nvSpPr>
-          <p:cNvPr id="23" name="Shape 17"/>
-          <p:cNvSpPr/>
-          <p:nvPr/>
-        </p:nvSpPr>
-        <p:spPr>
-          <a:xfrm>
-            <a:off x="9505950" y="1682750"/>
-            <a:ext cx="1866900" cy="3378200"/>
-          </a:xfrm>
-          <a:prstGeom prst="roundRect">
-            <a:avLst>
-              <a:gd name="adj" fmla="val 5102"/>
-            </a:avLst>
-          </a:prstGeom>
-          <a:solidFill>
-            <a:srgbClr val="FDFCF9"/>
-          </a:solidFill>
-          <a:ln w="12700">
-            <a:solidFill>
-              <a:srgbClr val="C9C6BA"/>
-            </a:solidFill>
-            <a:prstDash val="solid"/>
-          </a:ln>
-        </p:spPr>
-      </p:sp>
-      <p:sp>
-        <p:nvSpPr>
-          <p:cNvPr id="24" name="Text 18"/>
-          <p:cNvSpPr/>
-          <p:nvPr/>
-        </p:nvSpPr>
-        <p:spPr>
-          <a:xfrm>
-            <a:off x="9639300" y="2844868"/>
-            <a:ext cx="1651000" cy="238720"/>
-          </a:xfrm>
-          <a:prstGeom prst="rect">
-            <a:avLst/>
-          </a:prstGeom>
-          <a:noFill/>
-          <a:ln/>
-        </p:spPr>
-        <p:txBody>
-          <a:bodyPr wrap="square" lIns="0" tIns="0" rIns="0" bIns="0" rtlCol="0" anchor="t">
-            <a:normAutofit/>
-          </a:bodyPr>
-          <a:lstStyle/>
-          <a:p>
-            <a:pPr algn="l" indent="0" marL="0">
-              <a:lnSpc>
-                <a:spcPts val="1680"/>
-              </a:lnSpc>
-              <a:buNone/>
-            </a:pPr>
-            <a:r>
-              <a:rPr lang="en-US" sz="1200" spc="50" kern="0" dirty="0">
-                <a:solidFill>
-                  <a:srgbClr val="3B4656"/>
-                </a:solidFill>
-                <a:latin typeface="Courier New" pitchFamily="49" charset="0"/>
-                <a:ea typeface="Courier New" pitchFamily="49" charset="-122"/>
-                <a:cs typeface="Courier New" pitchFamily="49" charset="-120"/>
-              </a:rPr>
-              <a:t>OUTPUT</a:t>
-            </a:r>
-            <a:endParaRPr lang="en-US" sz="1200" dirty="0"/>
-          </a:p>
-        </p:txBody>
-      </p:sp>
-      <p:sp>
-        <p:nvSpPr>
-          <p:cNvPr id="25" name="Text 19"/>
-          <p:cNvSpPr/>
-          <p:nvPr/>
-        </p:nvSpPr>
-        <p:spPr>
-          <a:xfrm>
-            <a:off x="9639300" y="3134389"/>
-            <a:ext cx="1651000" cy="284427"/>
-          </a:xfrm>
-          <a:prstGeom prst="rect">
-            <a:avLst/>
-          </a:prstGeom>
-          <a:noFill/>
-          <a:ln/>
-        </p:spPr>
-        <p:txBody>
-          <a:bodyPr wrap="square" lIns="0" tIns="0" rIns="0" bIns="0" rtlCol="0" anchor="t">
-            <a:normAutofit/>
-          </a:bodyPr>
-          <a:lstStyle/>
-          <a:p>
-            <a:pPr algn="l" indent="0" marL="0">
-              <a:lnSpc>
-                <a:spcPts val="2040"/>
-              </a:lnSpc>
-              <a:buNone/>
-            </a:pPr>
-            <a:r>
-              <a:rPr lang="en-US" sz="1700" b="1" dirty="0">
-                <a:solidFill>
-                  <a:srgbClr val="0E1A2B"/>
-                </a:solidFill>
-                <a:latin typeface="Arial" pitchFamily="34" charset="0"/>
-                <a:ea typeface="Arial" pitchFamily="34" charset="-122"/>
-                <a:cs typeface="Arial" pitchFamily="34" charset="-120"/>
-              </a:rPr>
-              <a:t>Terraform</a:t>
-            </a:r>
-            <a:endParaRPr lang="en-US" sz="1700" dirty="0"/>
-          </a:p>
-        </p:txBody>
-      </p:sp>
-      <p:sp>
-        <p:nvSpPr>
-          <p:cNvPr id="26" name="Text 20"/>
-          <p:cNvSpPr/>
-          <p:nvPr/>
-        </p:nvSpPr>
-        <p:spPr>
-          <a:xfrm>
-            <a:off x="9639300" y="3469615"/>
-            <a:ext cx="1651000" cy="454554"/>
-          </a:xfrm>
-          <a:prstGeom prst="rect">
-            <a:avLst/>
-          </a:prstGeom>
-          <a:noFill/>
-          <a:ln/>
-        </p:spPr>
-        <p:txBody>
-          <a:bodyPr wrap="square" lIns="0" tIns="0" rIns="0" bIns="0" rtlCol="0" anchor="t">
-            <a:normAutofit/>
-          </a:bodyPr>
-          <a:lstStyle/>
-          <a:p>
-            <a:pPr algn="l" indent="0" marL="0">
-              <a:lnSpc>
-                <a:spcPts val="1690"/>
-              </a:lnSpc>
-              <a:buNone/>
-            </a:pPr>
-            <a:r>
-              <a:rPr lang="en-US" sz="1300" dirty="0">
-                <a:solidFill>
-                  <a:srgbClr val="3B4656"/>
-                </a:solidFill>
-                <a:latin typeface="Arial" pitchFamily="34" charset="0"/>
-                <a:ea typeface="Arial" pitchFamily="34" charset="-122"/>
-                <a:cs typeface="Arial" pitchFamily="34" charset="-120"/>
-              </a:rPr>
-              <a:t>plain azurerm, ready to plan</a:t>
-            </a:r>
-            <a:endParaRPr lang="en-US" sz="1300" dirty="0"/>
-          </a:p>
-        </p:txBody>
-      </p:sp>
-      <p:sp>
-        <p:nvSpPr>
-          <p:cNvPr id="27" name="Text 21"/>
-          <p:cNvSpPr/>
-          <p:nvPr/>
-        </p:nvSpPr>
-        <p:spPr>
-          <a:xfrm>
-            <a:off x="812800" y="5372100"/>
-            <a:ext cx="2345664" cy="469900"/>
-          </a:xfrm>
-          <a:prstGeom prst="roundRect">
-            <a:avLst>
-              <a:gd name="adj" fmla="val 16216"/>
-            </a:avLst>
-          </a:prstGeom>
-          <a:solidFill>
-            <a:srgbClr val="2A64C9"/>
-          </a:solidFill>
-          <a:ln/>
-        </p:spPr>
         <p:txBody>
           <a:bodyPr wrap="none" lIns="0" tIns="0" rIns="0" bIns="0" rtlCol="0" anchor="ctr">
             <a:normAutofit/>
           </a:bodyPr>
           <a:lstStyle/>
           <a:p>
-            <a:pPr algn="ctr" indent="0" marL="0">
-              <a:lnSpc>
-                <a:spcPts val="2100"/>
-              </a:lnSpc>
-              <a:buNone/>
-            </a:pPr>
-            <a:r>
-              <a:rPr lang="en-US" sz="1500" b="1" dirty="0">
-                <a:solidFill>
-                  <a:srgbClr val="F7F6F1"/>
-                </a:solidFill>
-                <a:latin typeface="Arial" pitchFamily="34" charset="0"/>
-                <a:ea typeface="Arial" pitchFamily="34" charset="-122"/>
-                <a:cs typeface="Arial" pitchFamily="34" charset="-120"/>
-              </a:rPr>
-              <a:t>AI handles fuzzy work</a:t>
-            </a:r>
-            <a:endParaRPr lang="en-US" sz="1500" dirty="0"/>
-          </a:p>
-        </p:txBody>
-      </p:sp>
-      <p:sp>
-        <p:nvSpPr>
-          <p:cNvPr id="28" name="Text 22"/>
-          <p:cNvSpPr/>
-          <p:nvPr/>
-        </p:nvSpPr>
-        <p:spPr>
-          <a:xfrm>
-            <a:off x="3285464" y="5372100"/>
-            <a:ext cx="3404460" cy="469900"/>
-          </a:xfrm>
-          <a:prstGeom prst="roundRect">
-            <a:avLst>
-              <a:gd name="adj" fmla="val 16216"/>
-            </a:avLst>
-          </a:prstGeom>
-          <a:solidFill>
-            <a:srgbClr val="B4690E"/>
-          </a:solidFill>
-          <a:ln/>
-        </p:spPr>
-        <p:txBody>
-          <a:bodyPr wrap="none" lIns="0" tIns="0" rIns="0" bIns="0" rtlCol="0" anchor="ctr">
-            <a:normAutofit/>
-          </a:bodyPr>
-          <a:lstStyle/>
-          <a:p>
-            <a:pPr algn="ctr" indent="0" marL="0">
-              <a:lnSpc>
-                <a:spcPts val="2100"/>
-              </a:lnSpc>
-              <a:buNone/>
-            </a:pPr>
-            <a:r>
-              <a:rPr lang="en-US" sz="1500" b="1" dirty="0">
-                <a:solidFill>
-                  <a:srgbClr val="F7F6F1"/>
-                </a:solidFill>
-                <a:latin typeface="Arial" pitchFamily="34" charset="0"/>
-                <a:ea typeface="Arial" pitchFamily="34" charset="-122"/>
-                <a:cs typeface="Arial" pitchFamily="34" charset="-120"/>
-              </a:rPr>
-              <a:t>Scripts handle deterministic work</a:t>
-            </a:r>
-            <a:endParaRPr lang="en-US" sz="1500" dirty="0"/>
-          </a:p>
-        </p:txBody>
-      </p:sp>
-      <p:sp>
-        <p:nvSpPr>
-          <p:cNvPr id="29" name="Text 23"/>
-          <p:cNvSpPr/>
-          <p:nvPr/>
-        </p:nvSpPr>
-        <p:spPr>
-          <a:xfrm>
-            <a:off x="6816923" y="5372100"/>
-            <a:ext cx="2853598" cy="469900"/>
-          </a:xfrm>
-          <a:prstGeom prst="roundRect">
-            <a:avLst>
-              <a:gd name="adj" fmla="val 16216"/>
-            </a:avLst>
-          </a:prstGeom>
-          <a:solidFill>
-            <a:srgbClr val="0E1A2B"/>
-          </a:solidFill>
-          <a:ln/>
-        </p:spPr>
-        <p:txBody>
-          <a:bodyPr wrap="none" lIns="0" tIns="0" rIns="0" bIns="0" rtlCol="0" anchor="ctr">
-            <a:normAutofit/>
-          </a:bodyPr>
-          <a:lstStyle/>
-          <a:p>
-            <a:pPr algn="ctr" indent="0" marL="0">
+            <a:pPr marL="0" indent="0" algn="ctr">
               <a:lnSpc>
                 <a:spcPts val="2100"/>
               </a:lnSpc>
@@ -11533,6 +11744,569 @@
   <p:clrMapOvr>
     <a:masterClrMapping/>
   </p:clrMapOvr>
+  <p:timing>
+    <p:tnLst>
+      <p:par>
+        <p:cTn id="1" dur="indefinite" restart="never" nodeType="tmRoot">
+          <p:childTnLst>
+            <p:seq concurrent="1" nextAc="seek">
+              <p:cTn id="2" dur="indefinite" nodeType="mainSeq">
+                <p:childTnLst>
+                  <p:par>
+                    <p:cTn id="3" fill="hold">
+                      <p:stCondLst>
+                        <p:cond delay="indefinite"/>
+                      </p:stCondLst>
+                      <p:childTnLst>
+                        <p:par>
+                          <p:cTn id="4" fill="hold">
+                            <p:stCondLst>
+                              <p:cond delay="0"/>
+                            </p:stCondLst>
+                            <p:childTnLst>
+                              <p:par>
+                                <p:cTn id="5" presetID="10" presetClass="entr" presetSubtype="0" fill="hold" nodeType="clickEffect">
+                                  <p:stCondLst>
+                                    <p:cond delay="0"/>
+                                  </p:stCondLst>
+                                  <p:childTnLst>
+                                    <p:set>
+                                      <p:cBhvr>
+                                        <p:cTn id="6" dur="1" fill="hold">
+                                          <p:stCondLst>
+                                            <p:cond delay="0"/>
+                                          </p:stCondLst>
+                                        </p:cTn>
+                                        <p:tgtEl>
+                                          <p:spTgt spid="30"/>
+                                        </p:tgtEl>
+                                        <p:attrNameLst>
+                                          <p:attrName>style.visibility</p:attrName>
+                                        </p:attrNameLst>
+                                      </p:cBhvr>
+                                      <p:to>
+                                        <p:strVal val="visible"/>
+                                      </p:to>
+                                    </p:set>
+                                    <p:animEffect transition="in" filter="fade">
+                                      <p:cBhvr>
+                                        <p:cTn id="7" dur="500"/>
+                                        <p:tgtEl>
+                                          <p:spTgt spid="30"/>
+                                        </p:tgtEl>
+                                      </p:cBhvr>
+                                    </p:animEffect>
+                                  </p:childTnLst>
+                                </p:cTn>
+                              </p:par>
+                            </p:childTnLst>
+                          </p:cTn>
+                        </p:par>
+                      </p:childTnLst>
+                    </p:cTn>
+                  </p:par>
+                  <p:par>
+                    <p:cTn id="8" fill="hold">
+                      <p:stCondLst>
+                        <p:cond delay="indefinite"/>
+                      </p:stCondLst>
+                      <p:childTnLst>
+                        <p:par>
+                          <p:cTn id="9" fill="hold">
+                            <p:stCondLst>
+                              <p:cond delay="0"/>
+                            </p:stCondLst>
+                            <p:childTnLst>
+                              <p:par>
+                                <p:cTn id="10" presetID="22" presetClass="entr" presetSubtype="8" fill="hold" nodeType="clickEffect">
+                                  <p:stCondLst>
+                                    <p:cond delay="0"/>
+                                  </p:stCondLst>
+                                  <p:childTnLst>
+                                    <p:set>
+                                      <p:cBhvr>
+                                        <p:cTn id="11" dur="1" fill="hold">
+                                          <p:stCondLst>
+                                            <p:cond delay="0"/>
+                                          </p:stCondLst>
+                                        </p:cTn>
+                                        <p:tgtEl>
+                                          <p:spTgt spid="7"/>
+                                        </p:tgtEl>
+                                        <p:attrNameLst>
+                                          <p:attrName>style.visibility</p:attrName>
+                                        </p:attrNameLst>
+                                      </p:cBhvr>
+                                      <p:to>
+                                        <p:strVal val="visible"/>
+                                      </p:to>
+                                    </p:set>
+                                    <p:animEffect transition="in" filter="wipe(left)">
+                                      <p:cBhvr>
+                                        <p:cTn id="12" dur="500"/>
+                                        <p:tgtEl>
+                                          <p:spTgt spid="7"/>
+                                        </p:tgtEl>
+                                      </p:cBhvr>
+                                    </p:animEffect>
+                                  </p:childTnLst>
+                                </p:cTn>
+                              </p:par>
+                              <p:par>
+                                <p:cTn id="13" presetID="10" presetClass="entr" presetSubtype="0" fill="hold" nodeType="withEffect">
+                                  <p:stCondLst>
+                                    <p:cond delay="250"/>
+                                  </p:stCondLst>
+                                  <p:childTnLst>
+                                    <p:set>
+                                      <p:cBhvr>
+                                        <p:cTn id="14" dur="1" fill="hold">
+                                          <p:stCondLst>
+                                            <p:cond delay="0"/>
+                                          </p:stCondLst>
+                                        </p:cTn>
+                                        <p:tgtEl>
+                                          <p:spTgt spid="31"/>
+                                        </p:tgtEl>
+                                        <p:attrNameLst>
+                                          <p:attrName>style.visibility</p:attrName>
+                                        </p:attrNameLst>
+                                      </p:cBhvr>
+                                      <p:to>
+                                        <p:strVal val="visible"/>
+                                      </p:to>
+                                    </p:set>
+                                    <p:animEffect transition="in" filter="fade">
+                                      <p:cBhvr>
+                                        <p:cTn id="15" dur="500"/>
+                                        <p:tgtEl>
+                                          <p:spTgt spid="31"/>
+                                        </p:tgtEl>
+                                      </p:cBhvr>
+                                    </p:animEffect>
+                                  </p:childTnLst>
+                                </p:cTn>
+                              </p:par>
+                            </p:childTnLst>
+                          </p:cTn>
+                        </p:par>
+                      </p:childTnLst>
+                    </p:cTn>
+                  </p:par>
+                  <p:par>
+                    <p:cTn id="16" fill="hold">
+                      <p:stCondLst>
+                        <p:cond delay="indefinite"/>
+                      </p:stCondLst>
+                      <p:childTnLst>
+                        <p:par>
+                          <p:cTn id="17" fill="hold">
+                            <p:stCondLst>
+                              <p:cond delay="0"/>
+                            </p:stCondLst>
+                            <p:childTnLst>
+                              <p:par>
+                                <p:cTn id="18" presetID="22" presetClass="entr" presetSubtype="8" fill="hold" nodeType="clickEffect">
+                                  <p:stCondLst>
+                                    <p:cond delay="0"/>
+                                  </p:stCondLst>
+                                  <p:childTnLst>
+                                    <p:set>
+                                      <p:cBhvr>
+                                        <p:cTn id="19" dur="1" fill="hold">
+                                          <p:stCondLst>
+                                            <p:cond delay="0"/>
+                                          </p:stCondLst>
+                                        </p:cTn>
+                                        <p:tgtEl>
+                                          <p:spTgt spid="12"/>
+                                        </p:tgtEl>
+                                        <p:attrNameLst>
+                                          <p:attrName>style.visibility</p:attrName>
+                                        </p:attrNameLst>
+                                      </p:cBhvr>
+                                      <p:to>
+                                        <p:strVal val="visible"/>
+                                      </p:to>
+                                    </p:set>
+                                    <p:animEffect transition="in" filter="wipe(left)">
+                                      <p:cBhvr>
+                                        <p:cTn id="20" dur="500"/>
+                                        <p:tgtEl>
+                                          <p:spTgt spid="12"/>
+                                        </p:tgtEl>
+                                      </p:cBhvr>
+                                    </p:animEffect>
+                                  </p:childTnLst>
+                                </p:cTn>
+                              </p:par>
+                              <p:par>
+                                <p:cTn id="21" presetID="10" presetClass="entr" presetSubtype="0" fill="hold" nodeType="withEffect">
+                                  <p:stCondLst>
+                                    <p:cond delay="250"/>
+                                  </p:stCondLst>
+                                  <p:childTnLst>
+                                    <p:set>
+                                      <p:cBhvr>
+                                        <p:cTn id="22" dur="1" fill="hold">
+                                          <p:stCondLst>
+                                            <p:cond delay="0"/>
+                                          </p:stCondLst>
+                                        </p:cTn>
+                                        <p:tgtEl>
+                                          <p:spTgt spid="32"/>
+                                        </p:tgtEl>
+                                        <p:attrNameLst>
+                                          <p:attrName>style.visibility</p:attrName>
+                                        </p:attrNameLst>
+                                      </p:cBhvr>
+                                      <p:to>
+                                        <p:strVal val="visible"/>
+                                      </p:to>
+                                    </p:set>
+                                    <p:animEffect transition="in" filter="fade">
+                                      <p:cBhvr>
+                                        <p:cTn id="23" dur="500"/>
+                                        <p:tgtEl>
+                                          <p:spTgt spid="32"/>
+                                        </p:tgtEl>
+                                      </p:cBhvr>
+                                    </p:animEffect>
+                                  </p:childTnLst>
+                                </p:cTn>
+                              </p:par>
+                            </p:childTnLst>
+                          </p:cTn>
+                        </p:par>
+                      </p:childTnLst>
+                    </p:cTn>
+                  </p:par>
+                  <p:par>
+                    <p:cTn id="24" fill="hold">
+                      <p:stCondLst>
+                        <p:cond delay="indefinite"/>
+                      </p:stCondLst>
+                      <p:childTnLst>
+                        <p:par>
+                          <p:cTn id="25" fill="hold">
+                            <p:stCondLst>
+                              <p:cond delay="0"/>
+                            </p:stCondLst>
+                            <p:childTnLst>
+                              <p:par>
+                                <p:cTn id="26" presetID="22" presetClass="entr" presetSubtype="8" fill="hold" nodeType="clickEffect">
+                                  <p:stCondLst>
+                                    <p:cond delay="0"/>
+                                  </p:stCondLst>
+                                  <p:childTnLst>
+                                    <p:set>
+                                      <p:cBhvr>
+                                        <p:cTn id="27" dur="1" fill="hold">
+                                          <p:stCondLst>
+                                            <p:cond delay="0"/>
+                                          </p:stCondLst>
+                                        </p:cTn>
+                                        <p:tgtEl>
+                                          <p:spTgt spid="17"/>
+                                        </p:tgtEl>
+                                        <p:attrNameLst>
+                                          <p:attrName>style.visibility</p:attrName>
+                                        </p:attrNameLst>
+                                      </p:cBhvr>
+                                      <p:to>
+                                        <p:strVal val="visible"/>
+                                      </p:to>
+                                    </p:set>
+                                    <p:animEffect transition="in" filter="wipe(left)">
+                                      <p:cBhvr>
+                                        <p:cTn id="28" dur="500"/>
+                                        <p:tgtEl>
+                                          <p:spTgt spid="17"/>
+                                        </p:tgtEl>
+                                      </p:cBhvr>
+                                    </p:animEffect>
+                                  </p:childTnLst>
+                                </p:cTn>
+                              </p:par>
+                              <p:par>
+                                <p:cTn id="29" presetID="10" presetClass="entr" presetSubtype="0" fill="hold" nodeType="withEffect">
+                                  <p:stCondLst>
+                                    <p:cond delay="250"/>
+                                  </p:stCondLst>
+                                  <p:childTnLst>
+                                    <p:set>
+                                      <p:cBhvr>
+                                        <p:cTn id="30" dur="1" fill="hold">
+                                          <p:stCondLst>
+                                            <p:cond delay="0"/>
+                                          </p:stCondLst>
+                                        </p:cTn>
+                                        <p:tgtEl>
+                                          <p:spTgt spid="33"/>
+                                        </p:tgtEl>
+                                        <p:attrNameLst>
+                                          <p:attrName>style.visibility</p:attrName>
+                                        </p:attrNameLst>
+                                      </p:cBhvr>
+                                      <p:to>
+                                        <p:strVal val="visible"/>
+                                      </p:to>
+                                    </p:set>
+                                    <p:animEffect transition="in" filter="fade">
+                                      <p:cBhvr>
+                                        <p:cTn id="31" dur="500"/>
+                                        <p:tgtEl>
+                                          <p:spTgt spid="33"/>
+                                        </p:tgtEl>
+                                      </p:cBhvr>
+                                    </p:animEffect>
+                                  </p:childTnLst>
+                                </p:cTn>
+                              </p:par>
+                            </p:childTnLst>
+                          </p:cTn>
+                        </p:par>
+                      </p:childTnLst>
+                    </p:cTn>
+                  </p:par>
+                  <p:par>
+                    <p:cTn id="32" fill="hold">
+                      <p:stCondLst>
+                        <p:cond delay="indefinite"/>
+                      </p:stCondLst>
+                      <p:childTnLst>
+                        <p:par>
+                          <p:cTn id="33" fill="hold">
+                            <p:stCondLst>
+                              <p:cond delay="0"/>
+                            </p:stCondLst>
+                            <p:childTnLst>
+                              <p:par>
+                                <p:cTn id="34" presetID="22" presetClass="entr" presetSubtype="8" fill="hold" nodeType="clickEffect">
+                                  <p:stCondLst>
+                                    <p:cond delay="0"/>
+                                  </p:stCondLst>
+                                  <p:childTnLst>
+                                    <p:set>
+                                      <p:cBhvr>
+                                        <p:cTn id="35" dur="1" fill="hold">
+                                          <p:stCondLst>
+                                            <p:cond delay="0"/>
+                                          </p:stCondLst>
+                                        </p:cTn>
+                                        <p:tgtEl>
+                                          <p:spTgt spid="22"/>
+                                        </p:tgtEl>
+                                        <p:attrNameLst>
+                                          <p:attrName>style.visibility</p:attrName>
+                                        </p:attrNameLst>
+                                      </p:cBhvr>
+                                      <p:to>
+                                        <p:strVal val="visible"/>
+                                      </p:to>
+                                    </p:set>
+                                    <p:animEffect transition="in" filter="wipe(left)">
+                                      <p:cBhvr>
+                                        <p:cTn id="36" dur="500"/>
+                                        <p:tgtEl>
+                                          <p:spTgt spid="22"/>
+                                        </p:tgtEl>
+                                      </p:cBhvr>
+                                    </p:animEffect>
+                                  </p:childTnLst>
+                                </p:cTn>
+                              </p:par>
+                              <p:par>
+                                <p:cTn id="37" presetID="10" presetClass="entr" presetSubtype="0" fill="hold" nodeType="withEffect">
+                                  <p:stCondLst>
+                                    <p:cond delay="250"/>
+                                  </p:stCondLst>
+                                  <p:childTnLst>
+                                    <p:set>
+                                      <p:cBhvr>
+                                        <p:cTn id="38" dur="1" fill="hold">
+                                          <p:stCondLst>
+                                            <p:cond delay="0"/>
+                                          </p:stCondLst>
+                                        </p:cTn>
+                                        <p:tgtEl>
+                                          <p:spTgt spid="34"/>
+                                        </p:tgtEl>
+                                        <p:attrNameLst>
+                                          <p:attrName>style.visibility</p:attrName>
+                                        </p:attrNameLst>
+                                      </p:cBhvr>
+                                      <p:to>
+                                        <p:strVal val="visible"/>
+                                      </p:to>
+                                    </p:set>
+                                    <p:animEffect transition="in" filter="fade">
+                                      <p:cBhvr>
+                                        <p:cTn id="39" dur="500"/>
+                                        <p:tgtEl>
+                                          <p:spTgt spid="34"/>
+                                        </p:tgtEl>
+                                      </p:cBhvr>
+                                    </p:animEffect>
+                                  </p:childTnLst>
+                                </p:cTn>
+                              </p:par>
+                            </p:childTnLst>
+                          </p:cTn>
+                        </p:par>
+                      </p:childTnLst>
+                    </p:cTn>
+                  </p:par>
+                  <p:par>
+                    <p:cTn id="40" fill="hold">
+                      <p:stCondLst>
+                        <p:cond delay="indefinite"/>
+                      </p:stCondLst>
+                      <p:childTnLst>
+                        <p:par>
+                          <p:cTn id="41" fill="hold">
+                            <p:stCondLst>
+                              <p:cond delay="0"/>
+                            </p:stCondLst>
+                            <p:childTnLst>
+                              <p:par>
+                                <p:cTn id="42" presetID="10" presetClass="entr" presetSubtype="0" fill="hold" grpId="0" nodeType="clickEffect">
+                                  <p:stCondLst>
+                                    <p:cond delay="0"/>
+                                  </p:stCondLst>
+                                  <p:childTnLst>
+                                    <p:set>
+                                      <p:cBhvr>
+                                        <p:cTn id="43" dur="1" fill="hold">
+                                          <p:stCondLst>
+                                            <p:cond delay="0"/>
+                                          </p:stCondLst>
+                                        </p:cTn>
+                                        <p:tgtEl>
+                                          <p:spTgt spid="27"/>
+                                        </p:tgtEl>
+                                        <p:attrNameLst>
+                                          <p:attrName>style.visibility</p:attrName>
+                                        </p:attrNameLst>
+                                      </p:cBhvr>
+                                      <p:to>
+                                        <p:strVal val="visible"/>
+                                      </p:to>
+                                    </p:set>
+                                    <p:animEffect transition="in" filter="fade">
+                                      <p:cBhvr>
+                                        <p:cTn id="44" dur="500"/>
+                                        <p:tgtEl>
+                                          <p:spTgt spid="27"/>
+                                        </p:tgtEl>
+                                      </p:cBhvr>
+                                    </p:animEffect>
+                                  </p:childTnLst>
+                                </p:cTn>
+                              </p:par>
+                              <p:par>
+                                <p:cTn id="45" presetID="10" presetClass="entr" presetSubtype="0" fill="hold" grpId="0" nodeType="withEffect">
+                                  <p:stCondLst>
+                                    <p:cond delay="0"/>
+                                  </p:stCondLst>
+                                  <p:childTnLst>
+                                    <p:set>
+                                      <p:cBhvr>
+                                        <p:cTn id="46" dur="1" fill="hold">
+                                          <p:stCondLst>
+                                            <p:cond delay="0"/>
+                                          </p:stCondLst>
+                                        </p:cTn>
+                                        <p:tgtEl>
+                                          <p:spTgt spid="28"/>
+                                        </p:tgtEl>
+                                        <p:attrNameLst>
+                                          <p:attrName>style.visibility</p:attrName>
+                                        </p:attrNameLst>
+                                      </p:cBhvr>
+                                      <p:to>
+                                        <p:strVal val="visible"/>
+                                      </p:to>
+                                    </p:set>
+                                    <p:animEffect transition="in" filter="fade">
+                                      <p:cBhvr>
+                                        <p:cTn id="47" dur="500"/>
+                                        <p:tgtEl>
+                                          <p:spTgt spid="28"/>
+                                        </p:tgtEl>
+                                      </p:cBhvr>
+                                    </p:animEffect>
+                                  </p:childTnLst>
+                                </p:cTn>
+                              </p:par>
+                              <p:par>
+                                <p:cTn id="48" presetID="10" presetClass="entr" presetSubtype="0" fill="hold" grpId="0" nodeType="withEffect">
+                                  <p:stCondLst>
+                                    <p:cond delay="0"/>
+                                  </p:stCondLst>
+                                  <p:childTnLst>
+                                    <p:set>
+                                      <p:cBhvr>
+                                        <p:cTn id="49" dur="1" fill="hold">
+                                          <p:stCondLst>
+                                            <p:cond delay="0"/>
+                                          </p:stCondLst>
+                                        </p:cTn>
+                                        <p:tgtEl>
+                                          <p:spTgt spid="29"/>
+                                        </p:tgtEl>
+                                        <p:attrNameLst>
+                                          <p:attrName>style.visibility</p:attrName>
+                                        </p:attrNameLst>
+                                      </p:cBhvr>
+                                      <p:to>
+                                        <p:strVal val="visible"/>
+                                      </p:to>
+                                    </p:set>
+                                    <p:animEffect transition="in" filter="fade">
+                                      <p:cBhvr>
+                                        <p:cTn id="50" dur="500"/>
+                                        <p:tgtEl>
+                                          <p:spTgt spid="29"/>
+                                        </p:tgtEl>
+                                      </p:cBhvr>
+                                    </p:animEffect>
+                                  </p:childTnLst>
+                                </p:cTn>
+                              </p:par>
+                            </p:childTnLst>
+                          </p:cTn>
+                        </p:par>
+                      </p:childTnLst>
+                    </p:cTn>
+                  </p:par>
+                </p:childTnLst>
+              </p:cTn>
+              <p:prevCondLst>
+                <p:cond evt="onPrev" delay="0">
+                  <p:tgtEl>
+                    <p:sldTgt/>
+                  </p:tgtEl>
+                </p:cond>
+              </p:prevCondLst>
+              <p:nextCondLst>
+                <p:cond evt="onNext" delay="0">
+                  <p:tgtEl>
+                    <p:sldTgt/>
+                  </p:tgtEl>
+                </p:cond>
+              </p:nextCondLst>
+            </p:seq>
+          </p:childTnLst>
+        </p:cTn>
+      </p:par>
+    </p:tnLst>
+    <p:bldLst>
+      <p:bldP spid="27" grpId="0" animBg="1"/>
+      <p:bldP spid="28" grpId="0" animBg="1"/>
+      <p:bldP spid="29" grpId="0" animBg="1"/>
+    </p:bldLst>
+  </p:timing>
 </p:sld>
 </file>
 
@@ -11544,6 +12318,7 @@
         <a:solidFill>
           <a:srgbClr val="F7F6F1"/>
         </a:solidFill>
+        <a:effectLst/>
       </p:bgPr>
     </p:bg>
     <p:spTree>
@@ -11563,7 +12338,9 @@
       <p:sp>
         <p:nvSpPr>
           <p:cNvPr id="2" name="Text 0"/>
-          <p:cNvSpPr/>
+          <p:cNvSpPr>
+            <a:spLocks noGrp="1"/>
+          </p:cNvSpPr>
           <p:nvPr>
             <p:ph type="title"/>
           </p:nvPr>
@@ -11585,7 +12362,7 @@
           </a:bodyPr>
           <a:lstStyle/>
           <a:p>
-            <a:pPr algn="l" indent="0" marL="0">
+            <a:pPr marL="0" indent="0" algn="l">
               <a:lnSpc>
                 <a:spcPts val="4400"/>
               </a:lnSpc>
@@ -11622,16 +12399,34 @@
         </p:nvGraphicFramePr>
         <p:xfrm>
           <a:off x="825500" y="1638300"/>
-          <a:ext cx="10553700" cy="3954066"/>
+          <a:ext cx="10553700" cy="3954069"/>
         </p:xfrm>
         <a:graphic>
           <a:graphicData uri="http://schemas.openxmlformats.org/drawingml/2006/table">
             <a:tbl>
               <a:tblPr/>
               <a:tblGrid>
-                <a:gridCol w="1899666"/>
-                <a:gridCol w="6754368"/>
-                <a:gridCol w="1899666"/>
+                <a:gridCol w="1899666">
+                  <a:extLst>
+                    <a:ext uri="{9D8B030D-6E8A-4147-A177-3AD203B41FA5}">
+                      <a16:colId xmlns:a16="http://schemas.microsoft.com/office/drawing/2014/main" val="20000"/>
+                    </a:ext>
+                  </a:extLst>
+                </a:gridCol>
+                <a:gridCol w="6754368">
+                  <a:extLst>
+                    <a:ext uri="{9D8B030D-6E8A-4147-A177-3AD203B41FA5}">
+                      <a16:colId xmlns:a16="http://schemas.microsoft.com/office/drawing/2014/main" val="20001"/>
+                    </a:ext>
+                  </a:extLst>
+                </a:gridCol>
+                <a:gridCol w="1899666">
+                  <a:extLst>
+                    <a:ext uri="{9D8B030D-6E8A-4147-A177-3AD203B41FA5}">
+                      <a16:colId xmlns:a16="http://schemas.microsoft.com/office/drawing/2014/main" val="20002"/>
+                    </a:ext>
+                  </a:extLst>
+                </a:gridCol>
               </a:tblGrid>
               <a:tr h="439341">
                 <a:tc>
@@ -11639,7 +12434,7 @@
                     <a:bodyPr/>
                     <a:lstStyle/>
                     <a:p>
-                      <a:pPr indent="0" marL="0">
+                      <a:pPr marL="0" indent="0">
                         <a:lnSpc>
                           <a:spcPts val="2240"/>
                         </a:lnSpc>
@@ -11663,7 +12458,7 @@
                       </a:endParaRPr>
                     </a:p>
                   </a:txBody>
-                  <a:tcPr marL="71120" marR="71120" marT="71120" marB="71120" anchor="t">
+                  <a:tcPr marL="71120" marR="71120" marT="71120" marB="71120">
                     <a:lnL w="12700" cap="flat" cmpd="sng" algn="ctr">
                       <a:solidFill>
                         <a:srgbClr val="C5C4C0"/>
@@ -11710,7 +12505,7 @@
                     <a:bodyPr/>
                     <a:lstStyle/>
                     <a:p>
-                      <a:pPr indent="0" marL="0">
+                      <a:pPr marL="0" indent="0">
                         <a:lnSpc>
                           <a:spcPts val="2240"/>
                         </a:lnSpc>
@@ -11734,7 +12529,7 @@
                       </a:endParaRPr>
                     </a:p>
                   </a:txBody>
-                  <a:tcPr marL="71120" marR="71120" marT="71120" marB="71120" anchor="t">
+                  <a:tcPr marL="71120" marR="71120" marT="71120" marB="71120">
                     <a:lnL w="12700" cap="flat" cmpd="sng" algn="ctr">
                       <a:solidFill>
                         <a:srgbClr val="B7B6B2"/>
@@ -11781,7 +12576,7 @@
                     <a:bodyPr/>
                     <a:lstStyle/>
                     <a:p>
-                      <a:pPr indent="0" marL="0">
+                      <a:pPr marL="0" indent="0">
                         <a:lnSpc>
                           <a:spcPts val="2240"/>
                         </a:lnSpc>
@@ -11805,7 +12600,7 @@
                       </a:endParaRPr>
                     </a:p>
                   </a:txBody>
-                  <a:tcPr marL="71120" marR="71120" marT="71120" marB="71120" anchor="t">
+                  <a:tcPr marL="71120" marR="71120" marT="71120" marB="71120">
                     <a:lnL w="12700" cap="flat" cmpd="sng" algn="ctr">
                       <a:solidFill>
                         <a:srgbClr val="B7B6B2"/>
@@ -11847,6 +12642,11 @@
                     </a:solidFill>
                   </a:tcPr>
                 </a:tc>
+                <a:extLst>
+                  <a:ext uri="{0D108BD9-81ED-4DB2-BD59-A6C34878D82A}">
+                    <a16:rowId xmlns:a16="http://schemas.microsoft.com/office/drawing/2014/main" val="10000"/>
+                  </a:ext>
+                </a:extLst>
               </a:tr>
               <a:tr h="439341">
                 <a:tc>
@@ -11854,7 +12654,7 @@
                     <a:bodyPr/>
                     <a:lstStyle/>
                     <a:p>
-                      <a:pPr indent="0" marL="0">
+                      <a:pPr marL="0" indent="0">
                         <a:lnSpc>
                           <a:spcPts val="2240"/>
                         </a:lnSpc>
@@ -11878,7 +12678,7 @@
                       </a:endParaRPr>
                     </a:p>
                   </a:txBody>
-                  <a:tcPr marL="71120" marR="71120" marT="71120" marB="71120" anchor="t">
+                  <a:tcPr marL="71120" marR="71120" marT="71120" marB="71120">
                     <a:lnL w="12700" cap="flat" cmpd="sng" algn="ctr">
                       <a:solidFill>
                         <a:srgbClr val="C5C4C0"/>
@@ -11922,7 +12722,7 @@
                     <a:bodyPr/>
                     <a:lstStyle/>
                     <a:p>
-                      <a:pPr indent="0" marL="0">
+                      <a:pPr marL="0" indent="0">
                         <a:lnSpc>
                           <a:spcPts val="2240"/>
                         </a:lnSpc>
@@ -11946,7 +12746,7 @@
                       </a:endParaRPr>
                     </a:p>
                   </a:txBody>
-                  <a:tcPr marL="71120" marR="71120" marT="71120" marB="71120" anchor="t">
+                  <a:tcPr marL="71120" marR="71120" marT="71120" marB="71120">
                     <a:lnL w="12700" cap="flat" cmpd="sng" algn="ctr">
                       <a:solidFill>
                         <a:srgbClr val="C5C4C0"/>
@@ -11990,7 +12790,7 @@
                     <a:bodyPr/>
                     <a:lstStyle/>
                     <a:p>
-                      <a:pPr indent="0" marL="0">
+                      <a:pPr marL="0" indent="0">
                         <a:lnSpc>
                           <a:spcPts val="2240"/>
                         </a:lnSpc>
@@ -12014,7 +12814,7 @@
                       </a:endParaRPr>
                     </a:p>
                   </a:txBody>
-                  <a:tcPr marL="71120" marR="71120" marT="71120" marB="71120" anchor="t">
+                  <a:tcPr marL="71120" marR="71120" marT="71120" marB="71120">
                     <a:lnL w="12700" cap="flat" cmpd="sng" algn="ctr">
                       <a:solidFill>
                         <a:srgbClr val="C5C4C0"/>
@@ -12053,6 +12853,11 @@
                     </a:lnB>
                   </a:tcPr>
                 </a:tc>
+                <a:extLst>
+                  <a:ext uri="{0D108BD9-81ED-4DB2-BD59-A6C34878D82A}">
+                    <a16:rowId xmlns:a16="http://schemas.microsoft.com/office/drawing/2014/main" val="10001"/>
+                  </a:ext>
+                </a:extLst>
               </a:tr>
               <a:tr h="439341">
                 <a:tc>
@@ -12060,7 +12865,7 @@
                     <a:bodyPr/>
                     <a:lstStyle/>
                     <a:p>
-                      <a:pPr indent="0" marL="0">
+                      <a:pPr marL="0" indent="0">
                         <a:lnSpc>
                           <a:spcPts val="2240"/>
                         </a:lnSpc>
@@ -12084,7 +12889,7 @@
                       </a:endParaRPr>
                     </a:p>
                   </a:txBody>
-                  <a:tcPr marL="71120" marR="71120" marT="71120" marB="71120" anchor="t">
+                  <a:tcPr marL="71120" marR="71120" marT="71120" marB="71120">
                     <a:lnL w="12700" cap="flat" cmpd="sng" algn="ctr">
                       <a:solidFill>
                         <a:srgbClr val="C5C4C0"/>
@@ -12128,7 +12933,7 @@
                     <a:bodyPr/>
                     <a:lstStyle/>
                     <a:p>
-                      <a:pPr indent="0" marL="0">
+                      <a:pPr marL="0" indent="0">
                         <a:lnSpc>
                           <a:spcPts val="2240"/>
                         </a:lnSpc>
@@ -12152,7 +12957,7 @@
                       </a:endParaRPr>
                     </a:p>
                   </a:txBody>
-                  <a:tcPr marL="71120" marR="71120" marT="71120" marB="71120" anchor="t">
+                  <a:tcPr marL="71120" marR="71120" marT="71120" marB="71120">
                     <a:lnL w="12700" cap="flat" cmpd="sng" algn="ctr">
                       <a:solidFill>
                         <a:srgbClr val="C5C4C0"/>
@@ -12196,7 +13001,7 @@
                     <a:bodyPr/>
                     <a:lstStyle/>
                     <a:p>
-                      <a:pPr indent="0" marL="0">
+                      <a:pPr marL="0" indent="0">
                         <a:lnSpc>
                           <a:spcPts val="2240"/>
                         </a:lnSpc>
@@ -12220,7 +13025,7 @@
                       </a:endParaRPr>
                     </a:p>
                   </a:txBody>
-                  <a:tcPr marL="71120" marR="71120" marT="71120" marB="71120" anchor="t">
+                  <a:tcPr marL="71120" marR="71120" marT="71120" marB="71120">
                     <a:lnL w="12700" cap="flat" cmpd="sng" algn="ctr">
                       <a:solidFill>
                         <a:srgbClr val="C5C4C0"/>
@@ -12259,6 +13064,11 @@
                     </a:lnB>
                   </a:tcPr>
                 </a:tc>
+                <a:extLst>
+                  <a:ext uri="{0D108BD9-81ED-4DB2-BD59-A6C34878D82A}">
+                    <a16:rowId xmlns:a16="http://schemas.microsoft.com/office/drawing/2014/main" val="10002"/>
+                  </a:ext>
+                </a:extLst>
               </a:tr>
               <a:tr h="439341">
                 <a:tc>
@@ -12266,7 +13076,7 @@
                     <a:bodyPr/>
                     <a:lstStyle/>
                     <a:p>
-                      <a:pPr indent="0" marL="0">
+                      <a:pPr marL="0" indent="0">
                         <a:lnSpc>
                           <a:spcPts val="2240"/>
                         </a:lnSpc>
@@ -12290,7 +13100,7 @@
                       </a:endParaRPr>
                     </a:p>
                   </a:txBody>
-                  <a:tcPr marL="71120" marR="71120" marT="71120" marB="71120" anchor="t">
+                  <a:tcPr marL="71120" marR="71120" marT="71120" marB="71120">
                     <a:lnL w="12700" cap="flat" cmpd="sng" algn="ctr">
                       <a:solidFill>
                         <a:srgbClr val="C5C4C0"/>
@@ -12334,7 +13144,7 @@
                     <a:bodyPr/>
                     <a:lstStyle/>
                     <a:p>
-                      <a:pPr indent="0" marL="0">
+                      <a:pPr marL="0" indent="0">
                         <a:lnSpc>
                           <a:spcPts val="2240"/>
                         </a:lnSpc>
@@ -12358,7 +13168,7 @@
                       </a:endParaRPr>
                     </a:p>
                   </a:txBody>
-                  <a:tcPr marL="71120" marR="71120" marT="71120" marB="71120" anchor="t">
+                  <a:tcPr marL="71120" marR="71120" marT="71120" marB="71120">
                     <a:lnL w="12700" cap="flat" cmpd="sng" algn="ctr">
                       <a:solidFill>
                         <a:srgbClr val="C5C4C0"/>
@@ -12402,7 +13212,7 @@
                     <a:bodyPr/>
                     <a:lstStyle/>
                     <a:p>
-                      <a:pPr indent="0" marL="0">
+                      <a:pPr marL="0" indent="0">
                         <a:lnSpc>
                           <a:spcPts val="2240"/>
                         </a:lnSpc>
@@ -12426,7 +13236,7 @@
                       </a:endParaRPr>
                     </a:p>
                   </a:txBody>
-                  <a:tcPr marL="71120" marR="71120" marT="71120" marB="71120" anchor="t">
+                  <a:tcPr marL="71120" marR="71120" marT="71120" marB="71120">
                     <a:lnL w="12700" cap="flat" cmpd="sng" algn="ctr">
                       <a:solidFill>
                         <a:srgbClr val="C5C4C0"/>
@@ -12465,6 +13275,11 @@
                     </a:lnB>
                   </a:tcPr>
                 </a:tc>
+                <a:extLst>
+                  <a:ext uri="{0D108BD9-81ED-4DB2-BD59-A6C34878D82A}">
+                    <a16:rowId xmlns:a16="http://schemas.microsoft.com/office/drawing/2014/main" val="10003"/>
+                  </a:ext>
+                </a:extLst>
               </a:tr>
               <a:tr h="439341">
                 <a:tc>
@@ -12472,7 +13287,7 @@
                     <a:bodyPr/>
                     <a:lstStyle/>
                     <a:p>
-                      <a:pPr indent="0" marL="0">
+                      <a:pPr marL="0" indent="0">
                         <a:lnSpc>
                           <a:spcPts val="2240"/>
                         </a:lnSpc>
@@ -12496,7 +13311,7 @@
                       </a:endParaRPr>
                     </a:p>
                   </a:txBody>
-                  <a:tcPr marL="71120" marR="71120" marT="71120" marB="71120" anchor="t">
+                  <a:tcPr marL="71120" marR="71120" marT="71120" marB="71120">
                     <a:lnL w="12700" cap="flat" cmpd="sng" algn="ctr">
                       <a:solidFill>
                         <a:srgbClr val="C5C4C0"/>
@@ -12540,7 +13355,7 @@
                     <a:bodyPr/>
                     <a:lstStyle/>
                     <a:p>
-                      <a:pPr indent="0" marL="0">
+                      <a:pPr marL="0" indent="0">
                         <a:lnSpc>
                           <a:spcPts val="2240"/>
                         </a:lnSpc>
@@ -12564,7 +13379,7 @@
                       </a:endParaRPr>
                     </a:p>
                   </a:txBody>
-                  <a:tcPr marL="71120" marR="71120" marT="71120" marB="71120" anchor="t">
+                  <a:tcPr marL="71120" marR="71120" marT="71120" marB="71120">
                     <a:lnL w="12700" cap="flat" cmpd="sng" algn="ctr">
                       <a:solidFill>
                         <a:srgbClr val="C5C4C0"/>
@@ -12608,7 +13423,7 @@
                     <a:bodyPr/>
                     <a:lstStyle/>
                     <a:p>
-                      <a:pPr indent="0" marL="0">
+                      <a:pPr marL="0" indent="0">
                         <a:lnSpc>
                           <a:spcPts val="2240"/>
                         </a:lnSpc>
@@ -12632,7 +13447,7 @@
                       </a:endParaRPr>
                     </a:p>
                   </a:txBody>
-                  <a:tcPr marL="71120" marR="71120" marT="71120" marB="71120" anchor="t">
+                  <a:tcPr marL="71120" marR="71120" marT="71120" marB="71120">
                     <a:lnL w="12700" cap="flat" cmpd="sng" algn="ctr">
                       <a:solidFill>
                         <a:srgbClr val="C5C4C0"/>
@@ -12671,6 +13486,11 @@
                     </a:lnB>
                   </a:tcPr>
                 </a:tc>
+                <a:extLst>
+                  <a:ext uri="{0D108BD9-81ED-4DB2-BD59-A6C34878D82A}">
+                    <a16:rowId xmlns:a16="http://schemas.microsoft.com/office/drawing/2014/main" val="10004"/>
+                  </a:ext>
+                </a:extLst>
               </a:tr>
               <a:tr h="439341">
                 <a:tc>
@@ -12678,7 +13498,7 @@
                     <a:bodyPr/>
                     <a:lstStyle/>
                     <a:p>
-                      <a:pPr indent="0" marL="0">
+                      <a:pPr marL="0" indent="0">
                         <a:lnSpc>
                           <a:spcPts val="2240"/>
                         </a:lnSpc>
@@ -12702,7 +13522,7 @@
                       </a:endParaRPr>
                     </a:p>
                   </a:txBody>
-                  <a:tcPr marL="71120" marR="71120" marT="71120" marB="71120" anchor="t">
+                  <a:tcPr marL="71120" marR="71120" marT="71120" marB="71120">
                     <a:lnL w="12700" cap="flat" cmpd="sng" algn="ctr">
                       <a:solidFill>
                         <a:srgbClr val="C5C4C0"/>
@@ -12746,7 +13566,7 @@
                     <a:bodyPr/>
                     <a:lstStyle/>
                     <a:p>
-                      <a:pPr indent="0" marL="0">
+                      <a:pPr marL="0" indent="0">
                         <a:lnSpc>
                           <a:spcPts val="2240"/>
                         </a:lnSpc>
@@ -12770,7 +13590,7 @@
                       </a:endParaRPr>
                     </a:p>
                   </a:txBody>
-                  <a:tcPr marL="71120" marR="71120" marT="71120" marB="71120" anchor="t">
+                  <a:tcPr marL="71120" marR="71120" marT="71120" marB="71120">
                     <a:lnL w="12700" cap="flat" cmpd="sng" algn="ctr">
                       <a:solidFill>
                         <a:srgbClr val="C5C4C0"/>
@@ -12814,7 +13634,7 @@
                     <a:bodyPr/>
                     <a:lstStyle/>
                     <a:p>
-                      <a:pPr indent="0" marL="0">
+                      <a:pPr marL="0" indent="0">
                         <a:lnSpc>
                           <a:spcPts val="2240"/>
                         </a:lnSpc>
@@ -12838,7 +13658,7 @@
                       </a:endParaRPr>
                     </a:p>
                   </a:txBody>
-                  <a:tcPr marL="71120" marR="71120" marT="71120" marB="71120" anchor="t">
+                  <a:tcPr marL="71120" marR="71120" marT="71120" marB="71120">
                     <a:lnL w="12700" cap="flat" cmpd="sng" algn="ctr">
                       <a:solidFill>
                         <a:srgbClr val="C5C4C0"/>
@@ -12877,6 +13697,11 @@
                     </a:lnB>
                   </a:tcPr>
                 </a:tc>
+                <a:extLst>
+                  <a:ext uri="{0D108BD9-81ED-4DB2-BD59-A6C34878D82A}">
+                    <a16:rowId xmlns:a16="http://schemas.microsoft.com/office/drawing/2014/main" val="10005"/>
+                  </a:ext>
+                </a:extLst>
               </a:tr>
               <a:tr h="439341">
                 <a:tc>
@@ -12884,7 +13709,7 @@
                     <a:bodyPr/>
                     <a:lstStyle/>
                     <a:p>
-                      <a:pPr indent="0" marL="0">
+                      <a:pPr marL="0" indent="0">
                         <a:lnSpc>
                           <a:spcPts val="2240"/>
                         </a:lnSpc>
@@ -12908,7 +13733,7 @@
                       </a:endParaRPr>
                     </a:p>
                   </a:txBody>
-                  <a:tcPr marL="71120" marR="71120" marT="71120" marB="71120" anchor="t">
+                  <a:tcPr marL="71120" marR="71120" marT="71120" marB="71120">
                     <a:lnL w="12700" cap="flat" cmpd="sng" algn="ctr">
                       <a:solidFill>
                         <a:srgbClr val="C5C4C0"/>
@@ -12952,7 +13777,7 @@
                     <a:bodyPr/>
                     <a:lstStyle/>
                     <a:p>
-                      <a:pPr indent="0" marL="0">
+                      <a:pPr marL="0" indent="0">
                         <a:lnSpc>
                           <a:spcPts val="2240"/>
                         </a:lnSpc>
@@ -12976,7 +13801,7 @@
                       </a:endParaRPr>
                     </a:p>
                   </a:txBody>
-                  <a:tcPr marL="71120" marR="71120" marT="71120" marB="71120" anchor="t">
+                  <a:tcPr marL="71120" marR="71120" marT="71120" marB="71120">
                     <a:lnL w="12700" cap="flat" cmpd="sng" algn="ctr">
                       <a:solidFill>
                         <a:srgbClr val="C5C4C0"/>
@@ -13020,7 +13845,7 @@
                     <a:bodyPr/>
                     <a:lstStyle/>
                     <a:p>
-                      <a:pPr indent="0" marL="0">
+                      <a:pPr marL="0" indent="0">
                         <a:lnSpc>
                           <a:spcPts val="2240"/>
                         </a:lnSpc>
@@ -13044,7 +13869,7 @@
                       </a:endParaRPr>
                     </a:p>
                   </a:txBody>
-                  <a:tcPr marL="71120" marR="71120" marT="71120" marB="71120" anchor="t">
+                  <a:tcPr marL="71120" marR="71120" marT="71120" marB="71120">
                     <a:lnL w="12700" cap="flat" cmpd="sng" algn="ctr">
                       <a:solidFill>
                         <a:srgbClr val="C5C4C0"/>
@@ -13083,6 +13908,11 @@
                     </a:lnB>
                   </a:tcPr>
                 </a:tc>
+                <a:extLst>
+                  <a:ext uri="{0D108BD9-81ED-4DB2-BD59-A6C34878D82A}">
+                    <a16:rowId xmlns:a16="http://schemas.microsoft.com/office/drawing/2014/main" val="10006"/>
+                  </a:ext>
+                </a:extLst>
               </a:tr>
               <a:tr h="439341">
                 <a:tc>
@@ -13090,7 +13920,7 @@
                     <a:bodyPr/>
                     <a:lstStyle/>
                     <a:p>
-                      <a:pPr indent="0" marL="0">
+                      <a:pPr marL="0" indent="0">
                         <a:lnSpc>
                           <a:spcPts val="2240"/>
                         </a:lnSpc>
@@ -13114,7 +13944,7 @@
                       </a:endParaRPr>
                     </a:p>
                   </a:txBody>
-                  <a:tcPr marL="71120" marR="71120" marT="71120" marB="71120" anchor="t">
+                  <a:tcPr marL="71120" marR="71120" marT="71120" marB="71120">
                     <a:lnL w="12700" cap="flat" cmpd="sng" algn="ctr">
                       <a:solidFill>
                         <a:srgbClr val="C5C4C0"/>
@@ -13158,7 +13988,7 @@
                     <a:bodyPr/>
                     <a:lstStyle/>
                     <a:p>
-                      <a:pPr indent="0" marL="0">
+                      <a:pPr marL="0" indent="0">
                         <a:lnSpc>
                           <a:spcPts val="2240"/>
                         </a:lnSpc>
@@ -13182,7 +14012,7 @@
                       </a:endParaRPr>
                     </a:p>
                   </a:txBody>
-                  <a:tcPr marL="71120" marR="71120" marT="71120" marB="71120" anchor="t">
+                  <a:tcPr marL="71120" marR="71120" marT="71120" marB="71120">
                     <a:lnL w="12700" cap="flat" cmpd="sng" algn="ctr">
                       <a:solidFill>
                         <a:srgbClr val="C5C4C0"/>
@@ -13226,7 +14056,7 @@
                     <a:bodyPr/>
                     <a:lstStyle/>
                     <a:p>
-                      <a:pPr indent="0" marL="0">
+                      <a:pPr marL="0" indent="0">
                         <a:lnSpc>
                           <a:spcPts val="2240"/>
                         </a:lnSpc>
@@ -13250,7 +14080,7 @@
                       </a:endParaRPr>
                     </a:p>
                   </a:txBody>
-                  <a:tcPr marL="71120" marR="71120" marT="71120" marB="71120" anchor="t">
+                  <a:tcPr marL="71120" marR="71120" marT="71120" marB="71120">
                     <a:lnL w="12700" cap="flat" cmpd="sng" algn="ctr">
                       <a:solidFill>
                         <a:srgbClr val="C5C4C0"/>
@@ -13289,6 +14119,11 @@
                     </a:lnB>
                   </a:tcPr>
                 </a:tc>
+                <a:extLst>
+                  <a:ext uri="{0D108BD9-81ED-4DB2-BD59-A6C34878D82A}">
+                    <a16:rowId xmlns:a16="http://schemas.microsoft.com/office/drawing/2014/main" val="10007"/>
+                  </a:ext>
+                </a:extLst>
               </a:tr>
               <a:tr h="439341">
                 <a:tc>
@@ -13296,7 +14131,7 @@
                     <a:bodyPr/>
                     <a:lstStyle/>
                     <a:p>
-                      <a:pPr indent="0" marL="0">
+                      <a:pPr marL="0" indent="0">
                         <a:lnSpc>
                           <a:spcPts val="2240"/>
                         </a:lnSpc>
@@ -13320,7 +14155,7 @@
                       </a:endParaRPr>
                     </a:p>
                   </a:txBody>
-                  <a:tcPr marL="71120" marR="71120" marT="71120" marB="71120" anchor="t">
+                  <a:tcPr marL="71120" marR="71120" marT="71120" marB="71120">
                     <a:lnL w="12700" cap="flat" cmpd="sng" algn="ctr">
                       <a:solidFill>
                         <a:srgbClr val="C5C4C0"/>
@@ -13364,7 +14199,7 @@
                     <a:bodyPr/>
                     <a:lstStyle/>
                     <a:p>
-                      <a:pPr indent="0" marL="0">
+                      <a:pPr marL="0" indent="0">
                         <a:lnSpc>
                           <a:spcPts val="2240"/>
                         </a:lnSpc>
@@ -13388,7 +14223,7 @@
                       </a:endParaRPr>
                     </a:p>
                   </a:txBody>
-                  <a:tcPr marL="71120" marR="71120" marT="71120" marB="71120" anchor="t">
+                  <a:tcPr marL="71120" marR="71120" marT="71120" marB="71120">
                     <a:lnL w="12700" cap="flat" cmpd="sng" algn="ctr">
                       <a:solidFill>
                         <a:srgbClr val="C5C4C0"/>
@@ -13432,7 +14267,7 @@
                     <a:bodyPr/>
                     <a:lstStyle/>
                     <a:p>
-                      <a:pPr indent="0" marL="0">
+                      <a:pPr marL="0" indent="0">
                         <a:lnSpc>
                           <a:spcPts val="2240"/>
                         </a:lnSpc>
@@ -13456,7 +14291,7 @@
                       </a:endParaRPr>
                     </a:p>
                   </a:txBody>
-                  <a:tcPr marL="71120" marR="71120" marT="71120" marB="71120" anchor="t">
+                  <a:tcPr marL="71120" marR="71120" marT="71120" marB="71120">
                     <a:lnL w="12700" cap="flat" cmpd="sng" algn="ctr">
                       <a:solidFill>
                         <a:srgbClr val="C5C4C0"/>
@@ -13495,6 +14330,11 @@
                     </a:lnB>
                   </a:tcPr>
                 </a:tc>
+                <a:extLst>
+                  <a:ext uri="{0D108BD9-81ED-4DB2-BD59-A6C34878D82A}">
+                    <a16:rowId xmlns:a16="http://schemas.microsoft.com/office/drawing/2014/main" val="10008"/>
+                  </a:ext>
+                </a:extLst>
               </a:tr>
             </a:tbl>
           </a:graphicData>
@@ -13523,7 +14363,7 @@
           </a:bodyPr>
           <a:lstStyle/>
           <a:p>
-            <a:pPr algn="l" indent="0" marL="0">
+            <a:pPr marL="0" indent="0" algn="l">
               <a:lnSpc>
                 <a:spcPts val="1960"/>
               </a:lnSpc>
@@ -13560,6 +14400,7 @@
         <a:solidFill>
           <a:srgbClr val="0E1A2B"/>
         </a:solidFill>
+        <a:effectLst/>
       </p:bgPr>
     </p:bg>
     <p:spTree>
@@ -13599,14 +14440,14 @@
           </a:bodyPr>
           <a:lstStyle/>
           <a:p>
-            <a:pPr algn="l" indent="0" marL="0">
+            <a:pPr marL="0" indent="0" algn="l">
               <a:lnSpc>
                 <a:spcPts val="1960"/>
               </a:lnSpc>
               <a:buNone/>
             </a:pPr>
             <a:r>
-              <a:rPr lang="en-US" sz="1400" spc="100" kern="0" dirty="0">
+              <a:rPr lang="en-US" sz="1400" kern="0" spc="100" dirty="0">
                 <a:solidFill>
                   <a:srgbClr val="7DB0FF"/>
                 </a:solidFill>
@@ -13623,7 +14464,9 @@
       <p:sp>
         <p:nvSpPr>
           <p:cNvPr id="3" name="Text 1"/>
-          <p:cNvSpPr/>
+          <p:cNvSpPr>
+            <a:spLocks noGrp="1"/>
+          </p:cNvSpPr>
           <p:nvPr>
             <p:ph type="title"/>
           </p:nvPr>
@@ -13645,7 +14488,7 @@
           </a:bodyPr>
           <a:lstStyle/>
           <a:p>
-            <a:pPr algn="l" indent="0" marL="0">
+            <a:pPr marL="0" indent="0" algn="l">
               <a:lnSpc>
                 <a:spcPts val="4400"/>
               </a:lnSpc>
@@ -13687,18 +14530,25 @@
           </a:solidFill>
           <a:ln/>
         </p:spPr>
+        <p:txBody>
+          <a:bodyPr/>
+          <a:lstStyle/>
+          <a:p>
+            <a:endParaRPr lang="en-US"/>
+          </a:p>
+        </p:txBody>
       </p:sp>
       <p:pic>
         <p:nvPicPr>
-          <p:cNvPr id="5" name="Image 0" descr="Check">    </p:cNvPr>
+          <p:cNvPr id="5" name="Image 0" descr="Check"/>
           <p:cNvPicPr>
             <a:picLocks noChangeAspect="1"/>
           </p:cNvPicPr>
           <p:nvPr/>
         </p:nvPicPr>
         <p:blipFill>
-          <a:blip r:embed="rId1"/>
-          <a:srcRect l="0" r="0" t="0" b="0"/>
+          <a:blip r:embed="rId3"/>
+          <a:srcRect/>
           <a:stretch/>
         </p:blipFill>
         <p:spPr>
@@ -13734,7 +14584,7 @@
           </a:bodyPr>
           <a:lstStyle/>
           <a:p>
-            <a:pPr algn="l" indent="0" marL="0">
+            <a:pPr marL="0" indent="0" algn="l">
               <a:lnSpc>
                 <a:spcPts val="1920"/>
               </a:lnSpc>
@@ -13778,7 +14628,7 @@
           </a:bodyPr>
           <a:lstStyle/>
           <a:p>
-            <a:pPr algn="l" indent="0" marL="0">
+            <a:pPr marL="0" indent="0" algn="l">
               <a:lnSpc>
                 <a:spcPts val="1960"/>
               </a:lnSpc>
@@ -13820,18 +14670,25 @@
           </a:solidFill>
           <a:ln/>
         </p:spPr>
+        <p:txBody>
+          <a:bodyPr/>
+          <a:lstStyle/>
+          <a:p>
+            <a:endParaRPr lang="en-US"/>
+          </a:p>
+        </p:txBody>
       </p:sp>
       <p:pic>
         <p:nvPicPr>
-          <p:cNvPr id="9" name="Image 1" descr="Check">    </p:cNvPr>
+          <p:cNvPr id="9" name="Image 1" descr="Check"/>
           <p:cNvPicPr>
             <a:picLocks noChangeAspect="1"/>
           </p:cNvPicPr>
           <p:nvPr/>
         </p:nvPicPr>
         <p:blipFill>
-          <a:blip r:embed="rId2"/>
-          <a:srcRect l="0" r="0" t="0" b="0"/>
+          <a:blip r:embed="rId3"/>
+          <a:srcRect/>
           <a:stretch/>
         </p:blipFill>
         <p:spPr>
@@ -13867,7 +14724,7 @@
           </a:bodyPr>
           <a:lstStyle/>
           <a:p>
-            <a:pPr algn="l" indent="0" marL="0">
+            <a:pPr marL="0" indent="0" algn="l">
               <a:lnSpc>
                 <a:spcPts val="1920"/>
               </a:lnSpc>
@@ -13911,7 +14768,7 @@
           </a:bodyPr>
           <a:lstStyle/>
           <a:p>
-            <a:pPr algn="l" indent="0" marL="0">
+            <a:pPr marL="0" indent="0" algn="l">
               <a:lnSpc>
                 <a:spcPts val="1960"/>
               </a:lnSpc>
@@ -13940,7 +14797,7 @@
         </p:nvSpPr>
         <p:spPr>
           <a:xfrm>
-            <a:off x="6172200" y="2128509"/>
+            <a:off x="812800" y="4160443"/>
             <a:ext cx="2527300" cy="1803334"/>
           </a:xfrm>
           <a:prstGeom prst="roundRect">
@@ -13953,10 +14810,17 @@
           </a:solidFill>
           <a:ln/>
         </p:spPr>
+        <p:txBody>
+          <a:bodyPr/>
+          <a:lstStyle/>
+          <a:p>
+            <a:endParaRPr lang="en-US"/>
+          </a:p>
+        </p:txBody>
       </p:sp>
       <p:pic>
         <p:nvPicPr>
-          <p:cNvPr id="13" name="Image 2" descr="Check">    </p:cNvPr>
+          <p:cNvPr id="13" name="Image 2" descr="Check"/>
           <p:cNvPicPr>
             <a:picLocks noChangeAspect="1"/>
           </p:cNvPicPr>
@@ -13964,12 +14828,12 @@
         </p:nvPicPr>
         <p:blipFill>
           <a:blip r:embed="rId3"/>
-          <a:srcRect l="0" r="0" t="0" b="0"/>
+          <a:srcRect/>
           <a:stretch/>
         </p:blipFill>
         <p:spPr>
           <a:xfrm>
-            <a:off x="6350000" y="2306309"/>
+            <a:off x="990600" y="4338243"/>
             <a:ext cx="279400" cy="279400"/>
           </a:xfrm>
           <a:prstGeom prst="rect">
@@ -13985,7 +14849,7 @@
         </p:nvSpPr>
         <p:spPr>
           <a:xfrm>
-            <a:off x="6350000" y="2674609"/>
+            <a:off x="990600" y="4706543"/>
             <a:ext cx="2236851" cy="269214"/>
           </a:xfrm>
           <a:prstGeom prst="rect">
@@ -14000,7 +14864,7 @@
           </a:bodyPr>
           <a:lstStyle/>
           <a:p>
-            <a:pPr algn="l" indent="0" marL="0">
+            <a:pPr marL="0" indent="0" algn="l">
               <a:lnSpc>
                 <a:spcPts val="1920"/>
               </a:lnSpc>
@@ -14029,7 +14893,7 @@
         </p:nvSpPr>
         <p:spPr>
           <a:xfrm>
-            <a:off x="6350000" y="3007320"/>
+            <a:off x="990600" y="5039254"/>
             <a:ext cx="2236851" cy="772120"/>
           </a:xfrm>
           <a:prstGeom prst="rect">
@@ -14044,7 +14908,7 @@
           </a:bodyPr>
           <a:lstStyle/>
           <a:p>
-            <a:pPr algn="l" indent="0" marL="0">
+            <a:pPr marL="0" indent="0" algn="l">
               <a:lnSpc>
                 <a:spcPts val="1960"/>
               </a:lnSpc>
@@ -14073,7 +14937,7 @@
         </p:nvSpPr>
         <p:spPr>
           <a:xfrm>
-            <a:off x="8851900" y="2128509"/>
+            <a:off x="3492500" y="4160443"/>
             <a:ext cx="2527300" cy="1803334"/>
           </a:xfrm>
           <a:prstGeom prst="roundRect">
@@ -14086,23 +14950,30 @@
           </a:solidFill>
           <a:ln/>
         </p:spPr>
+        <p:txBody>
+          <a:bodyPr/>
+          <a:lstStyle/>
+          <a:p>
+            <a:endParaRPr lang="en-US"/>
+          </a:p>
+        </p:txBody>
       </p:sp>
       <p:pic>
         <p:nvPicPr>
-          <p:cNvPr id="17" name="Image 3" descr="Check">    </p:cNvPr>
+          <p:cNvPr id="17" name="Image 3" descr="Check"/>
           <p:cNvPicPr>
             <a:picLocks noChangeAspect="1"/>
           </p:cNvPicPr>
           <p:nvPr/>
         </p:nvPicPr>
         <p:blipFill>
-          <a:blip r:embed="rId4"/>
-          <a:srcRect l="0" r="0" t="0" b="0"/>
+          <a:blip r:embed="rId3"/>
+          <a:srcRect/>
           <a:stretch/>
         </p:blipFill>
         <p:spPr>
           <a:xfrm>
-            <a:off x="9029700" y="2306309"/>
+            <a:off x="3670300" y="4338243"/>
             <a:ext cx="279400" cy="279400"/>
           </a:xfrm>
           <a:prstGeom prst="rect">
@@ -14118,7 +14989,7 @@
         </p:nvSpPr>
         <p:spPr>
           <a:xfrm>
-            <a:off x="9029700" y="2674609"/>
+            <a:off x="3670300" y="4706543"/>
             <a:ext cx="2236851" cy="269214"/>
           </a:xfrm>
           <a:prstGeom prst="rect">
@@ -14133,7 +15004,7 @@
           </a:bodyPr>
           <a:lstStyle/>
           <a:p>
-            <a:pPr algn="l" indent="0" marL="0">
+            <a:pPr marL="0" indent="0" algn="l">
               <a:lnSpc>
                 <a:spcPts val="1920"/>
               </a:lnSpc>
@@ -14162,7 +15033,7 @@
         </p:nvSpPr>
         <p:spPr>
           <a:xfrm>
-            <a:off x="9029700" y="3007320"/>
+            <a:off x="3670300" y="5039254"/>
             <a:ext cx="2236851" cy="772120"/>
           </a:xfrm>
           <a:prstGeom prst="rect">
@@ -14177,7 +15048,7 @@
           </a:bodyPr>
           <a:lstStyle/>
           <a:p>
-            <a:pPr algn="l" indent="0" marL="0">
+            <a:pPr marL="0" indent="0" algn="l">
               <a:lnSpc>
                 <a:spcPts val="1960"/>
               </a:lnSpc>
@@ -14200,54 +15071,6 @@
       </p:sp>
       <p:sp>
         <p:nvSpPr>
-          <p:cNvPr id="20" name="Text 14"/>
-          <p:cNvSpPr/>
-          <p:nvPr/>
-        </p:nvSpPr>
-        <p:spPr>
-          <a:xfrm>
-            <a:off x="812800" y="4185841"/>
-            <a:ext cx="3139877" cy="619720"/>
-          </a:xfrm>
-          <a:prstGeom prst="roundRect">
-            <a:avLst>
-              <a:gd name="adj" fmla="val 16395"/>
-            </a:avLst>
-          </a:prstGeom>
-          <a:solidFill>
-            <a:srgbClr val="F2B134"/>
-          </a:solidFill>
-          <a:ln/>
-        </p:spPr>
-        <p:txBody>
-          <a:bodyPr wrap="none" lIns="0" tIns="0" rIns="0" bIns="0" rtlCol="0" anchor="ctr">
-            <a:normAutofit/>
-          </a:bodyPr>
-          <a:lstStyle/>
-          <a:p>
-            <a:pPr algn="ctr" indent="0" marL="0">
-              <a:lnSpc>
-                <a:spcPts val="3080"/>
-              </a:lnSpc>
-              <a:buNone/>
-            </a:pPr>
-            <a:r>
-              <a:rPr lang="en-US" sz="2200" b="1" dirty="0">
-                <a:solidFill>
-                  <a:srgbClr val="0E1A2B"/>
-                </a:solidFill>
-                <a:latin typeface="Courier New" pitchFamily="49" charset="0"/>
-                <a:ea typeface="Courier New" pitchFamily="49" charset="-122"/>
-                <a:cs typeface="Courier New" pitchFamily="49" charset="-120"/>
-              </a:rPr>
-              <a:t>Setup ends 10:10</a:t>
-            </a:r>
-            <a:endParaRPr lang="en-US" sz="2200" dirty="0"/>
-          </a:p>
-        </p:txBody>
-      </p:sp>
-      <p:sp>
-        <p:nvSpPr>
           <p:cNvPr id="21" name="Text 15"/>
           <p:cNvSpPr/>
           <p:nvPr/>
@@ -14269,7 +15092,7 @@
           </a:bodyPr>
           <a:lstStyle/>
           <a:p>
-            <a:pPr algn="l" indent="0" marL="0">
+            <a:pPr marL="0" indent="0" algn="l">
               <a:lnSpc>
                 <a:spcPts val="1960"/>
               </a:lnSpc>
@@ -14290,6 +15113,36 @@
           </a:p>
         </p:txBody>
       </p:sp>
+      <p:pic>
+        <p:nvPicPr>
+          <p:cNvPr id="25" name="Picture 24" descr="The image is a close-up of a QR code, which is a matrix of black and white squares forming a pattern that can be scanned by a QR reader.&#10;&#10;AI-generated content may be incorrect.">
+            <a:extLst>
+              <a:ext uri="{FF2B5EF4-FFF2-40B4-BE49-F238E27FC236}">
+                <a16:creationId xmlns:a16="http://schemas.microsoft.com/office/drawing/2014/main" id="{0BDA7204-E1C6-E69C-8CEF-60206E7C35C4}"/>
+              </a:ext>
+            </a:extLst>
+          </p:cNvPr>
+          <p:cNvPicPr>
+            <a:picLocks noChangeAspect="1"/>
+          </p:cNvPicPr>
+          <p:nvPr/>
+        </p:nvPicPr>
+        <p:blipFill>
+          <a:blip r:embed="rId4"/>
+          <a:stretch>
+            <a:fillRect/>
+          </a:stretch>
+        </p:blipFill>
+        <p:spPr>
+          <a:xfrm>
+            <a:off x="7021657" y="1919402"/>
+            <a:ext cx="4286250" cy="4286250"/>
+          </a:xfrm>
+          <a:prstGeom prst="rect">
+            <a:avLst/>
+          </a:prstGeom>
+        </p:spPr>
+      </p:pic>
     </p:spTree>
   </p:cSld>
   <p:clrMapOvr>
@@ -14306,6 +15159,7 @@
         <a:solidFill>
           <a:srgbClr val="0E1A2B"/>
         </a:solidFill>
+        <a:effectLst/>
       </p:bgPr>
     </p:bg>
     <p:spTree>
@@ -14345,14 +15199,14 @@
           </a:bodyPr>
           <a:lstStyle/>
           <a:p>
-            <a:pPr algn="l" indent="0" marL="0">
+            <a:pPr marL="0" indent="0" algn="l">
               <a:lnSpc>
                 <a:spcPts val="2240"/>
               </a:lnSpc>
               <a:buNone/>
             </a:pPr>
             <a:r>
-              <a:rPr lang="en-US" sz="1600" spc="100" kern="0" dirty="0">
+              <a:rPr lang="en-US" sz="1600" kern="0" spc="100" dirty="0">
                 <a:solidFill>
                   <a:srgbClr val="7DB0FF"/>
                 </a:solidFill>
@@ -14369,7 +15223,9 @@
       <p:sp>
         <p:nvSpPr>
           <p:cNvPr id="3" name="Text 1"/>
-          <p:cNvSpPr/>
+          <p:cNvSpPr>
+            <a:spLocks noGrp="1"/>
+          </p:cNvSpPr>
           <p:nvPr>
             <p:ph type="title"/>
           </p:nvPr>
@@ -14391,7 +15247,7 @@
           </a:bodyPr>
           <a:lstStyle/>
           <a:p>
-            <a:pPr algn="l" indent="0" marL="0">
+            <a:pPr marL="0" indent="0" algn="l">
               <a:lnSpc>
                 <a:spcPts val="5280"/>
               </a:lnSpc>
@@ -14435,7 +15291,7 @@
           </a:bodyPr>
           <a:lstStyle/>
           <a:p>
-            <a:pPr algn="l" indent="0" marL="0">
+            <a:pPr marL="0" indent="0" algn="l">
               <a:lnSpc>
                 <a:spcPts val="2700"/>
               </a:lnSpc>
@@ -14486,7 +15342,7 @@
           </a:bodyPr>
           <a:lstStyle/>
           <a:p>
-            <a:pPr algn="ctr" indent="0" marL="0">
+            <a:pPr marL="0" indent="0" algn="ctr">
               <a:lnSpc>
                 <a:spcPts val="2100"/>
               </a:lnSpc>
@@ -14537,7 +15393,7 @@
           </a:bodyPr>
           <a:lstStyle/>
           <a:p>
-            <a:pPr algn="ctr" indent="0" marL="0">
+            <a:pPr marL="0" indent="0" algn="ctr">
               <a:lnSpc>
                 <a:spcPts val="2100"/>
               </a:lnSpc>
@@ -14585,7 +15441,7 @@
           </a:bodyPr>
           <a:lstStyle/>
           <a:p>
-            <a:pPr algn="ctr" indent="0" marL="0">
+            <a:pPr marL="0" indent="0" algn="ctr">
               <a:lnSpc>
                 <a:spcPts val="3360"/>
               </a:lnSpc>
@@ -14636,7 +15492,7 @@
           </a:bodyPr>
           <a:lstStyle/>
           <a:p>
-            <a:pPr algn="ctr" indent="0" marL="0">
+            <a:pPr marL="0" indent="0" algn="ctr">
               <a:lnSpc>
                 <a:spcPts val="3360"/>
               </a:lnSpc>
@@ -14680,7 +15536,7 @@
           </a:bodyPr>
           <a:lstStyle/>
           <a:p>
-            <a:pPr algn="l" indent="0" marL="0">
+            <a:pPr marL="0" indent="0" algn="l">
               <a:lnSpc>
                 <a:spcPts val="1960"/>
               </a:lnSpc>
@@ -14717,6 +15573,7 @@
         <a:solidFill>
           <a:srgbClr val="F7F6F1"/>
         </a:solidFill>
+        <a:effectLst/>
       </p:bgPr>
     </p:bg>
     <p:spTree>
@@ -14756,14 +15613,14 @@
           </a:bodyPr>
           <a:lstStyle/>
           <a:p>
-            <a:pPr algn="l" indent="0" marL="0">
+            <a:pPr marL="0" indent="0" algn="l">
               <a:lnSpc>
                 <a:spcPts val="1960"/>
               </a:lnSpc>
               <a:buNone/>
             </a:pPr>
             <a:r>
-              <a:rPr lang="en-US" sz="1400" spc="100" kern="0" dirty="0">
+              <a:rPr lang="en-US" sz="1400" kern="0" spc="100" dirty="0">
                 <a:solidFill>
                   <a:srgbClr val="2A64C9"/>
                 </a:solidFill>
@@ -14780,7 +15637,9 @@
       <p:sp>
         <p:nvSpPr>
           <p:cNvPr id="3" name="Text 1"/>
-          <p:cNvSpPr/>
+          <p:cNvSpPr>
+            <a:spLocks noGrp="1"/>
+          </p:cNvSpPr>
           <p:nvPr>
             <p:ph type="title"/>
           </p:nvPr>
@@ -14802,7 +15661,7 @@
           </a:bodyPr>
           <a:lstStyle/>
           <a:p>
-            <a:pPr algn="l" indent="0" marL="0">
+            <a:pPr marL="0" indent="0" algn="l">
               <a:lnSpc>
                 <a:spcPts val="3960"/>
               </a:lnSpc>
@@ -14849,6 +15708,13 @@
             <a:prstDash val="solid"/>
           </a:ln>
         </p:spPr>
+        <p:txBody>
+          <a:bodyPr/>
+          <a:lstStyle/>
+          <a:p>
+            <a:endParaRPr lang="en-US"/>
+          </a:p>
+        </p:txBody>
       </p:sp>
       <p:sp>
         <p:nvSpPr>
@@ -14873,7 +15739,7 @@
           </a:bodyPr>
           <a:lstStyle/>
           <a:p>
-            <a:pPr algn="l" indent="0" marL="0">
+            <a:pPr marL="0" indent="0" algn="l">
               <a:lnSpc>
                 <a:spcPts val="2800"/>
               </a:lnSpc>
@@ -14917,7 +15783,7 @@
           </a:bodyPr>
           <a:lstStyle/>
           <a:p>
-            <a:pPr algn="l" indent="0" marL="0">
+            <a:pPr marL="0" indent="0" algn="l">
               <a:lnSpc>
                 <a:spcPts val="2340"/>
               </a:lnSpc>
@@ -14964,6 +15830,13 @@
             <a:prstDash val="solid"/>
           </a:ln>
         </p:spPr>
+        <p:txBody>
+          <a:bodyPr/>
+          <a:lstStyle/>
+          <a:p>
+            <a:endParaRPr lang="en-US"/>
+          </a:p>
+        </p:txBody>
       </p:sp>
       <p:sp>
         <p:nvSpPr>
@@ -14988,7 +15861,7 @@
           </a:bodyPr>
           <a:lstStyle/>
           <a:p>
-            <a:pPr algn="l" indent="0" marL="0">
+            <a:pPr marL="0" indent="0" algn="l">
               <a:lnSpc>
                 <a:spcPts val="2800"/>
               </a:lnSpc>
@@ -15032,7 +15905,7 @@
           </a:bodyPr>
           <a:lstStyle/>
           <a:p>
-            <a:pPr algn="l" indent="0" marL="0">
+            <a:pPr marL="0" indent="0" algn="l">
               <a:lnSpc>
                 <a:spcPts val="2340"/>
               </a:lnSpc>
@@ -15079,6 +15952,13 @@
             <a:prstDash val="solid"/>
           </a:ln>
         </p:spPr>
+        <p:txBody>
+          <a:bodyPr/>
+          <a:lstStyle/>
+          <a:p>
+            <a:endParaRPr lang="en-US"/>
+          </a:p>
+        </p:txBody>
       </p:sp>
       <p:sp>
         <p:nvSpPr>
@@ -15103,7 +15983,7 @@
           </a:bodyPr>
           <a:lstStyle/>
           <a:p>
-            <a:pPr algn="l" indent="0" marL="0">
+            <a:pPr marL="0" indent="0" algn="l">
               <a:lnSpc>
                 <a:spcPts val="2800"/>
               </a:lnSpc>
@@ -15147,7 +16027,7 @@
           </a:bodyPr>
           <a:lstStyle/>
           <a:p>
-            <a:pPr algn="l" indent="0" marL="0">
+            <a:pPr marL="0" indent="0" algn="l">
               <a:lnSpc>
                 <a:spcPts val="2340"/>
               </a:lnSpc>
@@ -15195,7 +16075,7 @@
           </a:bodyPr>
           <a:lstStyle/>
           <a:p>
-            <a:pPr algn="l" indent="0" marL="0">
+            <a:pPr marL="0" indent="0" algn="l">
               <a:lnSpc>
                 <a:spcPts val="2750"/>
               </a:lnSpc>
@@ -15512,4 +16392,319 @@
   <a:objectDefaults/>
   <a:extraClrSchemeLst/>
 </a:theme>
+</file>
+
+<file path=ppt/theme/theme2.xml><?xml version="1.0" encoding="utf-8"?>
+<a:theme xmlns:a="http://schemas.openxmlformats.org/drawingml/2006/main" name="Office Theme">
+  <a:themeElements>
+    <a:clrScheme name="Office">
+      <a:dk1>
+        <a:sysClr val="windowText" lastClr="000000"/>
+      </a:dk1>
+      <a:lt1>
+        <a:sysClr val="window" lastClr="FFFFFF"/>
+      </a:lt1>
+      <a:dk2>
+        <a:srgbClr val="0E2841"/>
+      </a:dk2>
+      <a:lt2>
+        <a:srgbClr val="E8E8E8"/>
+      </a:lt2>
+      <a:accent1>
+        <a:srgbClr val="156082"/>
+      </a:accent1>
+      <a:accent2>
+        <a:srgbClr val="E97132"/>
+      </a:accent2>
+      <a:accent3>
+        <a:srgbClr val="196B24"/>
+      </a:accent3>
+      <a:accent4>
+        <a:srgbClr val="0F9ED5"/>
+      </a:accent4>
+      <a:accent5>
+        <a:srgbClr val="A02B93"/>
+      </a:accent5>
+      <a:accent6>
+        <a:srgbClr val="4EA72E"/>
+      </a:accent6>
+      <a:hlink>
+        <a:srgbClr val="467886"/>
+      </a:hlink>
+      <a:folHlink>
+        <a:srgbClr val="96607D"/>
+      </a:folHlink>
+    </a:clrScheme>
+    <a:fontScheme name="Office">
+      <a:majorFont>
+        <a:latin typeface="Aptos Display" panose="02110004020202020204"/>
+        <a:ea typeface=""/>
+        <a:cs typeface=""/>
+        <a:font script="Jpan" typeface="游ゴシック Light"/>
+        <a:font script="Hang" typeface="맑은 고딕"/>
+        <a:font script="Hans" typeface="等线 Light"/>
+        <a:font script="Hant" typeface="新細明體"/>
+        <a:font script="Arab" typeface="Times New Roman"/>
+        <a:font script="Hebr" typeface="Times New Roman"/>
+        <a:font script="Thai" typeface="Angsana New"/>
+        <a:font script="Ethi" typeface="Nyala"/>
+        <a:font script="Beng" typeface="Vrinda"/>
+        <a:font script="Gujr" typeface="Shruti"/>
+        <a:font script="Khmr" typeface="MoolBoran"/>
+        <a:font script="Knda" typeface="Tunga"/>
+        <a:font script="Guru" typeface="Raavi"/>
+        <a:font script="Cans" typeface="Euphemia"/>
+        <a:font script="Cher" typeface="Plantagenet Cherokee"/>
+        <a:font script="Yiii" typeface="Microsoft Yi Baiti"/>
+        <a:font script="Tibt" typeface="Microsoft Himalaya"/>
+        <a:font script="Thaa" typeface="MV Boli"/>
+        <a:font script="Deva" typeface="Mangal"/>
+        <a:font script="Telu" typeface="Gautami"/>
+        <a:font script="Taml" typeface="Latha"/>
+        <a:font script="Syrc" typeface="Estrangelo Edessa"/>
+        <a:font script="Orya" typeface="Kalinga"/>
+        <a:font script="Mlym" typeface="Kartika"/>
+        <a:font script="Laoo" typeface="DokChampa"/>
+        <a:font script="Sinh" typeface="Iskoola Pota"/>
+        <a:font script="Mong" typeface="Mongolian Baiti"/>
+        <a:font script="Viet" typeface="Times New Roman"/>
+        <a:font script="Uigh" typeface="Microsoft Uighur"/>
+        <a:font script="Geor" typeface="Sylfaen"/>
+        <a:font script="Armn" typeface="Arial"/>
+        <a:font script="Bugi" typeface="Leelawadee UI"/>
+        <a:font script="Bopo" typeface="Microsoft JhengHei"/>
+        <a:font script="Java" typeface="Javanese Text"/>
+        <a:font script="Lisu" typeface="Segoe UI"/>
+        <a:font script="Mymr" typeface="Myanmar Text"/>
+        <a:font script="Nkoo" typeface="Ebrima"/>
+        <a:font script="Olck" typeface="Nirmala UI"/>
+        <a:font script="Osma" typeface="Ebrima"/>
+        <a:font script="Phag" typeface="Phagspa"/>
+        <a:font script="Syrn" typeface="Estrangelo Edessa"/>
+        <a:font script="Syrj" typeface="Estrangelo Edessa"/>
+        <a:font script="Syre" typeface="Estrangelo Edessa"/>
+        <a:font script="Sora" typeface="Nirmala UI"/>
+        <a:font script="Tale" typeface="Microsoft Tai Le"/>
+        <a:font script="Talu" typeface="Microsoft New Tai Lue"/>
+        <a:font script="Tfng" typeface="Ebrima"/>
+      </a:majorFont>
+      <a:minorFont>
+        <a:latin typeface="Aptos" panose="02110004020202020204"/>
+        <a:ea typeface=""/>
+        <a:cs typeface=""/>
+        <a:font script="Jpan" typeface="游ゴシック"/>
+        <a:font script="Hang" typeface="맑은 고딕"/>
+        <a:font script="Hans" typeface="等线"/>
+        <a:font script="Hant" typeface="新細明體"/>
+        <a:font script="Arab" typeface="Arial"/>
+        <a:font script="Hebr" typeface="Arial"/>
+        <a:font script="Thai" typeface="Cordia New"/>
+        <a:font script="Ethi" typeface="Nyala"/>
+        <a:font script="Beng" typeface="Vrinda"/>
+        <a:font script="Gujr" typeface="Shruti"/>
+        <a:font script="Khmr" typeface="DaunPenh"/>
+        <a:font script="Knda" typeface="Tunga"/>
+        <a:font script="Guru" typeface="Raavi"/>
+        <a:font script="Cans" typeface="Euphemia"/>
+        <a:font script="Cher" typeface="Plantagenet Cherokee"/>
+        <a:font script="Yiii" typeface="Microsoft Yi Baiti"/>
+        <a:font script="Tibt" typeface="Microsoft Himalaya"/>
+        <a:font script="Thaa" typeface="MV Boli"/>
+        <a:font script="Deva" typeface="Mangal"/>
+        <a:font script="Telu" typeface="Gautami"/>
+        <a:font script="Taml" typeface="Latha"/>
+        <a:font script="Syrc" typeface="Estrangelo Edessa"/>
+        <a:font script="Orya" typeface="Kalinga"/>
+        <a:font script="Mlym" typeface="Kartika"/>
+        <a:font script="Laoo" typeface="DokChampa"/>
+        <a:font script="Sinh" typeface="Iskoola Pota"/>
+        <a:font script="Mong" typeface="Mongolian Baiti"/>
+        <a:font script="Viet" typeface="Arial"/>
+        <a:font script="Uigh" typeface="Microsoft Uighur"/>
+        <a:font script="Geor" typeface="Sylfaen"/>
+        <a:font script="Armn" typeface="Arial"/>
+        <a:font script="Bugi" typeface="Leelawadee UI"/>
+        <a:font script="Bopo" typeface="Microsoft JhengHei"/>
+        <a:font script="Java" typeface="Javanese Text"/>
+        <a:font script="Lisu" typeface="Segoe UI"/>
+        <a:font script="Mymr" typeface="Myanmar Text"/>
+        <a:font script="Nkoo" typeface="Ebrima"/>
+        <a:font script="Olck" typeface="Nirmala UI"/>
+        <a:font script="Osma" typeface="Ebrima"/>
+        <a:font script="Phag" typeface="Phagspa"/>
+        <a:font script="Syrn" typeface="Estrangelo Edessa"/>
+        <a:font script="Syrj" typeface="Estrangelo Edessa"/>
+        <a:font script="Syre" typeface="Estrangelo Edessa"/>
+        <a:font script="Sora" typeface="Nirmala UI"/>
+        <a:font script="Tale" typeface="Microsoft Tai Le"/>
+        <a:font script="Talu" typeface="Microsoft New Tai Lue"/>
+        <a:font script="Tfng" typeface="Ebrima"/>
+      </a:minorFont>
+    </a:fontScheme>
+    <a:fmtScheme name="Office">
+      <a:fillStyleLst>
+        <a:solidFill>
+          <a:schemeClr val="phClr"/>
+        </a:solidFill>
+        <a:gradFill rotWithShape="1">
+          <a:gsLst>
+            <a:gs pos="0">
+              <a:schemeClr val="phClr">
+                <a:lumMod val="110000"/>
+                <a:satMod val="105000"/>
+                <a:tint val="67000"/>
+              </a:schemeClr>
+            </a:gs>
+            <a:gs pos="50000">
+              <a:schemeClr val="phClr">
+                <a:lumMod val="105000"/>
+                <a:satMod val="103000"/>
+                <a:tint val="73000"/>
+              </a:schemeClr>
+            </a:gs>
+            <a:gs pos="100000">
+              <a:schemeClr val="phClr">
+                <a:lumMod val="105000"/>
+                <a:satMod val="109000"/>
+                <a:tint val="81000"/>
+              </a:schemeClr>
+            </a:gs>
+          </a:gsLst>
+          <a:lin ang="5400000" scaled="0"/>
+        </a:gradFill>
+        <a:gradFill rotWithShape="1">
+          <a:gsLst>
+            <a:gs pos="0">
+              <a:schemeClr val="phClr">
+                <a:satMod val="103000"/>
+                <a:lumMod val="102000"/>
+                <a:tint val="94000"/>
+              </a:schemeClr>
+            </a:gs>
+            <a:gs pos="50000">
+              <a:schemeClr val="phClr">
+                <a:satMod val="110000"/>
+                <a:lumMod val="100000"/>
+                <a:shade val="100000"/>
+              </a:schemeClr>
+            </a:gs>
+            <a:gs pos="100000">
+              <a:schemeClr val="phClr">
+                <a:lumMod val="99000"/>
+                <a:satMod val="120000"/>
+                <a:shade val="78000"/>
+              </a:schemeClr>
+            </a:gs>
+          </a:gsLst>
+          <a:lin ang="5400000" scaled="0"/>
+        </a:gradFill>
+      </a:fillStyleLst>
+      <a:lnStyleLst>
+        <a:ln w="12700" cap="flat" cmpd="sng" algn="ctr">
+          <a:solidFill>
+            <a:schemeClr val="phClr"/>
+          </a:solidFill>
+          <a:prstDash val="solid"/>
+          <a:miter lim="800000"/>
+        </a:ln>
+        <a:ln w="19050" cap="flat" cmpd="sng" algn="ctr">
+          <a:solidFill>
+            <a:schemeClr val="phClr"/>
+          </a:solidFill>
+          <a:prstDash val="solid"/>
+          <a:miter lim="800000"/>
+        </a:ln>
+        <a:ln w="25400" cap="flat" cmpd="sng" algn="ctr">
+          <a:solidFill>
+            <a:schemeClr val="phClr"/>
+          </a:solidFill>
+          <a:prstDash val="solid"/>
+          <a:miter lim="800000"/>
+        </a:ln>
+      </a:lnStyleLst>
+      <a:effectStyleLst>
+        <a:effectStyle>
+          <a:effectLst/>
+        </a:effectStyle>
+        <a:effectStyle>
+          <a:effectLst/>
+        </a:effectStyle>
+        <a:effectStyle>
+          <a:effectLst>
+            <a:outerShdw blurRad="57150" dist="19050" dir="5400000" algn="ctr" rotWithShape="0">
+              <a:srgbClr val="000000">
+                <a:alpha val="63000"/>
+              </a:srgbClr>
+            </a:outerShdw>
+          </a:effectLst>
+        </a:effectStyle>
+      </a:effectStyleLst>
+      <a:bgFillStyleLst>
+        <a:solidFill>
+          <a:schemeClr val="phClr"/>
+        </a:solidFill>
+        <a:solidFill>
+          <a:schemeClr val="phClr">
+            <a:tint val="95000"/>
+            <a:satMod val="170000"/>
+          </a:schemeClr>
+        </a:solidFill>
+        <a:gradFill rotWithShape="1">
+          <a:gsLst>
+            <a:gs pos="0">
+              <a:schemeClr val="phClr">
+                <a:tint val="93000"/>
+                <a:satMod val="150000"/>
+                <a:shade val="98000"/>
+                <a:lumMod val="102000"/>
+              </a:schemeClr>
+            </a:gs>
+            <a:gs pos="50000">
+              <a:schemeClr val="phClr">
+                <a:tint val="98000"/>
+                <a:satMod val="130000"/>
+                <a:shade val="90000"/>
+                <a:lumMod val="103000"/>
+              </a:schemeClr>
+            </a:gs>
+            <a:gs pos="100000">
+              <a:schemeClr val="phClr">
+                <a:shade val="63000"/>
+                <a:satMod val="120000"/>
+              </a:schemeClr>
+            </a:gs>
+          </a:gsLst>
+          <a:lin ang="5400000" scaled="0"/>
+        </a:gradFill>
+      </a:bgFillStyleLst>
+    </a:fmtScheme>
+  </a:themeElements>
+  <a:objectDefaults>
+    <a:lnDef>
+      <a:spPr/>
+      <a:bodyPr/>
+      <a:lstStyle/>
+      <a:style>
+        <a:lnRef idx="2">
+          <a:schemeClr val="accent1"/>
+        </a:lnRef>
+        <a:fillRef idx="0">
+          <a:schemeClr val="accent1"/>
+        </a:fillRef>
+        <a:effectRef idx="1">
+          <a:schemeClr val="accent1"/>
+        </a:effectRef>
+        <a:fontRef idx="minor">
+          <a:schemeClr val="tx1"/>
+        </a:fontRef>
+      </a:style>
+    </a:lnDef>
+  </a:objectDefaults>
+  <a:extraClrSchemeLst/>
+  <a:extLst>
+    <a:ext uri="{05A4C25C-085E-4340-85A3-A5531E510DB2}">
+      <thm15:themeFamily xmlns:thm15="http://schemas.microsoft.com/office/thememl/2012/main" name="Office Theme" id="{2E142A2C-CD16-42D6-873A-C26D2A0506FA}" vid="{1BDDFF52-6CD6-40A5-AB3C-68EB2F1E4D0A}"/>
+    </a:ext>
+  </a:extLst>
+</a:theme>
 </file>
--- a/From Architecture to Terraform Workshop.pptx
+++ b/From Architecture to Terraform Workshop.pptx
@@ -15135,7 +15135,7 @@
         </p:blipFill>
         <p:spPr>
           <a:xfrm>
-            <a:off x="7021657" y="1919402"/>
+            <a:off x="7021657" y="788431"/>
             <a:ext cx="4286250" cy="4286250"/>
           </a:xfrm>
           <a:prstGeom prst="rect">
@@ -15143,6 +15143,74 @@
           </a:prstGeom>
         </p:spPr>
       </p:pic>
+      <p:sp>
+        <p:nvSpPr>
+          <p:cNvPr id="24" name="TextBox 23">
+            <a:extLst>
+              <a:ext uri="{FF2B5EF4-FFF2-40B4-BE49-F238E27FC236}">
+                <a16:creationId xmlns:a16="http://schemas.microsoft.com/office/drawing/2014/main" id="{46460D67-0306-BDA9-64DB-74298F7D97E1}"/>
+              </a:ext>
+            </a:extLst>
+          </p:cNvPr>
+          <p:cNvSpPr txBox="1"/>
+          <p:nvPr/>
+        </p:nvSpPr>
+        <p:spPr>
+          <a:xfrm>
+            <a:off x="6565733" y="5303283"/>
+            <a:ext cx="5626267" cy="830997"/>
+          </a:xfrm>
+          <a:prstGeom prst="rect">
+            <a:avLst/>
+          </a:prstGeom>
+          <a:noFill/>
+        </p:spPr>
+        <p:txBody>
+          <a:bodyPr wrap="square">
+            <a:spAutoFit/>
+          </a:bodyPr>
+          <a:lstStyle/>
+          <a:p>
+            <a:r>
+              <a:rPr lang="en-US" sz="2400" dirty="0">
+                <a:solidFill>
+                  <a:schemeClr val="bg1"/>
+                </a:solidFill>
+              </a:rPr>
+              <a:t>github.com/</a:t>
+            </a:r>
+            <a:r>
+              <a:rPr lang="en-US" sz="2400" dirty="0" err="1">
+                <a:solidFill>
+                  <a:schemeClr val="bg1"/>
+                </a:solidFill>
+              </a:rPr>
+              <a:t>TaleLearnCode</a:t>
+            </a:r>
+            <a:r>
+              <a:rPr lang="en-US" sz="2400" dirty="0">
+                <a:solidFill>
+                  <a:schemeClr val="bg1"/>
+                </a:solidFill>
+              </a:rPr>
+              <a:t>/ </a:t>
+            </a:r>
+            <a:r>
+              <a:rPr lang="en-US" sz="2400" dirty="0" err="1">
+                <a:solidFill>
+                  <a:schemeClr val="bg1"/>
+                </a:solidFill>
+              </a:rPr>
+              <a:t>FromArchitectureToTerraformWorkshop</a:t>
+            </a:r>
+            <a:endParaRPr lang="en-US" sz="2400" dirty="0">
+              <a:solidFill>
+                <a:schemeClr val="bg1"/>
+              </a:solidFill>
+            </a:endParaRPr>
+          </a:p>
+        </p:txBody>
+      </p:sp>
     </p:spTree>
   </p:cSld>
   <p:clrMapOvr>
